--- a/slides-v2.pptx
+++ b/slides-v2.pptx
@@ -5,7 +5,7 @@
     <p:sldMasterId id="2147483648" r:id="rId1"/>
   </p:sldMasterIdLst>
   <p:notesMasterIdLst>
-    <p:notesMasterId r:id="rId24"/>
+    <p:notesMasterId r:id="rId27"/>
   </p:notesMasterIdLst>
   <p:sldIdLst>
     <p:sldId id="256" r:id="rId2"/>
@@ -30,6 +30,9 @@
     <p:sldId id="275" r:id="rId21"/>
     <p:sldId id="276" r:id="rId22"/>
     <p:sldId id="277" r:id="rId23"/>
+    <p:sldId id="278" r:id="rId24"/>
+    <p:sldId id="279" r:id="rId25"/>
+    <p:sldId id="280" r:id="rId26"/>
   </p:sldIdLst>
   <p:sldSz cx="9144000" cy="5143500" type="screen16x9"/>
   <p:notesSz cx="6858000" cy="9144000"/>
@@ -906,88 +909,6 @@
             <a:fld id="{18BDFEC3-8487-43E8-A154-7C12CBC1FFF2}" type="slidenum">
               <a:rPr lang="en-US"/>
               <a:t>12</a:t>
-            </a:fld>
-            <a:endParaRPr lang="en-US"/>
-          </a:p>
-        </p:txBody>
-      </p:sp>
-    </p:spTree>
-  </p:cSld>
-</p:notes>
-</file>
-
-<file path=ppt/notesSlides/notesSlide4.xml><?xml version="1.0" encoding="utf-8"?>
-<p:notes xmlns:a="http://schemas.openxmlformats.org/drawingml/2006/main" xmlns:r="http://schemas.openxmlformats.org/officeDocument/2006/relationships" xmlns:p="http://schemas.openxmlformats.org/presentationml/2006/main">
-  <p:cSld>
-    <p:spTree>
-      <p:nvGrpSpPr>
-        <p:cNvPr id="1" name=""/>
-        <p:cNvGrpSpPr/>
-        <p:nvPr/>
-      </p:nvGrpSpPr>
-      <p:grpSpPr>
-        <a:xfrm>
-          <a:off x="0" y="0"/>
-          <a:ext cx="0" cy="0"/>
-          <a:chOff x="0" y="0"/>
-          <a:chExt cx="0" cy="0"/>
-        </a:xfrm>
-      </p:grpSpPr>
-      <p:sp>
-        <p:nvSpPr>
-          <p:cNvPr id="2" name="Slide Image Placeholder 1"/>
-          <p:cNvSpPr>
-            <a:spLocks noGrp="1" noRot="1" noChangeAspect="1"/>
-          </p:cNvSpPr>
-          <p:nvPr>
-            <p:ph type="sldImg"/>
-          </p:nvPr>
-        </p:nvSpPr>
-        <p:spPr/>
-      </p:sp>
-      <p:sp>
-        <p:nvSpPr>
-          <p:cNvPr id="3" name="Notes Placeholder 2"/>
-          <p:cNvSpPr>
-            <a:spLocks noGrp="1"/>
-          </p:cNvSpPr>
-          <p:nvPr>
-            <p:ph type="body" idx="1"/>
-          </p:nvPr>
-        </p:nvSpPr>
-        <p:spPr/>
-        <p:txBody>
-          <a:bodyPr/>
-          <a:lstStyle/>
-          <a:p>
-            <a:pPr lvl="0" indent="0" marL="0">
-              <a:buNone/>
-            </a:pPr>
-            <a:r>
-              <a:rPr/>
-              <a:t>for now, I hope my design for transparent helper functions is useful</a:t>
-            </a:r>
-          </a:p>
-        </p:txBody>
-      </p:sp>
-      <p:sp>
-        <p:nvSpPr>
-          <p:cNvPr id="4" name="Slide Number Placeholder 3"/>
-          <p:cNvSpPr>
-            <a:spLocks noGrp="1"/>
-          </p:cNvSpPr>
-          <p:nvPr>
-            <p:ph type="sldNum" sz="quarter" idx="10"/>
-          </p:nvPr>
-        </p:nvSpPr>
-        <p:spPr/>
-        <p:txBody>
-          <a:bodyPr/>
-          <a:lstStyle/>
-          <a:p>
-            <a:fld id="{18BDFEC3-8487-43E8-A154-7C12CBC1FFF2}" type="slidenum">
-              <a:rPr lang="en-US"/>
-              <a:t>21</a:t>
             </a:fld>
             <a:endParaRPr lang="en-US"/>
           </a:p>
@@ -9607,7 +9528,7 @@
             </a:pPr>
             <a:r>
               <a:rPr/>
-              <a:t>SEPARATE into MODULAR INTERNALS</a:t>
+              <a:t>SEPARATE into modular internals</a:t>
             </a:r>
           </a:p>
         </p:txBody>
@@ -10433,36 +10354,27 @@
           </a:p>
         </p:txBody>
       </p:sp>
-      <p:pic>
-        <p:nvPicPr>
-          <p:cNvPr descr="assets/notability-v2/transparent-helper-left.png" id="0" name="Picture 1"/>
-          <p:cNvPicPr>
-            <a:picLocks noGrp="1" noChangeAspect="1"/>
-          </p:cNvPicPr>
-          <p:nvPr/>
-        </p:nvPicPr>
-        <p:blipFill>
-          <a:blip r:embed="rId2"/>
-          <a:stretch>
-            <a:fillRect/>
-          </a:stretch>
-        </p:blipFill>
-        <p:spPr bwMode="auto">
-          <a:xfrm>
-            <a:off x="2184400" y="1193800"/>
-            <a:ext cx="4775200" cy="3390900"/>
-          </a:xfrm>
-          <a:prstGeom prst="rect">
-            <a:avLst/>
-          </a:prstGeom>
-          <a:noFill/>
-          <a:ln w="9525">
-            <a:noFill/>
-            <a:headEnd/>
-            <a:tailEnd/>
-          </a:ln>
-        </p:spPr>
-      </p:pic>
+      <p:sp>
+        <p:nvSpPr>
+          <p:cNvPr id="3" name="Content Placeholder 2"/>
+          <p:cNvSpPr>
+            <a:spLocks noGrp="1"/>
+          </p:cNvSpPr>
+          <p:nvPr>
+            <p:ph idx="1"/>
+          </p:nvPr>
+        </p:nvSpPr>
+        <p:spPr/>
+        <p:txBody>
+          <a:bodyPr/>
+          <a:lstStyle/>
+          <a:p>
+            <a:pPr lvl="0" indent="0" marL="0">
+              <a:buNone/>
+            </a:pPr>
+          </a:p>
+        </p:txBody>
+      </p:sp>
     </p:spTree>
   </p:cSld>
 </p:sld>
@@ -10485,6 +10397,31 @@
           <a:chExt cx="0" cy="0"/>
         </a:xfrm>
       </p:grpSpPr>
+      <p:sp>
+        <p:nvSpPr>
+          <p:cNvPr id="2" name="Title 1"/>
+          <p:cNvSpPr>
+            <a:spLocks noGrp="1"/>
+          </p:cNvSpPr>
+          <p:nvPr>
+            <p:ph type="title"/>
+          </p:nvPr>
+        </p:nvSpPr>
+        <p:spPr/>
+        <p:txBody>
+          <a:bodyPr/>
+          <a:lstStyle/>
+          <a:p>
+            <a:pPr lvl="0" indent="0" marL="0">
+              <a:buNone/>
+            </a:pPr>
+            <a:r>
+              <a:rPr/>
+              <a:t>EXPOSE defaults as list arguments</a:t>
+            </a:r>
+          </a:p>
+        </p:txBody>
+      </p:sp>
       <p:sp>
         <p:nvSpPr>
           <p:cNvPr id="3" name="Content Placeholder 2"/>
@@ -11370,6 +11307,42 @@
           <a:chExt cx="0" cy="0"/>
         </a:xfrm>
       </p:grpSpPr>
+      <p:sp>
+        <p:nvSpPr>
+          <p:cNvPr id="2" name="Title 1"/>
+          <p:cNvSpPr>
+            <a:spLocks noGrp="1"/>
+          </p:cNvSpPr>
+          <p:nvPr>
+            <p:ph type="title"/>
+          </p:nvPr>
+        </p:nvSpPr>
+        <p:spPr>
+          <a:xfrm>
+            <a:off x="457201" y="204787"/>
+            <a:ext cx="3008313" cy="871538"/>
+          </a:xfrm>
+        </p:spPr>
+        <p:txBody>
+          <a:bodyPr/>
+          <a:lstStyle/>
+          <a:p>
+            <a:pPr lvl="0" indent="0" marL="0">
+              <a:buNone/>
+            </a:pPr>
+            <a:r>
+              <a:rPr/>
+              <a:t>From </a:t>
+            </a:r>
+            <a:r>
+              <a:rPr>
+                <a:latin typeface="Courier"/>
+              </a:rPr>
+              <a:t>autoplot()</a:t>
+            </a:r>
+          </a:p>
+        </p:txBody>
+      </p:sp>
       <p:sp>
         <p:nvSpPr>
           <p:cNvPr id="4" name="Text Placeholder 3"/>
@@ -11613,6 +11586,46 @@
           <a:chExt cx="0" cy="0"/>
         </a:xfrm>
       </p:grpSpPr>
+      <p:sp>
+        <p:nvSpPr>
+          <p:cNvPr id="2" name="Title 1"/>
+          <p:cNvSpPr>
+            <a:spLocks noGrp="1"/>
+          </p:cNvSpPr>
+          <p:nvPr>
+            <p:ph type="title"/>
+          </p:nvPr>
+        </p:nvSpPr>
+        <p:spPr>
+          <a:xfrm>
+            <a:off x="457201" y="204787"/>
+            <a:ext cx="3008313" cy="871538"/>
+          </a:xfrm>
+        </p:spPr>
+        <p:txBody>
+          <a:bodyPr/>
+          <a:lstStyle/>
+          <a:p>
+            <a:pPr lvl="0" indent="0" marL="0">
+              <a:buNone/>
+            </a:pPr>
+            <a:r>
+              <a:rPr/>
+              <a:t>From </a:t>
+            </a:r>
+            <a:r>
+              <a:rPr>
+                <a:latin typeface="Courier"/>
+              </a:rPr>
+              <a:t>autoplot()</a:t>
+            </a:r>
+            <a:r>
+              <a:rPr/>
+              <a:t> to customisation!</a:t>
+            </a:r>
+          </a:p>
+        </p:txBody>
+      </p:sp>
       <p:sp>
         <p:nvSpPr>
           <p:cNvPr id="4" name="Text Placeholder 3"/>
@@ -12337,45 +12350,210 @@
           <a:bodyPr/>
           <a:lstStyle/>
           <a:p>
-            <a:pPr lvl="0" indent="0" marL="0">
-              <a:buNone/>
-            </a:pPr>
-            <a:r>
-              <a:rPr b="1"/>
-              <a:t>Explain:</a:t>
+            <a:pPr lvl="0"/>
+            <a:r>
+              <a:rPr/>
+              <a:t>Data preparation steps</a:t>
             </a:r>
           </a:p>
           <a:p>
-            <a:pPr lvl="0" indent="-342900" marL="342900">
-              <a:buAutoNum type="arabicPeriod"/>
-            </a:pPr>
+            <a:pPr lvl="0"/>
             <a:r>
               <a:rPr/>
-              <a:t>Data preparation steps</a:t>
+              <a:t>Fixed variables and aesthetics</a:t>
             </a:r>
           </a:p>
           <a:p>
-            <a:pPr lvl="0" indent="-342900" marL="342900">
-              <a:buAutoNum type="arabicPeriod"/>
-            </a:pPr>
+            <a:pPr lvl="0"/>
             <a:r>
               <a:rPr/>
-              <a:t>How the ggplot2 recipe works</a:t>
-            </a:r>
-          </a:p>
-          <a:p>
-            <a:pPr lvl="0" indent="-342900" marL="342900">
-              <a:buAutoNum type="arabicPeriod"/>
-            </a:pPr>
-            <a:r>
-              <a:rPr/>
-              <a:t>How to modify the plot</a:t>
+              <a:t>Customisation via arguments</a:t>
             </a:r>
           </a:p>
         </p:txBody>
       </p:sp>
     </p:spTree>
   </p:cSld>
+  <p:timing>
+    <p:tnLst>
+      <p:par>
+        <p:cTn id="1" dur="indefinite" restart="never" nodeType="tmRoot">
+          <p:childTnLst>
+            <p:seq concurrent="1" nextAc="seek">
+              <p:cTn id="2" dur="indefinite" nodeType="mainSeq">
+                <p:childTnLst>
+                  <p:par>
+                    <p:cTn id="3" fill="hold">
+                      <p:stCondLst>
+                        <p:cond delay="indefinite"/>
+                      </p:stCondLst>
+                      <p:childTnLst>
+                        <p:par>
+                          <p:cTn id="4" fill="hold">
+                            <p:stCondLst>
+                              <p:cond delay="0"/>
+                            </p:stCondLst>
+                            <p:childTnLst>
+                              <p:par>
+                                <p:cTn id="5" presetID="1" presetClass="entr" presetSubtype="0" fill="hold" grpId="0" nodeType="clickEffect">
+                                  <p:stCondLst>
+                                    <p:cond delay="0"/>
+                                  </p:stCondLst>
+                                  <p:childTnLst>
+                                    <p:set>
+                                      <p:cBhvr>
+                                        <p:cTn id="6" dur="1" fill="hold">
+                                          <p:stCondLst>
+                                            <p:cond delay="0"/>
+                                          </p:stCondLst>
+                                        </p:cTn>
+                                        <p:tgtEl>
+                                          <p:spTgt spid="4">
+                                            <p:txEl>
+                                              <p:pRg st="0" end="0"/>
+                                            </p:txEl>
+                                          </p:spTgt>
+                                        </p:tgtEl>
+                                        <p:attrNameLst>
+                                          <p:attrName>style.visibility</p:attrName>
+                                        </p:attrNameLst>
+                                      </p:cBhvr>
+                                      <p:to>
+                                        <p:strVal val="visible"/>
+                                      </p:to>
+                                    </p:set>
+                                  </p:childTnLst>
+                                </p:cTn>
+                              </p:par>
+                            </p:childTnLst>
+                          </p:cTn>
+                        </p:par>
+                      </p:childTnLst>
+                    </p:cTn>
+                  </p:par>
+                  <p:par>
+                    <p:cTn id="7" fill="hold">
+                      <p:stCondLst>
+                        <p:cond delay="indefinite"/>
+                      </p:stCondLst>
+                      <p:childTnLst>
+                        <p:par>
+                          <p:cTn id="8" fill="hold">
+                            <p:stCondLst>
+                              <p:cond delay="0"/>
+                            </p:stCondLst>
+                            <p:childTnLst>
+                              <p:par>
+                                <p:cTn id="9" presetID="1" presetClass="entr" presetSubtype="0" fill="hold" grpId="0" nodeType="clickEffect">
+                                  <p:stCondLst>
+                                    <p:cond delay="0"/>
+                                  </p:stCondLst>
+                                  <p:childTnLst>
+                                    <p:set>
+                                      <p:cBhvr>
+                                        <p:cTn id="10" dur="1" fill="hold">
+                                          <p:stCondLst>
+                                            <p:cond delay="0"/>
+                                          </p:stCondLst>
+                                        </p:cTn>
+                                        <p:tgtEl>
+                                          <p:spTgt spid="4">
+                                            <p:txEl>
+                                              <p:pRg st="1" end="1"/>
+                                            </p:txEl>
+                                          </p:spTgt>
+                                        </p:tgtEl>
+                                        <p:attrNameLst>
+                                          <p:attrName>style.visibility</p:attrName>
+                                        </p:attrNameLst>
+                                      </p:cBhvr>
+                                      <p:to>
+                                        <p:strVal val="visible"/>
+                                      </p:to>
+                                    </p:set>
+                                  </p:childTnLst>
+                                </p:cTn>
+                              </p:par>
+                            </p:childTnLst>
+                          </p:cTn>
+                        </p:par>
+                      </p:childTnLst>
+                    </p:cTn>
+                  </p:par>
+                  <p:par>
+                    <p:cTn id="11" fill="hold">
+                      <p:stCondLst>
+                        <p:cond delay="indefinite"/>
+                      </p:stCondLst>
+                      <p:childTnLst>
+                        <p:par>
+                          <p:cTn id="12" fill="hold">
+                            <p:stCondLst>
+                              <p:cond delay="0"/>
+                            </p:stCondLst>
+                            <p:childTnLst>
+                              <p:par>
+                                <p:cTn id="13" presetID="1" presetClass="entr" presetSubtype="0" fill="hold" grpId="0" nodeType="clickEffect">
+                                  <p:stCondLst>
+                                    <p:cond delay="0"/>
+                                  </p:stCondLst>
+                                  <p:childTnLst>
+                                    <p:set>
+                                      <p:cBhvr>
+                                        <p:cTn id="14" dur="1" fill="hold">
+                                          <p:stCondLst>
+                                            <p:cond delay="0"/>
+                                          </p:stCondLst>
+                                        </p:cTn>
+                                        <p:tgtEl>
+                                          <p:spTgt spid="4">
+                                            <p:txEl>
+                                              <p:pRg st="2" end="2"/>
+                                            </p:txEl>
+                                          </p:spTgt>
+                                        </p:tgtEl>
+                                        <p:attrNameLst>
+                                          <p:attrName>style.visibility</p:attrName>
+                                        </p:attrNameLst>
+                                      </p:cBhvr>
+                                      <p:to>
+                                        <p:strVal val="visible"/>
+                                      </p:to>
+                                    </p:set>
+                                  </p:childTnLst>
+                                </p:cTn>
+                              </p:par>
+                            </p:childTnLst>
+                          </p:cTn>
+                        </p:par>
+                      </p:childTnLst>
+                    </p:cTn>
+                  </p:par>
+                </p:childTnLst>
+              </p:cTn>
+              <p:prevCondLst>
+                <p:cond evt="onPrev" delay="0">
+                  <p:tgtEl>
+                    <p:sldTgt/>
+                  </p:tgtEl>
+                </p:cond>
+              </p:prevCondLst>
+              <p:nextCondLst>
+                <p:cond evt="onNext" delay="0">
+                  <p:tgtEl>
+                    <p:sldTgt/>
+                  </p:tgtEl>
+                </p:cond>
+              </p:nextCondLst>
+            </p:seq>
+          </p:childTnLst>
+        </p:cTn>
+      </p:par>
+    </p:tnLst>
+    <p:bldLst>
+      <p:bldP spid="4" grpId="0" uiExpand="1" build="p"/>
+    </p:bldLst>
+  </p:timing>
 </p:sld>
 </file>
 
@@ -12398,30 +12576,670 @@
       </p:grpSpPr>
       <p:sp>
         <p:nvSpPr>
-          <p:cNvPr id="2" name="Title 1"/>
+          <p:cNvPr id="3" name="Content Placeholder 2"/>
           <p:cNvSpPr>
             <a:spLocks noGrp="1"/>
           </p:cNvSpPr>
           <p:nvPr>
-            <p:ph type="title"/>
+            <p:ph idx="1"/>
           </p:nvPr>
         </p:nvSpPr>
-        <p:spPr>
-          <a:xfrm>
-            <a:off x="722313" y="3305176"/>
-            <a:ext cx="7772400" cy="1021556"/>
-          </a:xfrm>
-        </p:spPr>
+        <p:spPr/>
         <p:txBody>
           <a:bodyPr/>
           <a:lstStyle/>
           <a:p>
-            <a:pPr lvl="0" indent="0" marL="0">
+            <a:pPr lvl="0" indent="0">
               <a:buNone/>
             </a:pPr>
             <a:r>
-              <a:rPr/>
-              <a:t>Reusing ggplot2 happily ever after?</a:t>
+              <a:rPr>
+                <a:solidFill>
+                  <a:srgbClr val="5E5E5E"/>
+                </a:solidFill>
+                <a:latin typeface="Courier"/>
+              </a:rPr>
+              <a:t>#' Make Monthly Calendar Facets</a:t>
+            </a:r>
+            <a:br/>
+            <a:r>
+              <a:rPr>
+                <a:solidFill>
+                  <a:srgbClr val="5E5E5E"/>
+                </a:solidFill>
+                <a:latin typeface="Courier"/>
+              </a:rPr>
+              <a:t>#'</a:t>
+            </a:r>
+            <a:br/>
+            <a:r>
+              <a:rPr>
+                <a:solidFill>
+                  <a:srgbClr val="5E5E5E"/>
+                </a:solidFill>
+                <a:latin typeface="Courier"/>
+              </a:rPr>
+              <a:t>#' Generates calendar with monthly facets by:</a:t>
+            </a:r>
+            <a:br/>
+            <a:r>
+              <a:rPr>
+                <a:solidFill>
+                  <a:srgbClr val="5E5E5E"/>
+                </a:solidFill>
+                <a:latin typeface="Courier"/>
+              </a:rPr>
+              <a:t>#' - Padding event list with any missing days via `fill_missing_units()`</a:t>
+            </a:r>
+            <a:br/>
+            <a:r>
+              <a:rPr>
+                <a:solidFill>
+                  <a:srgbClr val="5E5E5E"/>
+                </a:solidFill>
+                <a:latin typeface="Courier"/>
+              </a:rPr>
+              <a:t>#' - Calculating variables for calendar layout via `calc_calendar_vars()`</a:t>
+            </a:r>
+            <a:br/>
+            <a:r>
+              <a:rPr>
+                <a:solidFill>
+                  <a:srgbClr val="5E5E5E"/>
+                </a:solidFill>
+                <a:latin typeface="Courier"/>
+              </a:rPr>
+              <a:t>#' - Returning a ggplot object as per Details.</a:t>
+            </a:r>
+            <a:br/>
+            <a:r>
+              <a:rPr>
+                <a:solidFill>
+                  <a:srgbClr val="5E5E5E"/>
+                </a:solidFill>
+                <a:latin typeface="Courier"/>
+              </a:rPr>
+              <a:t>#'</a:t>
+            </a:r>
+            <a:br/>
+            <a:r>
+              <a:rPr>
+                <a:solidFill>
+                  <a:srgbClr val="5E5E5E"/>
+                </a:solidFill>
+                <a:latin typeface="Courier"/>
+              </a:rPr>
+              <a:t>#' Returns a ggplot with the following fixed components</a:t>
+            </a:r>
+            <a:br/>
+            <a:r>
+              <a:rPr>
+                <a:solidFill>
+                  <a:srgbClr val="5E5E5E"/>
+                </a:solidFill>
+                <a:latin typeface="Courier"/>
+              </a:rPr>
+              <a:t>#' using calculated layout variables:</a:t>
+            </a:r>
+            <a:br/>
+            <a:r>
+              <a:rPr>
+                <a:solidFill>
+                  <a:srgbClr val="5E5E5E"/>
+                </a:solidFill>
+                <a:latin typeface="Courier"/>
+              </a:rPr>
+              <a:t>#' - `aes()` mapping:</a:t>
+            </a:r>
+            <a:br/>
+            <a:r>
+              <a:rPr>
+                <a:solidFill>
+                  <a:srgbClr val="5E5E5E"/>
+                </a:solidFill>
+                <a:latin typeface="Courier"/>
+              </a:rPr>
+              <a:t>#'    - `x` is day of week,</a:t>
+            </a:r>
+            <a:br/>
+            <a:r>
+              <a:rPr>
+                <a:solidFill>
+                  <a:srgbClr val="5E5E5E"/>
+                </a:solidFill>
+                <a:latin typeface="Courier"/>
+              </a:rPr>
+              <a:t>#'    - `y` is week in month,</a:t>
+            </a:r>
+            <a:br/>
+            <a:r>
+              <a:rPr>
+                <a:solidFill>
+                  <a:srgbClr val="5E5E5E"/>
+                </a:solidFill>
+                <a:latin typeface="Courier"/>
+              </a:rPr>
+              <a:t>#'    - `label` is day of month</a:t>
+            </a:r>
+            <a:br/>
+            <a:r>
+              <a:rPr>
+                <a:solidFill>
+                  <a:srgbClr val="5E5E5E"/>
+                </a:solidFill>
+                <a:latin typeface="Courier"/>
+              </a:rPr>
+              <a:t>#' - `facet_wrap()` by month</a:t>
+            </a:r>
+            <a:br/>
+            <a:r>
+              <a:rPr>
+                <a:solidFill>
+                  <a:srgbClr val="5E5E5E"/>
+                </a:solidFill>
+                <a:latin typeface="Courier"/>
+              </a:rPr>
+              <a:t>#' - `labs()` to remove axis labels for calculated layout variables</a:t>
+            </a:r>
+            <a:br/>
+            <a:r>
+              <a:rPr>
+                <a:solidFill>
+                  <a:srgbClr val="5E5E5E"/>
+                </a:solidFill>
+                <a:latin typeface="Courier"/>
+              </a:rPr>
+              <a:t>#'</a:t>
+            </a:r>
+            <a:br/>
+            <a:r>
+              <a:rPr>
+                <a:solidFill>
+                  <a:srgbClr val="5E5E5E"/>
+                </a:solidFill>
+                <a:latin typeface="Courier"/>
+              </a:rPr>
+              <a:t>#' and default customisable components:</a:t>
+            </a:r>
+            <a:br/>
+            <a:r>
+              <a:rPr>
+                <a:solidFill>
+                  <a:srgbClr val="5E5E5E"/>
+                </a:solidFill>
+                <a:latin typeface="Courier"/>
+              </a:rPr>
+              <a:t>#' - `geom_tile()`, `geom_text()` to label each day which inherit calculated variables</a:t>
+            </a:r>
+            <a:br/>
+            <a:r>
+              <a:rPr>
+                <a:solidFill>
+                  <a:srgbClr val="5E5E5E"/>
+                </a:solidFill>
+                <a:latin typeface="Courier"/>
+              </a:rPr>
+              <a:t>#' - `scale_y_reverse()` to order day in month correctly</a:t>
+            </a:r>
+            <a:br/>
+            <a:r>
+              <a:rPr>
+                <a:solidFill>
+                  <a:srgbClr val="5E5E5E"/>
+                </a:solidFill>
+                <a:latin typeface="Courier"/>
+              </a:rPr>
+              <a:t>#' - `scale_x_discrete()` to position weekday labels</a:t>
+            </a:r>
+            <a:br/>
+            <a:r>
+              <a:rPr>
+                <a:solidFill>
+                  <a:srgbClr val="5E5E5E"/>
+                </a:solidFill>
+                <a:latin typeface="Courier"/>
+              </a:rPr>
+              <a:t>#' - `coord_fixed()` to square each tile</a:t>
+            </a:r>
+            <a:br/>
+            <a:r>
+              <a:rPr>
+                <a:solidFill>
+                  <a:srgbClr val="5E5E5E"/>
+                </a:solidFill>
+                <a:latin typeface="Courier"/>
+              </a:rPr>
+              <a:t>#' - `theme_bw_tilecal()` to apply sensible theme defaults</a:t>
+            </a:r>
+            <a:br/>
+            <a:r>
+              <a:rPr>
+                <a:solidFill>
+                  <a:srgbClr val="5E5E5E"/>
+                </a:solidFill>
+                <a:latin typeface="Courier"/>
+              </a:rPr>
+              <a:t>#' </a:t>
+            </a:r>
+            <a:br/>
+            <a:r>
+              <a:rPr>
+                <a:solidFill>
+                  <a:srgbClr val="5E5E5E"/>
+                </a:solidFill>
+                <a:latin typeface="Courier"/>
+              </a:rPr>
+              <a:t>#' for the month facets: </a:t>
+            </a:r>
+            <a:br/>
+            <a:r>
+              <a:rPr>
+                <a:solidFill>
+                  <a:srgbClr val="5E5E5E"/>
+                </a:solidFill>
+                <a:latin typeface="Courier"/>
+              </a:rPr>
+              <a:t>#'  - `nrow` the number of month facet rows </a:t>
+            </a:r>
+            <a:br/>
+            <a:r>
+              <a:rPr>
+                <a:solidFill>
+                  <a:srgbClr val="5E5E5E"/>
+                </a:solidFill>
+                <a:latin typeface="Courier"/>
+              </a:rPr>
+              <a:t>#'  - or `ncol` the number of month facet columns</a:t>
+            </a:r>
+            <a:br/>
+            <a:r>
+              <a:rPr>
+                <a:solidFill>
+                  <a:srgbClr val="5E5E5E"/>
+                </a:solidFill>
+                <a:latin typeface="Courier"/>
+              </a:rPr>
+              <a:t>#'  - a labeller function for the monthly facet strip labels, see `label_yearmonth()`</a:t>
+            </a:r>
+            <a:br/>
+            <a:r>
+              <a:rPr>
+                <a:solidFill>
+                  <a:srgbClr val="5E5E5E"/>
+                </a:solidFill>
+                <a:latin typeface="Courier"/>
+              </a:rPr>
+              <a:t>#'  </a:t>
+            </a:r>
+            <a:br/>
+            <a:r>
+              <a:rPr>
+                <a:solidFill>
+                  <a:srgbClr val="5E5E5E"/>
+                </a:solidFill>
+                <a:latin typeface="Courier"/>
+              </a:rPr>
+              <a:t>#' To modify components alter the `.geom` and `.scale_coord`,</a:t>
+            </a:r>
+            <a:br/>
+            <a:r>
+              <a:rPr>
+                <a:solidFill>
+                  <a:srgbClr val="5E5E5E"/>
+                </a:solidFill>
+                <a:latin typeface="Courier"/>
+              </a:rPr>
+              <a:t>#' which inherit the calculate layout mapping by default</a:t>
+            </a:r>
+            <a:br/>
+            <a:r>
+              <a:rPr>
+                <a:solidFill>
+                  <a:srgbClr val="5E5E5E"/>
+                </a:solidFill>
+                <a:latin typeface="Courier"/>
+              </a:rPr>
+              <a:t>#' (via the ggplot2 `inherit.aes` argument).</a:t>
+            </a:r>
+            <a:br/>
+            <a:r>
+              <a:rPr>
+                <a:solidFill>
+                  <a:srgbClr val="5E5E5E"/>
+                </a:solidFill>
+                <a:latin typeface="Courier"/>
+              </a:rPr>
+              <a:t>#'</a:t>
+            </a:r>
+            <a:br/>
+            <a:r>
+              <a:rPr>
+                <a:solidFill>
+                  <a:srgbClr val="5E5E5E"/>
+                </a:solidFill>
+                <a:latin typeface="Courier"/>
+              </a:rPr>
+              <a:t>#' To additional components use the ggplot `+` function as normal,</a:t>
+            </a:r>
+            <a:br/>
+            <a:r>
+              <a:rPr>
+                <a:solidFill>
+                  <a:srgbClr val="5E5E5E"/>
+                </a:solidFill>
+                <a:latin typeface="Courier"/>
+              </a:rPr>
+              <a:t>#' or pass components to the `.other` argument.</a:t>
+            </a:r>
+            <a:br/>
+            <a:r>
+              <a:rPr>
+                <a:solidFill>
+                  <a:srgbClr val="5E5E5E"/>
+                </a:solidFill>
+                <a:latin typeface="Courier"/>
+              </a:rPr>
+              <a:t>#' This can be used to add interactive geoms (e.g. from `ggiraph`)</a:t>
+            </a:r>
+            <a:br/>
+            <a:r>
+              <a:rPr>
+                <a:solidFill>
+                  <a:srgbClr val="5E5E5E"/>
+                </a:solidFill>
+                <a:latin typeface="Courier"/>
+              </a:rPr>
+              <a:t>#'</a:t>
+            </a:r>
+            <a:br/>
+            <a:r>
+              <a:rPr>
+                <a:solidFill>
+                  <a:srgbClr val="5E5E5E"/>
+                </a:solidFill>
+                <a:latin typeface="Courier"/>
+              </a:rPr>
+              <a:t>#' To modify the theme, use the ggplot `+` function as normal,</a:t>
+            </a:r>
+            <a:br/>
+            <a:r>
+              <a:rPr>
+                <a:solidFill>
+                  <a:srgbClr val="5E5E5E"/>
+                </a:solidFill>
+                <a:latin typeface="Courier"/>
+              </a:rPr>
+              <a:t>#' or add additional elements to the list in `.theme`.</a:t>
+            </a:r>
+            <a:br/>
+            <a:r>
+              <a:rPr>
+                <a:solidFill>
+                  <a:srgbClr val="5E5E5E"/>
+                </a:solidFill>
+                <a:latin typeface="Courier"/>
+              </a:rPr>
+              <a:t>#'</a:t>
+            </a:r>
+            <a:br/>
+            <a:r>
+              <a:rPr>
+                <a:solidFill>
+                  <a:srgbClr val="5E5E5E"/>
+                </a:solidFill>
+                <a:latin typeface="Courier"/>
+              </a:rPr>
+              <a:t>#' To remove any of the optional components, set the argument to any empty `list()`</a:t>
+            </a:r>
+            <a:br/>
+            <a:r>
+              <a:rPr>
+                <a:solidFill>
+                  <a:srgbClr val="5E5E5E"/>
+                </a:solidFill>
+                <a:latin typeface="Courier"/>
+              </a:rPr>
+              <a:t>#'</a:t>
+            </a:r>
+            <a:br/>
+            <a:r>
+              <a:rPr>
+                <a:solidFill>
+                  <a:srgbClr val="5E5E5E"/>
+                </a:solidFill>
+                <a:latin typeface="Courier"/>
+              </a:rPr>
+              <a:t>#' @inheritParams ggplot2::facet_wrap</a:t>
+            </a:r>
+            <a:br/>
+            <a:r>
+              <a:rPr>
+                <a:solidFill>
+                  <a:srgbClr val="5E5E5E"/>
+                </a:solidFill>
+                <a:latin typeface="Courier"/>
+              </a:rPr>
+              <a:t>#' @inheritParams fill_missing_units</a:t>
+            </a:r>
+            <a:br/>
+            <a:r>
+              <a:rPr>
+                <a:solidFill>
+                  <a:srgbClr val="5E5E5E"/>
+                </a:solidFill>
+                <a:latin typeface="Courier"/>
+              </a:rPr>
+              <a:t>#' @inheritParams calc_calendar_vars</a:t>
+            </a:r>
+            <a:br/>
+            <a:r>
+              <a:rPr>
+                <a:solidFill>
+                  <a:srgbClr val="5E5E5E"/>
+                </a:solidFill>
+                <a:latin typeface="Courier"/>
+              </a:rPr>
+              <a:t>#' @param labeller A facet labeling function, for the calendar month titles, defaults to `label_yearmonth()`</a:t>
+            </a:r>
+            <a:br/>
+            <a:r>
+              <a:rPr>
+                <a:solidFill>
+                  <a:srgbClr val="5E5E5E"/>
+                </a:solidFill>
+                <a:latin typeface="Courier"/>
+              </a:rPr>
+              <a:t>#' @param .geom,.scale_coord,.theme,.other</a:t>
+            </a:r>
+            <a:br/>
+            <a:r>
+              <a:rPr>
+                <a:solidFill>
+                  <a:srgbClr val="5E5E5E"/>
+                </a:solidFill>
+                <a:latin typeface="Courier"/>
+              </a:rPr>
+              <a:t>#'    Customisable lists of ggplot2 components to add to the plot.</a:t>
+            </a:r>
+            <a:br/>
+            <a:r>
+              <a:rPr>
+                <a:solidFill>
+                  <a:srgbClr val="5E5E5E"/>
+                </a:solidFill>
+                <a:latin typeface="Courier"/>
+              </a:rPr>
+              <a:t>#'    An empty `list()` leaves the plot unmodified.</a:t>
+            </a:r>
+            <a:br/>
+            <a:r>
+              <a:rPr>
+                <a:solidFill>
+                  <a:srgbClr val="5E5E5E"/>
+                </a:solidFill>
+                <a:latin typeface="Courier"/>
+              </a:rPr>
+              <a:t>#'</a:t>
+            </a:r>
+            <a:br/>
+            <a:r>
+              <a:rPr>
+                <a:solidFill>
+                  <a:srgbClr val="5E5E5E"/>
+                </a:solidFill>
+                <a:latin typeface="Courier"/>
+              </a:rPr>
+              <a:t>#' @return ggplot</a:t>
+            </a:r>
+            <a:br/>
+            <a:r>
+              <a:rPr>
+                <a:solidFill>
+                  <a:srgbClr val="5E5E5E"/>
+                </a:solidFill>
+                <a:latin typeface="Courier"/>
+              </a:rPr>
+              <a:t>#' @export</a:t>
+            </a:r>
+            <a:br/>
+            <a:r>
+              <a:rPr>
+                <a:solidFill>
+                  <a:srgbClr val="5E5E5E"/>
+                </a:solidFill>
+                <a:latin typeface="Courier"/>
+              </a:rPr>
+              <a:t>#'</a:t>
+            </a:r>
+            <a:br/>
+            <a:r>
+              <a:rPr>
+                <a:solidFill>
+                  <a:srgbClr val="5E5E5E"/>
+                </a:solidFill>
+                <a:latin typeface="Courier"/>
+              </a:rPr>
+              <a:t>#' @examples</a:t>
+            </a:r>
+            <a:br/>
+            <a:r>
+              <a:rPr>
+                <a:solidFill>
+                  <a:srgbClr val="5E5E5E"/>
+                </a:solidFill>
+                <a:latin typeface="Courier"/>
+              </a:rPr>
+              <a:t>#' \dontrun{</a:t>
+            </a:r>
+            <a:br/>
+            <a:r>
+              <a:rPr>
+                <a:solidFill>
+                  <a:srgbClr val="5E5E5E"/>
+                </a:solidFill>
+                <a:latin typeface="Courier"/>
+              </a:rPr>
+              <a:t>#' library(dplyr)</a:t>
+            </a:r>
+            <a:br/>
+            <a:r>
+              <a:rPr>
+                <a:solidFill>
+                  <a:srgbClr val="5E5E5E"/>
+                </a:solidFill>
+                <a:latin typeface="Courier"/>
+              </a:rPr>
+              <a:t>#' library(ggplot2)</a:t>
+            </a:r>
+            <a:br/>
+            <a:r>
+              <a:rPr>
+                <a:solidFill>
+                  <a:srgbClr val="5E5E5E"/>
+                </a:solidFill>
+                <a:latin typeface="Courier"/>
+              </a:rPr>
+              <a:t>#' demo_events_gpt |&gt;</a:t>
+            </a:r>
+            <a:br/>
+            <a:r>
+              <a:rPr>
+                <a:solidFill>
+                  <a:srgbClr val="5E5E5E"/>
+                </a:solidFill>
+                <a:latin typeface="Courier"/>
+              </a:rPr>
+              <a:t>#'   reframe_events(startDate, endDate) |&gt;</a:t>
+            </a:r>
+            <a:br/>
+            <a:r>
+              <a:rPr>
+                <a:solidFill>
+                  <a:srgbClr val="5E5E5E"/>
+                </a:solidFill>
+                <a:latin typeface="Courier"/>
+              </a:rPr>
+              <a:t>#'   group_by(unit_date) |&gt;</a:t>
+            </a:r>
+            <a:br/>
+            <a:r>
+              <a:rPr>
+                <a:solidFill>
+                  <a:srgbClr val="5E5E5E"/>
+                </a:solidFill>
+                <a:latin typeface="Courier"/>
+              </a:rPr>
+              <a:t>#'   slice_min(order_by = duration) |&gt;</a:t>
+            </a:r>
+            <a:br/>
+            <a:r>
+              <a:rPr>
+                <a:solidFill>
+                  <a:srgbClr val="5E5E5E"/>
+                </a:solidFill>
+                <a:latin typeface="Courier"/>
+              </a:rPr>
+              <a:t>#'   gg_facet_wrap_months(unit_date, </a:t>
+            </a:r>
+            <a:br/>
+            <a:r>
+              <a:rPr>
+                <a:solidFill>
+                  <a:srgbClr val="5E5E5E"/>
+                </a:solidFill>
+                <a:latin typeface="Courier"/>
+              </a:rPr>
+              <a:t>#'                        labeller=label_yearmonth("%b %Y")) +</a:t>
+            </a:r>
+            <a:br/>
+            <a:r>
+              <a:rPr>
+                <a:solidFill>
+                  <a:srgbClr val="5E5E5E"/>
+                </a:solidFill>
+                <a:latin typeface="Courier"/>
+              </a:rPr>
+              <a:t>#'   geom_text(aes(label = event_emoji), nudge_y = -0.25, na.rm = TRUE) } </a:t>
+            </a:r>
+            <a:br/>
+            <a:r>
+              <a:rPr>
+                <a:solidFill>
+                  <a:srgbClr val="5E5E5E"/>
+                </a:solidFill>
+                <a:latin typeface="Courier"/>
+              </a:rPr>
+              <a:t>#' @importFrom ggplot2 geom_tile geom_text facet_wrap labs aes</a:t>
+            </a:r>
+            <a:br/>
+            <a:r>
+              <a:rPr>
+                <a:solidFill>
+                  <a:srgbClr val="5E5E5E"/>
+                </a:solidFill>
+                <a:latin typeface="Courier"/>
+              </a:rPr>
+              <a:t>#'     scale_y_reverse scale_x_discrete coord_fixed vars</a:t>
             </a:r>
           </a:p>
         </p:txBody>
@@ -12473,7 +13291,7 @@
             </a:pPr>
             <a:r>
               <a:rPr/>
-              <a:t>The Backstory: calendars &amp; ggplot2</a:t>
+              <a:t>ggplot2 &amp; calendars?</a:t>
             </a:r>
           </a:p>
         </p:txBody>
@@ -12500,6 +13318,36 @@
           <a:chExt cx="0" cy="0"/>
         </a:xfrm>
       </p:grpSpPr>
+      <p:sp>
+        <p:nvSpPr>
+          <p:cNvPr id="2" name="Title 1"/>
+          <p:cNvSpPr>
+            <a:spLocks noGrp="1"/>
+          </p:cNvSpPr>
+          <p:nvPr>
+            <p:ph type="title"/>
+          </p:nvPr>
+        </p:nvSpPr>
+        <p:spPr>
+          <a:xfrm>
+            <a:off x="722313" y="3305176"/>
+            <a:ext cx="7772400" cy="1021556"/>
+          </a:xfrm>
+        </p:spPr>
+        <p:txBody>
+          <a:bodyPr/>
+          <a:lstStyle/>
+          <a:p>
+            <a:pPr lvl="0" indent="0" marL="0">
+              <a:buNone/>
+            </a:pPr>
+            <a:r>
+              <a:rPr/>
+              <a:t>Reusing ggplot2 happily ever after?</a:t>
+            </a:r>
+          </a:p>
+        </p:txBody>
+      </p:sp>
     </p:spTree>
   </p:cSld>
 </p:sld>
@@ -12522,6 +13370,31 @@
           <a:chExt cx="0" cy="0"/>
         </a:xfrm>
       </p:grpSpPr>
+      <p:sp>
+        <p:nvSpPr>
+          <p:cNvPr id="2" name="Title 1"/>
+          <p:cNvSpPr>
+            <a:spLocks noGrp="1"/>
+          </p:cNvSpPr>
+          <p:nvPr>
+            <p:ph type="title"/>
+          </p:nvPr>
+        </p:nvSpPr>
+        <p:spPr/>
+        <p:txBody>
+          <a:bodyPr/>
+          <a:lstStyle/>
+          <a:p>
+            <a:pPr lvl="0" indent="0" marL="0">
+              <a:buNone/>
+            </a:pPr>
+            <a:r>
+              <a:rPr/>
+              <a:t>From custom code…</a:t>
+            </a:r>
+          </a:p>
+        </p:txBody>
+      </p:sp>
       <p:sp>
         <p:nvSpPr>
           <p:cNvPr id="3" name="Content Placeholder 2"/>
@@ -12585,19 +13458,19 @@
             </a:pPr>
             <a:r>
               <a:rPr/>
-              <a:t>Thanks for listening!</a:t>
+              <a:t>to transparent helpers…</a:t>
             </a:r>
           </a:p>
         </p:txBody>
       </p:sp>
       <p:sp>
         <p:nvSpPr>
-          <p:cNvPr id="3" name="Text Placeholder 2"/>
+          <p:cNvPr id="3" name="Content Placeholder 2"/>
           <p:cNvSpPr>
             <a:spLocks noGrp="1"/>
           </p:cNvSpPr>
           <p:nvPr>
-            <p:ph idx="1" type="body"/>
+            <p:ph idx="1"/>
           </p:nvPr>
         </p:nvSpPr>
         <p:spPr/>
@@ -12608,53 +13481,39 @@
             <a:pPr lvl="0" indent="0" marL="0">
               <a:buNone/>
             </a:pPr>
-            <a:r>
-              <a:rPr/>
-              <a:t>For more thoughts and ideas about reusing ggplot2 code:</a:t>
-            </a:r>
-          </a:p>
-          <a:p>
-            <a:pPr lvl="0" indent="0" marL="0">
-              <a:buNone/>
-            </a:pPr>
-            <a:r>
-              <a:rPr>
-                <a:hlinkClick r:id="rId2"/>
-              </a:rPr>
-              <a:t>https://github.com/cynthiahqy/positconf2026</a:t>
-            </a:r>
-          </a:p>
-          <a:p>
-            <a:pPr lvl="0"/>
-            <a:r>
-              <a:rPr/>
-              <a:t>blog post comparing calendar extensions</a:t>
-            </a:r>
-          </a:p>
-          <a:p>
-            <a:pPr lvl="0"/>
-            <a:r>
-              <a:rPr/>
-              <a:t>slides for this talk</a:t>
-            </a:r>
-          </a:p>
-          <a:p>
-            <a:pPr lvl="0"/>
-            <a:r>
-              <a:rPr/>
-              <a:t>(untested) ggplot2 refactoring skill</a:t>
-            </a:r>
           </a:p>
         </p:txBody>
       </p:sp>
+    </p:spTree>
+  </p:cSld>
+</p:sld>
+</file>
+
+<file path=ppt/slides/slide23.xml><?xml version="1.0" encoding="utf-8"?>
+<p:sld xmlns:a="http://schemas.openxmlformats.org/drawingml/2006/main" xmlns:r="http://schemas.openxmlformats.org/officeDocument/2006/relationships" xmlns:p="http://schemas.openxmlformats.org/presentationml/2006/main">
+  <p:cSld>
+    <p:spTree>
+      <p:nvGrpSpPr>
+        <p:cNvPr id="1" name=""/>
+        <p:cNvGrpSpPr/>
+        <p:nvPr/>
+      </p:nvGrpSpPr>
+      <p:grpSpPr>
+        <a:xfrm>
+          <a:off x="0" y="0"/>
+          <a:ext cx="0" cy="0"/>
+          <a:chOff x="0" y="0"/>
+          <a:chExt cx="0" cy="0"/>
+        </a:xfrm>
+      </p:grpSpPr>
       <p:sp>
         <p:nvSpPr>
-          <p:cNvPr id="5" name="Text Placeholder 4"/>
+          <p:cNvPr id="2" name="Title 1"/>
           <p:cNvSpPr>
             <a:spLocks noGrp="1"/>
           </p:cNvSpPr>
           <p:nvPr>
-            <p:ph idx="3" sz="quarter" type="body"/>
+            <p:ph type="title"/>
           </p:nvPr>
         </p:nvSpPr>
         <p:spPr/>
@@ -12667,7 +13526,173 @@
             </a:pPr>
             <a:r>
               <a:rPr/>
-              <a:t>Please tell me about your ggplot2 reuse experiences!</a:t>
+              <a:t>and beyond?</a:t>
+            </a:r>
+          </a:p>
+        </p:txBody>
+      </p:sp>
+      <p:sp>
+        <p:nvSpPr>
+          <p:cNvPr id="3" name="Content Placeholder 2"/>
+          <p:cNvSpPr>
+            <a:spLocks noGrp="1"/>
+          </p:cNvSpPr>
+          <p:nvPr>
+            <p:ph idx="1"/>
+          </p:nvPr>
+        </p:nvSpPr>
+        <p:spPr/>
+        <p:txBody>
+          <a:bodyPr/>
+          <a:lstStyle/>
+          <a:p>
+            <a:pPr lvl="0" indent="0" marL="0">
+              <a:buNone/>
+            </a:pPr>
+          </a:p>
+        </p:txBody>
+      </p:sp>
+    </p:spTree>
+  </p:cSld>
+</p:sld>
+</file>
+
+<file path=ppt/slides/slide24.xml><?xml version="1.0" encoding="utf-8"?>
+<p:sld xmlns:a="http://schemas.openxmlformats.org/drawingml/2006/main" xmlns:r="http://schemas.openxmlformats.org/officeDocument/2006/relationships" xmlns:p="http://schemas.openxmlformats.org/presentationml/2006/main">
+  <p:cSld>
+    <p:spTree>
+      <p:nvGrpSpPr>
+        <p:cNvPr id="1" name=""/>
+        <p:cNvGrpSpPr/>
+        <p:nvPr/>
+      </p:nvGrpSpPr>
+      <p:grpSpPr>
+        <a:xfrm>
+          <a:off x="0" y="0"/>
+          <a:ext cx="0" cy="0"/>
+          <a:chOff x="0" y="0"/>
+          <a:chExt cx="0" cy="0"/>
+        </a:xfrm>
+      </p:grpSpPr>
+      <p:sp>
+        <p:nvSpPr>
+          <p:cNvPr id="2" name="Title 1"/>
+          <p:cNvSpPr>
+            <a:spLocks noGrp="1"/>
+          </p:cNvSpPr>
+          <p:nvPr>
+            <p:ph type="title"/>
+          </p:nvPr>
+        </p:nvSpPr>
+        <p:spPr/>
+        <p:txBody>
+          <a:bodyPr/>
+          <a:lstStyle/>
+          <a:p>
+            <a:pPr lvl="0" indent="0" marL="0">
+              <a:buNone/>
+            </a:pPr>
+            <a:r>
+              <a:rPr/>
+              <a:t>Stay calm, and…</a:t>
+            </a:r>
+          </a:p>
+        </p:txBody>
+      </p:sp>
+      <p:sp>
+        <p:nvSpPr>
+          <p:cNvPr id="3" name="Content Placeholder 2"/>
+          <p:cNvSpPr>
+            <a:spLocks noGrp="1"/>
+          </p:cNvSpPr>
+          <p:nvPr>
+            <p:ph idx="1"/>
+          </p:nvPr>
+        </p:nvSpPr>
+        <p:spPr/>
+        <p:txBody>
+          <a:bodyPr/>
+          <a:lstStyle/>
+          <a:p>
+            <a:pPr lvl="0" indent="0" marL="0">
+              <a:buNone/>
+            </a:pPr>
+          </a:p>
+        </p:txBody>
+      </p:sp>
+    </p:spTree>
+  </p:cSld>
+</p:sld>
+</file>
+
+<file path=ppt/slides/slide25.xml><?xml version="1.0" encoding="utf-8"?>
+<p:sld xmlns:a="http://schemas.openxmlformats.org/drawingml/2006/main" xmlns:r="http://schemas.openxmlformats.org/officeDocument/2006/relationships" xmlns:p="http://schemas.openxmlformats.org/presentationml/2006/main">
+  <p:cSld>
+    <p:spTree>
+      <p:nvGrpSpPr>
+        <p:cNvPr id="1" name=""/>
+        <p:cNvGrpSpPr/>
+        <p:nvPr/>
+      </p:nvGrpSpPr>
+      <p:grpSpPr>
+        <a:xfrm>
+          <a:off x="0" y="0"/>
+          <a:ext cx="0" cy="0"/>
+          <a:chOff x="0" y="0"/>
+          <a:chExt cx="0" cy="0"/>
+        </a:xfrm>
+      </p:grpSpPr>
+      <p:sp>
+        <p:nvSpPr>
+          <p:cNvPr id="2" name="Title 1"/>
+          <p:cNvSpPr>
+            <a:spLocks noGrp="1"/>
+          </p:cNvSpPr>
+          <p:nvPr>
+            <p:ph type="title"/>
+          </p:nvPr>
+        </p:nvSpPr>
+        <p:spPr>
+          <a:xfrm>
+            <a:off x="457201" y="204787"/>
+            <a:ext cx="3008313" cy="871538"/>
+          </a:xfrm>
+        </p:spPr>
+        <p:txBody>
+          <a:bodyPr/>
+          <a:lstStyle/>
+          <a:p>
+            <a:pPr lvl="0" indent="0" marL="0">
+              <a:buNone/>
+            </a:pPr>
+            <a:r>
+              <a:rPr/>
+              <a:t>Thanks for listening!</a:t>
+            </a:r>
+          </a:p>
+        </p:txBody>
+      </p:sp>
+      <p:sp>
+        <p:nvSpPr>
+          <p:cNvPr id="4" name="Text Placeholder 3"/>
+          <p:cNvSpPr>
+            <a:spLocks noGrp="1"/>
+          </p:cNvSpPr>
+          <p:nvPr>
+            <p:ph idx="2" sz="half" type="body"/>
+          </p:nvPr>
+        </p:nvSpPr>
+        <p:spPr/>
+        <p:txBody>
+          <a:bodyPr/>
+          <a:lstStyle/>
+          <a:p>
+            <a:pPr lvl="0" indent="0" marL="0">
+              <a:buNone/>
+            </a:pPr>
+            <a:r>
+              <a:rPr/>
+              <a:t>📣 Tell me about your ggplot2 reuse experiences!</a:t>
             </a:r>
           </a:p>
         </p:txBody>
@@ -12681,15 +13706,15 @@
           <p:nvPr/>
         </p:nvPicPr>
         <p:blipFill>
-          <a:blip r:embed="rId3"/>
+          <a:blip r:embed="rId2"/>
           <a:stretch>
             <a:fillRect/>
           </a:stretch>
         </p:blipFill>
         <p:spPr bwMode="auto">
           <a:xfrm>
-            <a:off x="5181600" y="1625600"/>
-            <a:ext cx="2959100" cy="2959100"/>
+            <a:off x="4191000" y="203200"/>
+            <a:ext cx="3873500" cy="3873500"/>
           </a:xfrm>
           <a:prstGeom prst="rect">
             <a:avLst/>
@@ -12702,6 +13727,38 @@
           </a:ln>
         </p:spPr>
       </p:pic>
+      <p:sp>
+        <p:nvSpPr>
+          <p:cNvPr id="1" name="TextBox 3"/>
+          <p:cNvSpPr txBox="1"/>
+          <p:nvPr>
+            <p:ph idx="1"/>
+          </p:nvPr>
+        </p:nvSpPr>
+        <p:spPr>
+          <a:xfrm>
+            <a:off x="3568700" y="4076700"/>
+            <a:ext cx="5105400" cy="508000"/>
+          </a:xfrm>
+          <a:prstGeom prst="rect">
+            <a:avLst/>
+          </a:prstGeom>
+          <a:noFill/>
+        </p:spPr>
+        <p:txBody>
+          <a:bodyPr/>
+          <a:lstStyle/>
+          <a:p>
+            <a:pPr lvl="0" indent="0" marL="0" algn="ctr">
+              <a:buNone/>
+            </a:pPr>
+            <a:r>
+              <a:rPr/>
+              <a:t>cynthiahqy.com/survey</a:t>
+            </a:r>
+          </a:p>
+        </p:txBody>
+      </p:sp>
     </p:spTree>
   </p:cSld>
 </p:sld>
@@ -12840,13 +13897,10 @@
           <a:lstStyle/>
           <a:p>
             <a:pPr lvl="0" indent="0" marL="0">
-              <a:spcBef>
-                <a:spcPts val="3000"/>
-              </a:spcBef>
               <a:buNone/>
             </a:pPr>
             <a:r>
-              <a:rPr b="1">
+              <a:rPr>
                 <a:latin typeface="Courier"/>
               </a:rPr>
               <a:t>{calendR}</a:t>
@@ -12900,13 +13954,10 @@
           <a:lstStyle/>
           <a:p>
             <a:pPr lvl="0" indent="0" marL="0">
-              <a:spcBef>
-                <a:spcPts val="3000"/>
-              </a:spcBef>
               <a:buNone/>
             </a:pPr>
             <a:r>
-              <a:rPr b="1">
+              <a:rPr>
                 <a:latin typeface="Courier"/>
               </a:rPr>
               <a:t>{ggweekly}</a:t>
@@ -12960,13 +14011,10 @@
           <a:lstStyle/>
           <a:p>
             <a:pPr lvl="0" indent="0" marL="0">
-              <a:spcBef>
-                <a:spcPts val="3000"/>
-              </a:spcBef>
               <a:buNone/>
             </a:pPr>
             <a:r>
-              <a:rPr b="1">
+              <a:rPr>
                 <a:latin typeface="Courier"/>
               </a:rPr>
               <a:t>{ggcal}</a:t>
@@ -16472,8 +17520,8 @@
         </p:blipFill>
         <p:spPr bwMode="auto">
           <a:xfrm>
-            <a:off x="2247900" y="1193800"/>
-            <a:ext cx="4635500" cy="3390900"/>
+            <a:off x="457200" y="1409700"/>
+            <a:ext cx="4038600" cy="2946400"/>
           </a:xfrm>
           <a:prstGeom prst="rect">
             <a:avLst/>
@@ -16486,6 +17534,5064 @@
           </a:ln>
         </p:spPr>
       </p:pic>
+      <p:sp>
+        <p:nvSpPr>
+          <p:cNvPr id="4" name="Content Placeholder 3"/>
+          <p:cNvSpPr>
+            <a:spLocks noGrp="1"/>
+          </p:cNvSpPr>
+          <p:nvPr>
+            <p:ph idx="2" sz="half"/>
+          </p:nvPr>
+        </p:nvSpPr>
+        <p:spPr/>
+        <p:txBody>
+          <a:bodyPr/>
+          <a:lstStyle/>
+          <a:p>
+            <a:pPr lvl="0" indent="0">
+              <a:buNone/>
+            </a:pPr>
+            <a:r>
+              <a:rPr>
+                <a:solidFill>
+                  <a:srgbClr val="5E5E5E"/>
+                </a:solidFill>
+                <a:latin typeface="Courier"/>
+              </a:rPr>
+              <a:t># source(here::here("_utilities/travel_dates_load.R"))</a:t>
+            </a:r>
+            <a:br/>
+            <a:r>
+              <a:rPr>
+                <a:solidFill>
+                  <a:srgbClr val="4758AB"/>
+                </a:solidFill>
+                <a:latin typeface="Courier"/>
+              </a:rPr>
+              <a:t>library</a:t>
+            </a:r>
+            <a:r>
+              <a:rPr>
+                <a:solidFill>
+                  <a:srgbClr val="003B4F"/>
+                </a:solidFill>
+                <a:latin typeface="Courier"/>
+              </a:rPr>
+              <a:t>(ggplot2)</a:t>
+            </a:r>
+            <a:br/>
+            <a:r>
+              <a:rPr>
+                <a:solidFill>
+                  <a:srgbClr val="4758AB"/>
+                </a:solidFill>
+                <a:latin typeface="Courier"/>
+              </a:rPr>
+              <a:t>library</a:t>
+            </a:r>
+            <a:r>
+              <a:rPr>
+                <a:solidFill>
+                  <a:srgbClr val="003B4F"/>
+                </a:solidFill>
+                <a:latin typeface="Courier"/>
+              </a:rPr>
+              <a:t>(ggiraph)</a:t>
+            </a:r>
+            <a:br/>
+            <a:br/>
+            <a:r>
+              <a:rPr i="1">
+                <a:solidFill>
+                  <a:srgbClr val="5E5E5E"/>
+                </a:solidFill>
+                <a:latin typeface="Courier"/>
+              </a:rPr>
+              <a:t>## ---- daily-loc-prep ----</a:t>
+            </a:r>
+            <a:br/>
+            <a:br/>
+            <a:r>
+              <a:rPr i="1">
+                <a:solidFill>
+                  <a:srgbClr val="5E5E5E"/>
+                </a:solidFill>
+                <a:latin typeface="Courier"/>
+              </a:rPr>
+              <a:t>## expand dates: https://stackoverflow.com/a/54728153</a:t>
+            </a:r>
+            <a:br/>
+            <a:br/>
+            <a:r>
+              <a:rPr>
+                <a:solidFill>
+                  <a:srgbClr val="003B4F"/>
+                </a:solidFill>
+                <a:latin typeface="Courier"/>
+              </a:rPr>
+              <a:t>travel_days &lt;- travel_dates </a:t>
+            </a:r>
+            <a:r>
+              <a:rPr>
+                <a:solidFill>
+                  <a:srgbClr val="5E5E5E"/>
+                </a:solidFill>
+                <a:latin typeface="Courier"/>
+              </a:rPr>
+              <a:t>|&gt;</a:t>
+            </a:r>
+            <a:br/>
+            <a:r>
+              <a:rPr>
+                <a:solidFill>
+                  <a:srgbClr val="003B4F"/>
+                </a:solidFill>
+                <a:latin typeface="Courier"/>
+              </a:rPr>
+              <a:t>    </a:t>
+            </a:r>
+            <a:r>
+              <a:rPr>
+                <a:solidFill>
+                  <a:srgbClr val="4758AB"/>
+                </a:solidFill>
+                <a:latin typeface="Courier"/>
+              </a:rPr>
+              <a:t>mutate</a:t>
+            </a:r>
+            <a:r>
+              <a:rPr>
+                <a:solidFill>
+                  <a:srgbClr val="003B4F"/>
+                </a:solidFill>
+                <a:latin typeface="Courier"/>
+              </a:rPr>
+              <a:t>(</a:t>
+            </a:r>
+            <a:r>
+              <a:rPr>
+                <a:solidFill>
+                  <a:srgbClr val="657422"/>
+                </a:solidFill>
+                <a:latin typeface="Courier"/>
+              </a:rPr>
+              <a:t>nights =</a:t>
+            </a:r>
+            <a:r>
+              <a:rPr>
+                <a:solidFill>
+                  <a:srgbClr val="003B4F"/>
+                </a:solidFill>
+                <a:latin typeface="Courier"/>
+              </a:rPr>
+              <a:t> </a:t>
+            </a:r>
+            <a:r>
+              <a:rPr>
+                <a:solidFill>
+                  <a:srgbClr val="4758AB"/>
+                </a:solidFill>
+                <a:latin typeface="Courier"/>
+              </a:rPr>
+              <a:t>interval</a:t>
+            </a:r>
+            <a:r>
+              <a:rPr>
+                <a:solidFill>
+                  <a:srgbClr val="003B4F"/>
+                </a:solidFill>
+                <a:latin typeface="Courier"/>
+              </a:rPr>
+              <a:t>(startDate, endDate) </a:t>
+            </a:r>
+            <a:r>
+              <a:rPr>
+                <a:solidFill>
+                  <a:srgbClr val="5E5E5E"/>
+                </a:solidFill>
+                <a:latin typeface="Courier"/>
+              </a:rPr>
+              <a:t>/</a:t>
+            </a:r>
+            <a:r>
+              <a:rPr>
+                <a:solidFill>
+                  <a:srgbClr val="003B4F"/>
+                </a:solidFill>
+                <a:latin typeface="Courier"/>
+              </a:rPr>
+              <a:t> </a:t>
+            </a:r>
+            <a:r>
+              <a:rPr>
+                <a:solidFill>
+                  <a:srgbClr val="4758AB"/>
+                </a:solidFill>
+                <a:latin typeface="Courier"/>
+              </a:rPr>
+              <a:t>days</a:t>
+            </a:r>
+            <a:r>
+              <a:rPr>
+                <a:solidFill>
+                  <a:srgbClr val="003B4F"/>
+                </a:solidFill>
+                <a:latin typeface="Courier"/>
+              </a:rPr>
+              <a:t>(</a:t>
+            </a:r>
+            <a:r>
+              <a:rPr>
+                <a:solidFill>
+                  <a:srgbClr val="AD0000"/>
+                </a:solidFill>
+                <a:latin typeface="Courier"/>
+              </a:rPr>
+              <a:t>1</a:t>
+            </a:r>
+            <a:r>
+              <a:rPr>
+                <a:solidFill>
+                  <a:srgbClr val="003B4F"/>
+                </a:solidFill>
+                <a:latin typeface="Courier"/>
+              </a:rPr>
+              <a:t>)) </a:t>
+            </a:r>
+            <a:r>
+              <a:rPr>
+                <a:solidFill>
+                  <a:srgbClr val="5E5E5E"/>
+                </a:solidFill>
+                <a:latin typeface="Courier"/>
+              </a:rPr>
+              <a:t>|&gt;</a:t>
+            </a:r>
+            <a:br/>
+            <a:r>
+              <a:rPr>
+                <a:solidFill>
+                  <a:srgbClr val="003B4F"/>
+                </a:solidFill>
+                <a:latin typeface="Courier"/>
+              </a:rPr>
+              <a:t>    </a:t>
+            </a:r>
+            <a:r>
+              <a:rPr>
+                <a:solidFill>
+                  <a:srgbClr val="4758AB"/>
+                </a:solidFill>
+                <a:latin typeface="Courier"/>
+              </a:rPr>
+              <a:t>arrange</a:t>
+            </a:r>
+            <a:r>
+              <a:rPr>
+                <a:solidFill>
+                  <a:srgbClr val="003B4F"/>
+                </a:solidFill>
+                <a:latin typeface="Courier"/>
+              </a:rPr>
+              <a:t>(startDate, </a:t>
+            </a:r>
+            <a:r>
+              <a:rPr>
+                <a:solidFill>
+                  <a:srgbClr val="4758AB"/>
+                </a:solidFill>
+                <a:latin typeface="Courier"/>
+              </a:rPr>
+              <a:t>desc</a:t>
+            </a:r>
+            <a:r>
+              <a:rPr>
+                <a:solidFill>
+                  <a:srgbClr val="003B4F"/>
+                </a:solidFill>
+                <a:latin typeface="Courier"/>
+              </a:rPr>
+              <a:t>(nights)) </a:t>
+            </a:r>
+            <a:r>
+              <a:rPr>
+                <a:solidFill>
+                  <a:srgbClr val="5E5E5E"/>
+                </a:solidFill>
+                <a:latin typeface="Courier"/>
+              </a:rPr>
+              <a:t>|&gt;</a:t>
+            </a:r>
+            <a:br/>
+            <a:r>
+              <a:rPr>
+                <a:solidFill>
+                  <a:srgbClr val="003B4F"/>
+                </a:solidFill>
+                <a:latin typeface="Courier"/>
+              </a:rPr>
+              <a:t>    </a:t>
+            </a:r>
+            <a:r>
+              <a:rPr>
+                <a:solidFill>
+                  <a:srgbClr val="4758AB"/>
+                </a:solidFill>
+                <a:latin typeface="Courier"/>
+              </a:rPr>
+              <a:t>rowid_to_column</a:t>
+            </a:r>
+            <a:r>
+              <a:rPr>
+                <a:solidFill>
+                  <a:srgbClr val="003B4F"/>
+                </a:solidFill>
+                <a:latin typeface="Courier"/>
+              </a:rPr>
+              <a:t>() </a:t>
+            </a:r>
+            <a:r>
+              <a:rPr>
+                <a:solidFill>
+                  <a:srgbClr val="5E5E5E"/>
+                </a:solidFill>
+                <a:latin typeface="Courier"/>
+              </a:rPr>
+              <a:t>|&gt;</a:t>
+            </a:r>
+            <a:br/>
+            <a:r>
+              <a:rPr>
+                <a:solidFill>
+                  <a:srgbClr val="003B4F"/>
+                </a:solidFill>
+                <a:latin typeface="Courier"/>
+              </a:rPr>
+              <a:t>    </a:t>
+            </a:r>
+            <a:r>
+              <a:rPr>
+                <a:solidFill>
+                  <a:srgbClr val="4758AB"/>
+                </a:solidFill>
+                <a:latin typeface="Courier"/>
+              </a:rPr>
+              <a:t>rowwise</a:t>
+            </a:r>
+            <a:r>
+              <a:rPr>
+                <a:solidFill>
+                  <a:srgbClr val="003B4F"/>
+                </a:solidFill>
+                <a:latin typeface="Courier"/>
+              </a:rPr>
+              <a:t>() </a:t>
+            </a:r>
+            <a:r>
+              <a:rPr>
+                <a:solidFill>
+                  <a:srgbClr val="5E5E5E"/>
+                </a:solidFill>
+                <a:latin typeface="Courier"/>
+              </a:rPr>
+              <a:t>|&gt;</a:t>
+            </a:r>
+            <a:br/>
+            <a:r>
+              <a:rPr>
+                <a:solidFill>
+                  <a:srgbClr val="003B4F"/>
+                </a:solidFill>
+                <a:latin typeface="Courier"/>
+              </a:rPr>
+              <a:t>    </a:t>
+            </a:r>
+            <a:r>
+              <a:rPr>
+                <a:solidFill>
+                  <a:srgbClr val="4758AB"/>
+                </a:solidFill>
+                <a:latin typeface="Courier"/>
+              </a:rPr>
+              <a:t>reframe</a:t>
+            </a:r>
+            <a:r>
+              <a:rPr>
+                <a:solidFill>
+                  <a:srgbClr val="003B4F"/>
+                </a:solidFill>
+                <a:latin typeface="Courier"/>
+              </a:rPr>
+              <a:t>(rowid, location, details, nights,</a:t>
+            </a:r>
+            <a:br/>
+            <a:r>
+              <a:rPr>
+                <a:solidFill>
+                  <a:srgbClr val="003B4F"/>
+                </a:solidFill>
+                <a:latin typeface="Courier"/>
+              </a:rPr>
+              <a:t>        </a:t>
+            </a:r>
+            <a:r>
+              <a:rPr>
+                <a:solidFill>
+                  <a:srgbClr val="657422"/>
+                </a:solidFill>
+                <a:latin typeface="Courier"/>
+              </a:rPr>
+              <a:t>date =</a:t>
+            </a:r>
+            <a:r>
+              <a:rPr>
+                <a:solidFill>
+                  <a:srgbClr val="003B4F"/>
+                </a:solidFill>
+                <a:latin typeface="Courier"/>
+              </a:rPr>
+              <a:t> </a:t>
+            </a:r>
+            <a:r>
+              <a:rPr>
+                <a:solidFill>
+                  <a:srgbClr val="4758AB"/>
+                </a:solidFill>
+                <a:latin typeface="Courier"/>
+              </a:rPr>
+              <a:t>seq</a:t>
+            </a:r>
+            <a:r>
+              <a:rPr>
+                <a:solidFill>
+                  <a:srgbClr val="003B4F"/>
+                </a:solidFill>
+                <a:latin typeface="Courier"/>
+              </a:rPr>
+              <a:t>(startDate, endDate, </a:t>
+            </a:r>
+            <a:r>
+              <a:rPr>
+                <a:solidFill>
+                  <a:srgbClr val="657422"/>
+                </a:solidFill>
+                <a:latin typeface="Courier"/>
+              </a:rPr>
+              <a:t>by =</a:t>
+            </a:r>
+            <a:r>
+              <a:rPr>
+                <a:solidFill>
+                  <a:srgbClr val="003B4F"/>
+                </a:solidFill>
+                <a:latin typeface="Courier"/>
+              </a:rPr>
+              <a:t> </a:t>
+            </a:r>
+            <a:r>
+              <a:rPr>
+                <a:solidFill>
+                  <a:srgbClr val="20794D"/>
+                </a:solidFill>
+                <a:latin typeface="Courier"/>
+              </a:rPr>
+              <a:t>"day"</a:t>
+            </a:r>
+            <a:r>
+              <a:rPr>
+                <a:solidFill>
+                  <a:srgbClr val="003B4F"/>
+                </a:solidFill>
+                <a:latin typeface="Courier"/>
+              </a:rPr>
+              <a:t>)</a:t>
+            </a:r>
+            <a:br/>
+            <a:r>
+              <a:rPr>
+                <a:solidFill>
+                  <a:srgbClr val="003B4F"/>
+                </a:solidFill>
+                <a:latin typeface="Courier"/>
+              </a:rPr>
+              <a:t>    ) </a:t>
+            </a:r>
+            <a:r>
+              <a:rPr>
+                <a:solidFill>
+                  <a:srgbClr val="5E5E5E"/>
+                </a:solidFill>
+                <a:latin typeface="Courier"/>
+              </a:rPr>
+              <a:t>|&gt;</a:t>
+            </a:r>
+            <a:br/>
+            <a:r>
+              <a:rPr>
+                <a:solidFill>
+                  <a:srgbClr val="003B4F"/>
+                </a:solidFill>
+                <a:latin typeface="Courier"/>
+              </a:rPr>
+              <a:t>    </a:t>
+            </a:r>
+            <a:r>
+              <a:rPr>
+                <a:solidFill>
+                  <a:srgbClr val="4758AB"/>
+                </a:solidFill>
+                <a:latin typeface="Courier"/>
+              </a:rPr>
+              <a:t>group_by</a:t>
+            </a:r>
+            <a:r>
+              <a:rPr>
+                <a:solidFill>
+                  <a:srgbClr val="003B4F"/>
+                </a:solidFill>
+                <a:latin typeface="Courier"/>
+              </a:rPr>
+              <a:t>(date) </a:t>
+            </a:r>
+            <a:r>
+              <a:rPr>
+                <a:solidFill>
+                  <a:srgbClr val="5E5E5E"/>
+                </a:solidFill>
+                <a:latin typeface="Courier"/>
+              </a:rPr>
+              <a:t>|&gt;</a:t>
+            </a:r>
+            <a:br/>
+            <a:r>
+              <a:rPr>
+                <a:solidFill>
+                  <a:srgbClr val="003B4F"/>
+                </a:solidFill>
+                <a:latin typeface="Courier"/>
+              </a:rPr>
+              <a:t>    </a:t>
+            </a:r>
+            <a:r>
+              <a:rPr>
+                <a:solidFill>
+                  <a:srgbClr val="4758AB"/>
+                </a:solidFill>
+                <a:latin typeface="Courier"/>
+              </a:rPr>
+              <a:t>slice_min</a:t>
+            </a:r>
+            <a:r>
+              <a:rPr>
+                <a:solidFill>
+                  <a:srgbClr val="003B4F"/>
+                </a:solidFill>
+                <a:latin typeface="Courier"/>
+              </a:rPr>
+              <a:t>(</a:t>
+            </a:r>
+            <a:r>
+              <a:rPr>
+                <a:solidFill>
+                  <a:srgbClr val="657422"/>
+                </a:solidFill>
+                <a:latin typeface="Courier"/>
+              </a:rPr>
+              <a:t>order_by =</a:t>
+            </a:r>
+            <a:r>
+              <a:rPr>
+                <a:solidFill>
+                  <a:srgbClr val="003B4F"/>
+                </a:solidFill>
+                <a:latin typeface="Courier"/>
+              </a:rPr>
+              <a:t> nights, </a:t>
+            </a:r>
+            <a:r>
+              <a:rPr>
+                <a:solidFill>
+                  <a:srgbClr val="657422"/>
+                </a:solidFill>
+                <a:latin typeface="Courier"/>
+              </a:rPr>
+              <a:t>n =</a:t>
+            </a:r>
+            <a:r>
+              <a:rPr>
+                <a:solidFill>
+                  <a:srgbClr val="003B4F"/>
+                </a:solidFill>
+                <a:latin typeface="Courier"/>
+              </a:rPr>
+              <a:t> </a:t>
+            </a:r>
+            <a:r>
+              <a:rPr>
+                <a:solidFill>
+                  <a:srgbClr val="AD0000"/>
+                </a:solidFill>
+                <a:latin typeface="Courier"/>
+              </a:rPr>
+              <a:t>1</a:t>
+            </a:r>
+            <a:r>
+              <a:rPr>
+                <a:solidFill>
+                  <a:srgbClr val="003B4F"/>
+                </a:solidFill>
+                <a:latin typeface="Courier"/>
+              </a:rPr>
+              <a:t>) </a:t>
+            </a:r>
+            <a:r>
+              <a:rPr>
+                <a:solidFill>
+                  <a:srgbClr val="5E5E5E"/>
+                </a:solidFill>
+                <a:latin typeface="Courier"/>
+              </a:rPr>
+              <a:t>|&gt;</a:t>
+            </a:r>
+            <a:br/>
+            <a:r>
+              <a:rPr>
+                <a:solidFill>
+                  <a:srgbClr val="003B4F"/>
+                </a:solidFill>
+                <a:latin typeface="Courier"/>
+              </a:rPr>
+              <a:t>    </a:t>
+            </a:r>
+            <a:r>
+              <a:rPr>
+                <a:solidFill>
+                  <a:srgbClr val="4758AB"/>
+                </a:solidFill>
+                <a:latin typeface="Courier"/>
+              </a:rPr>
+              <a:t>ungroup</a:t>
+            </a:r>
+            <a:r>
+              <a:rPr>
+                <a:solidFill>
+                  <a:srgbClr val="003B4F"/>
+                </a:solidFill>
+                <a:latin typeface="Courier"/>
+              </a:rPr>
+              <a:t>() </a:t>
+            </a:r>
+            <a:r>
+              <a:rPr>
+                <a:solidFill>
+                  <a:srgbClr val="5E5E5E"/>
+                </a:solidFill>
+                <a:latin typeface="Courier"/>
+              </a:rPr>
+              <a:t>|&gt;</a:t>
+            </a:r>
+            <a:br/>
+            <a:r>
+              <a:rPr>
+                <a:solidFill>
+                  <a:srgbClr val="003B4F"/>
+                </a:solidFill>
+                <a:latin typeface="Courier"/>
+              </a:rPr>
+              <a:t>    </a:t>
+            </a:r>
+            <a:r>
+              <a:rPr>
+                <a:solidFill>
+                  <a:srgbClr val="4758AB"/>
+                </a:solidFill>
+                <a:latin typeface="Courier"/>
+              </a:rPr>
+              <a:t>mutate</a:t>
+            </a:r>
+            <a:r>
+              <a:rPr>
+                <a:solidFill>
+                  <a:srgbClr val="003B4F"/>
+                </a:solidFill>
+                <a:latin typeface="Courier"/>
+              </a:rPr>
+              <a:t>(</a:t>
+            </a:r>
+            <a:r>
+              <a:rPr>
+                <a:solidFill>
+                  <a:srgbClr val="657422"/>
+                </a:solidFill>
+                <a:latin typeface="Courier"/>
+              </a:rPr>
+              <a:t>country =</a:t>
+            </a:r>
+            <a:r>
+              <a:rPr>
+                <a:solidFill>
+                  <a:srgbClr val="003B4F"/>
+                </a:solidFill>
+                <a:latin typeface="Courier"/>
+              </a:rPr>
+              <a:t> countrycode</a:t>
+            </a:r>
+            <a:r>
+              <a:rPr>
+                <a:solidFill>
+                  <a:srgbClr val="5E5E5E"/>
+                </a:solidFill>
+                <a:latin typeface="Courier"/>
+              </a:rPr>
+              <a:t>::</a:t>
+            </a:r>
+            <a:r>
+              <a:rPr>
+                <a:solidFill>
+                  <a:srgbClr val="4758AB"/>
+                </a:solidFill>
+                <a:latin typeface="Courier"/>
+              </a:rPr>
+              <a:t>countryname</a:t>
+            </a:r>
+            <a:r>
+              <a:rPr>
+                <a:solidFill>
+                  <a:srgbClr val="003B4F"/>
+                </a:solidFill>
+                <a:latin typeface="Courier"/>
+              </a:rPr>
+              <a:t>(location, </a:t>
+            </a:r>
+            <a:r>
+              <a:rPr>
+                <a:solidFill>
+                  <a:srgbClr val="20794D"/>
+                </a:solidFill>
+                <a:latin typeface="Courier"/>
+              </a:rPr>
+              <a:t>"iso2c"</a:t>
+            </a:r>
+            <a:r>
+              <a:rPr>
+                <a:solidFill>
+                  <a:srgbClr val="003B4F"/>
+                </a:solidFill>
+                <a:latin typeface="Courier"/>
+              </a:rPr>
+              <a:t>))</a:t>
+            </a:r>
+            <a:br/>
+            <a:br/>
+            <a:r>
+              <a:rPr>
+                <a:solidFill>
+                  <a:srgbClr val="003B4F"/>
+                </a:solidFill>
+                <a:latin typeface="Courier"/>
+              </a:rPr>
+              <a:t>away_days &lt;- travel_days </a:t>
+            </a:r>
+            <a:r>
+              <a:rPr>
+                <a:solidFill>
+                  <a:srgbClr val="5E5E5E"/>
+                </a:solidFill>
+                <a:latin typeface="Courier"/>
+              </a:rPr>
+              <a:t>|&gt;</a:t>
+            </a:r>
+            <a:br/>
+            <a:r>
+              <a:rPr>
+                <a:solidFill>
+                  <a:srgbClr val="003B4F"/>
+                </a:solidFill>
+                <a:latin typeface="Courier"/>
+              </a:rPr>
+              <a:t>    </a:t>
+            </a:r>
+            <a:r>
+              <a:rPr>
+                <a:solidFill>
+                  <a:srgbClr val="4758AB"/>
+                </a:solidFill>
+                <a:latin typeface="Courier"/>
+              </a:rPr>
+              <a:t>summarise</a:t>
+            </a:r>
+            <a:r>
+              <a:rPr>
+                <a:solidFill>
+                  <a:srgbClr val="003B4F"/>
+                </a:solidFill>
+                <a:latin typeface="Courier"/>
+              </a:rPr>
+              <a:t>(</a:t>
+            </a:r>
+            <a:br/>
+            <a:r>
+              <a:rPr>
+                <a:solidFill>
+                  <a:srgbClr val="003B4F"/>
+                </a:solidFill>
+                <a:latin typeface="Courier"/>
+              </a:rPr>
+              <a:t>        </a:t>
+            </a:r>
+            <a:r>
+              <a:rPr>
+                <a:solidFill>
+                  <a:srgbClr val="657422"/>
+                </a:solidFill>
+                <a:latin typeface="Courier"/>
+              </a:rPr>
+              <a:t>startDate =</a:t>
+            </a:r>
+            <a:r>
+              <a:rPr>
+                <a:solidFill>
+                  <a:srgbClr val="003B4F"/>
+                </a:solidFill>
+                <a:latin typeface="Courier"/>
+              </a:rPr>
+              <a:t> </a:t>
+            </a:r>
+            <a:r>
+              <a:rPr>
+                <a:solidFill>
+                  <a:srgbClr val="4758AB"/>
+                </a:solidFill>
+                <a:latin typeface="Courier"/>
+              </a:rPr>
+              <a:t>min</a:t>
+            </a:r>
+            <a:r>
+              <a:rPr>
+                <a:solidFill>
+                  <a:srgbClr val="003B4F"/>
+                </a:solidFill>
+                <a:latin typeface="Courier"/>
+              </a:rPr>
+              <a:t>(date),</a:t>
+            </a:r>
+            <a:br/>
+            <a:r>
+              <a:rPr>
+                <a:solidFill>
+                  <a:srgbClr val="003B4F"/>
+                </a:solidFill>
+                <a:latin typeface="Courier"/>
+              </a:rPr>
+              <a:t>        </a:t>
+            </a:r>
+            <a:r>
+              <a:rPr>
+                <a:solidFill>
+                  <a:srgbClr val="657422"/>
+                </a:solidFill>
+                <a:latin typeface="Courier"/>
+              </a:rPr>
+              <a:t>endDate =</a:t>
+            </a:r>
+            <a:r>
+              <a:rPr>
+                <a:solidFill>
+                  <a:srgbClr val="003B4F"/>
+                </a:solidFill>
+                <a:latin typeface="Courier"/>
+              </a:rPr>
+              <a:t> </a:t>
+            </a:r>
+            <a:r>
+              <a:rPr>
+                <a:solidFill>
+                  <a:srgbClr val="4758AB"/>
+                </a:solidFill>
+                <a:latin typeface="Courier"/>
+              </a:rPr>
+              <a:t>max</a:t>
+            </a:r>
+            <a:r>
+              <a:rPr>
+                <a:solidFill>
+                  <a:srgbClr val="003B4F"/>
+                </a:solidFill>
+                <a:latin typeface="Courier"/>
+              </a:rPr>
+              <a:t>(date)</a:t>
+            </a:r>
+            <a:br/>
+            <a:r>
+              <a:rPr>
+                <a:solidFill>
+                  <a:srgbClr val="003B4F"/>
+                </a:solidFill>
+                <a:latin typeface="Courier"/>
+              </a:rPr>
+              <a:t>    ) </a:t>
+            </a:r>
+            <a:r>
+              <a:rPr>
+                <a:solidFill>
+                  <a:srgbClr val="5E5E5E"/>
+                </a:solidFill>
+                <a:latin typeface="Courier"/>
+              </a:rPr>
+              <a:t>|&gt;</a:t>
+            </a:r>
+            <a:br/>
+            <a:r>
+              <a:rPr>
+                <a:solidFill>
+                  <a:srgbClr val="003B4F"/>
+                </a:solidFill>
+                <a:latin typeface="Courier"/>
+              </a:rPr>
+              <a:t>    </a:t>
+            </a:r>
+            <a:r>
+              <a:rPr>
+                <a:solidFill>
+                  <a:srgbClr val="4758AB"/>
+                </a:solidFill>
+                <a:latin typeface="Courier"/>
+              </a:rPr>
+              <a:t>mutate</a:t>
+            </a:r>
+            <a:r>
+              <a:rPr>
+                <a:solidFill>
+                  <a:srgbClr val="003B4F"/>
+                </a:solidFill>
+                <a:latin typeface="Courier"/>
+              </a:rPr>
+              <a:t>(</a:t>
+            </a:r>
+            <a:r>
+              <a:rPr>
+                <a:solidFill>
+                  <a:srgbClr val="657422"/>
+                </a:solidFill>
+                <a:latin typeface="Courier"/>
+              </a:rPr>
+              <a:t>rowid =</a:t>
+            </a:r>
+            <a:r>
+              <a:rPr>
+                <a:solidFill>
+                  <a:srgbClr val="003B4F"/>
+                </a:solidFill>
+                <a:latin typeface="Courier"/>
+              </a:rPr>
+              <a:t> </a:t>
+            </a:r>
+            <a:r>
+              <a:rPr>
+                <a:solidFill>
+                  <a:srgbClr val="AD0000"/>
+                </a:solidFill>
+                <a:latin typeface="Courier"/>
+              </a:rPr>
+              <a:t>0</a:t>
+            </a:r>
+            <a:r>
+              <a:rPr>
+                <a:solidFill>
+                  <a:srgbClr val="003B4F"/>
+                </a:solidFill>
+                <a:latin typeface="Courier"/>
+              </a:rPr>
+              <a:t>, </a:t>
+            </a:r>
+            <a:r>
+              <a:rPr>
+                <a:solidFill>
+                  <a:srgbClr val="657422"/>
+                </a:solidFill>
+                <a:latin typeface="Courier"/>
+              </a:rPr>
+              <a:t>location =</a:t>
+            </a:r>
+            <a:r>
+              <a:rPr>
+                <a:solidFill>
+                  <a:srgbClr val="003B4F"/>
+                </a:solidFill>
+                <a:latin typeface="Courier"/>
+              </a:rPr>
+              <a:t> </a:t>
+            </a:r>
+            <a:r>
+              <a:rPr>
+                <a:solidFill>
+                  <a:srgbClr val="20794D"/>
+                </a:solidFill>
+                <a:latin typeface="Courier"/>
+              </a:rPr>
+              <a:t>"TBC"</a:t>
+            </a:r>
+            <a:r>
+              <a:rPr>
+                <a:solidFill>
+                  <a:srgbClr val="003B4F"/>
+                </a:solidFill>
+                <a:latin typeface="Courier"/>
+              </a:rPr>
+              <a:t>) </a:t>
+            </a:r>
+            <a:r>
+              <a:rPr>
+                <a:solidFill>
+                  <a:srgbClr val="5E5E5E"/>
+                </a:solidFill>
+                <a:latin typeface="Courier"/>
+              </a:rPr>
+              <a:t>|&gt;</a:t>
+            </a:r>
+            <a:br/>
+            <a:r>
+              <a:rPr>
+                <a:solidFill>
+                  <a:srgbClr val="003B4F"/>
+                </a:solidFill>
+                <a:latin typeface="Courier"/>
+              </a:rPr>
+              <a:t>    </a:t>
+            </a:r>
+            <a:r>
+              <a:rPr>
+                <a:solidFill>
+                  <a:srgbClr val="4758AB"/>
+                </a:solidFill>
+                <a:latin typeface="Courier"/>
+              </a:rPr>
+              <a:t>reframe</a:t>
+            </a:r>
+            <a:r>
+              <a:rPr>
+                <a:solidFill>
+                  <a:srgbClr val="003B4F"/>
+                </a:solidFill>
+                <a:latin typeface="Courier"/>
+              </a:rPr>
+              <a:t>(rowid, location, </a:t>
+            </a:r>
+            <a:r>
+              <a:rPr>
+                <a:solidFill>
+                  <a:srgbClr val="657422"/>
+                </a:solidFill>
+                <a:latin typeface="Courier"/>
+              </a:rPr>
+              <a:t>date =</a:t>
+            </a:r>
+            <a:r>
+              <a:rPr>
+                <a:solidFill>
+                  <a:srgbClr val="003B4F"/>
+                </a:solidFill>
+                <a:latin typeface="Courier"/>
+              </a:rPr>
+              <a:t> </a:t>
+            </a:r>
+            <a:r>
+              <a:rPr>
+                <a:solidFill>
+                  <a:srgbClr val="4758AB"/>
+                </a:solidFill>
+                <a:latin typeface="Courier"/>
+              </a:rPr>
+              <a:t>seq</a:t>
+            </a:r>
+            <a:r>
+              <a:rPr>
+                <a:solidFill>
+                  <a:srgbClr val="003B4F"/>
+                </a:solidFill>
+                <a:latin typeface="Courier"/>
+              </a:rPr>
+              <a:t>(startDate, endDate, </a:t>
+            </a:r>
+            <a:r>
+              <a:rPr>
+                <a:solidFill>
+                  <a:srgbClr val="657422"/>
+                </a:solidFill>
+                <a:latin typeface="Courier"/>
+              </a:rPr>
+              <a:t>by =</a:t>
+            </a:r>
+            <a:r>
+              <a:rPr>
+                <a:solidFill>
+                  <a:srgbClr val="003B4F"/>
+                </a:solidFill>
+                <a:latin typeface="Courier"/>
+              </a:rPr>
+              <a:t> </a:t>
+            </a:r>
+            <a:r>
+              <a:rPr>
+                <a:solidFill>
+                  <a:srgbClr val="20794D"/>
+                </a:solidFill>
+                <a:latin typeface="Courier"/>
+              </a:rPr>
+              <a:t>"day"</a:t>
+            </a:r>
+            <a:r>
+              <a:rPr>
+                <a:solidFill>
+                  <a:srgbClr val="003B4F"/>
+                </a:solidFill>
+                <a:latin typeface="Courier"/>
+              </a:rPr>
+              <a:t>))</a:t>
+            </a:r>
+            <a:br/>
+            <a:br/>
+            <a:r>
+              <a:rPr>
+                <a:solidFill>
+                  <a:srgbClr val="003B4F"/>
+                </a:solidFill>
+                <a:latin typeface="Courier"/>
+              </a:rPr>
+              <a:t>daily_loc &lt;- away_days </a:t>
+            </a:r>
+            <a:r>
+              <a:rPr>
+                <a:solidFill>
+                  <a:srgbClr val="5E5E5E"/>
+                </a:solidFill>
+                <a:latin typeface="Courier"/>
+              </a:rPr>
+              <a:t>|&gt;</a:t>
+            </a:r>
+            <a:br/>
+            <a:r>
+              <a:rPr>
+                <a:solidFill>
+                  <a:srgbClr val="003B4F"/>
+                </a:solidFill>
+                <a:latin typeface="Courier"/>
+              </a:rPr>
+              <a:t>    </a:t>
+            </a:r>
+            <a:r>
+              <a:rPr>
+                <a:solidFill>
+                  <a:srgbClr val="4758AB"/>
+                </a:solidFill>
+                <a:latin typeface="Courier"/>
+              </a:rPr>
+              <a:t>anti_join</a:t>
+            </a:r>
+            <a:r>
+              <a:rPr>
+                <a:solidFill>
+                  <a:srgbClr val="003B4F"/>
+                </a:solidFill>
+                <a:latin typeface="Courier"/>
+              </a:rPr>
+              <a:t>(travel_days, </a:t>
+            </a:r>
+            <a:r>
+              <a:rPr>
+                <a:solidFill>
+                  <a:srgbClr val="657422"/>
+                </a:solidFill>
+                <a:latin typeface="Courier"/>
+              </a:rPr>
+              <a:t>by =</a:t>
+            </a:r>
+            <a:r>
+              <a:rPr>
+                <a:solidFill>
+                  <a:srgbClr val="003B4F"/>
+                </a:solidFill>
+                <a:latin typeface="Courier"/>
+              </a:rPr>
+              <a:t> </a:t>
+            </a:r>
+            <a:r>
+              <a:rPr>
+                <a:solidFill>
+                  <a:srgbClr val="20794D"/>
+                </a:solidFill>
+                <a:latin typeface="Courier"/>
+              </a:rPr>
+              <a:t>"date"</a:t>
+            </a:r>
+            <a:r>
+              <a:rPr>
+                <a:solidFill>
+                  <a:srgbClr val="003B4F"/>
+                </a:solidFill>
+                <a:latin typeface="Courier"/>
+              </a:rPr>
+              <a:t>) </a:t>
+            </a:r>
+            <a:r>
+              <a:rPr>
+                <a:solidFill>
+                  <a:srgbClr val="5E5E5E"/>
+                </a:solidFill>
+                <a:latin typeface="Courier"/>
+              </a:rPr>
+              <a:t>|&gt;</a:t>
+            </a:r>
+            <a:br/>
+            <a:r>
+              <a:rPr>
+                <a:solidFill>
+                  <a:srgbClr val="003B4F"/>
+                </a:solidFill>
+                <a:latin typeface="Courier"/>
+              </a:rPr>
+              <a:t>    </a:t>
+            </a:r>
+            <a:r>
+              <a:rPr>
+                <a:solidFill>
+                  <a:srgbClr val="4758AB"/>
+                </a:solidFill>
+                <a:latin typeface="Courier"/>
+              </a:rPr>
+              <a:t>bind_rows</a:t>
+            </a:r>
+            <a:r>
+              <a:rPr>
+                <a:solidFill>
+                  <a:srgbClr val="003B4F"/>
+                </a:solidFill>
+                <a:latin typeface="Courier"/>
+              </a:rPr>
+              <a:t>(travel_days) </a:t>
+            </a:r>
+            <a:r>
+              <a:rPr>
+                <a:solidFill>
+                  <a:srgbClr val="5E5E5E"/>
+                </a:solidFill>
+                <a:latin typeface="Courier"/>
+              </a:rPr>
+              <a:t>|&gt;</a:t>
+            </a:r>
+            <a:br/>
+            <a:r>
+              <a:rPr>
+                <a:solidFill>
+                  <a:srgbClr val="003B4F"/>
+                </a:solidFill>
+                <a:latin typeface="Courier"/>
+              </a:rPr>
+              <a:t>    </a:t>
+            </a:r>
+            <a:r>
+              <a:rPr>
+                <a:solidFill>
+                  <a:srgbClr val="4758AB"/>
+                </a:solidFill>
+                <a:latin typeface="Courier"/>
+              </a:rPr>
+              <a:t>mutate</a:t>
+            </a:r>
+            <a:r>
+              <a:rPr>
+                <a:solidFill>
+                  <a:srgbClr val="003B4F"/>
+                </a:solidFill>
+                <a:latin typeface="Courier"/>
+              </a:rPr>
+              <a:t>(</a:t>
+            </a:r>
+            <a:br/>
+            <a:r>
+              <a:rPr>
+                <a:solidFill>
+                  <a:srgbClr val="003B4F"/>
+                </a:solidFill>
+                <a:latin typeface="Courier"/>
+              </a:rPr>
+              <a:t>        </a:t>
+            </a:r>
+            <a:r>
+              <a:rPr>
+                <a:solidFill>
+                  <a:srgbClr val="657422"/>
+                </a:solidFill>
+                <a:latin typeface="Courier"/>
+              </a:rPr>
+              <a:t>flag =</a:t>
+            </a:r>
+            <a:r>
+              <a:rPr>
+                <a:solidFill>
+                  <a:srgbClr val="003B4F"/>
+                </a:solidFill>
+                <a:latin typeface="Courier"/>
+              </a:rPr>
+              <a:t> countrycode</a:t>
+            </a:r>
+            <a:r>
+              <a:rPr>
+                <a:solidFill>
+                  <a:srgbClr val="5E5E5E"/>
+                </a:solidFill>
+                <a:latin typeface="Courier"/>
+              </a:rPr>
+              <a:t>::</a:t>
+            </a:r>
+            <a:r>
+              <a:rPr>
+                <a:solidFill>
+                  <a:srgbClr val="4758AB"/>
+                </a:solidFill>
+                <a:latin typeface="Courier"/>
+              </a:rPr>
+              <a:t>countrycode</a:t>
+            </a:r>
+            <a:r>
+              <a:rPr>
+                <a:solidFill>
+                  <a:srgbClr val="003B4F"/>
+                </a:solidFill>
+                <a:latin typeface="Courier"/>
+              </a:rPr>
+              <a:t>(country, </a:t>
+            </a:r>
+            <a:r>
+              <a:rPr>
+                <a:solidFill>
+                  <a:srgbClr val="20794D"/>
+                </a:solidFill>
+                <a:latin typeface="Courier"/>
+              </a:rPr>
+              <a:t>"iso2c"</a:t>
+            </a:r>
+            <a:r>
+              <a:rPr>
+                <a:solidFill>
+                  <a:srgbClr val="003B4F"/>
+                </a:solidFill>
+                <a:latin typeface="Courier"/>
+              </a:rPr>
+              <a:t>, </a:t>
+            </a:r>
+            <a:r>
+              <a:rPr>
+                <a:solidFill>
+                  <a:srgbClr val="20794D"/>
+                </a:solidFill>
+                <a:latin typeface="Courier"/>
+              </a:rPr>
+              <a:t>"unicode.symbol"</a:t>
+            </a:r>
+            <a:r>
+              <a:rPr>
+                <a:solidFill>
+                  <a:srgbClr val="003B4F"/>
+                </a:solidFill>
+                <a:latin typeface="Courier"/>
+              </a:rPr>
+              <a:t>),</a:t>
+            </a:r>
+            <a:br/>
+            <a:r>
+              <a:rPr>
+                <a:solidFill>
+                  <a:srgbClr val="003B4F"/>
+                </a:solidFill>
+                <a:latin typeface="Courier"/>
+              </a:rPr>
+              <a:t>        </a:t>
+            </a:r>
+            <a:r>
+              <a:rPr>
+                <a:solidFill>
+                  <a:srgbClr val="657422"/>
+                </a:solidFill>
+                <a:latin typeface="Courier"/>
+              </a:rPr>
+              <a:t>continent =</a:t>
+            </a:r>
+            <a:r>
+              <a:rPr>
+                <a:solidFill>
+                  <a:srgbClr val="003B4F"/>
+                </a:solidFill>
+                <a:latin typeface="Courier"/>
+              </a:rPr>
+              <a:t> countrycode</a:t>
+            </a:r>
+            <a:r>
+              <a:rPr>
+                <a:solidFill>
+                  <a:srgbClr val="5E5E5E"/>
+                </a:solidFill>
+                <a:latin typeface="Courier"/>
+              </a:rPr>
+              <a:t>::</a:t>
+            </a:r>
+            <a:r>
+              <a:rPr>
+                <a:solidFill>
+                  <a:srgbClr val="4758AB"/>
+                </a:solidFill>
+                <a:latin typeface="Courier"/>
+              </a:rPr>
+              <a:t>countrycode</a:t>
+            </a:r>
+            <a:r>
+              <a:rPr>
+                <a:solidFill>
+                  <a:srgbClr val="003B4F"/>
+                </a:solidFill>
+                <a:latin typeface="Courier"/>
+              </a:rPr>
+              <a:t>(country, </a:t>
+            </a:r>
+            <a:r>
+              <a:rPr>
+                <a:solidFill>
+                  <a:srgbClr val="20794D"/>
+                </a:solidFill>
+                <a:latin typeface="Courier"/>
+              </a:rPr>
+              <a:t>"iso2c"</a:t>
+            </a:r>
+            <a:r>
+              <a:rPr>
+                <a:solidFill>
+                  <a:srgbClr val="003B4F"/>
+                </a:solidFill>
+                <a:latin typeface="Courier"/>
+              </a:rPr>
+              <a:t>, </a:t>
+            </a:r>
+            <a:r>
+              <a:rPr>
+                <a:solidFill>
+                  <a:srgbClr val="20794D"/>
+                </a:solidFill>
+                <a:latin typeface="Courier"/>
+              </a:rPr>
+              <a:t>"continent"</a:t>
+            </a:r>
+            <a:r>
+              <a:rPr>
+                <a:solidFill>
+                  <a:srgbClr val="003B4F"/>
+                </a:solidFill>
+                <a:latin typeface="Courier"/>
+              </a:rPr>
+              <a:t>)</a:t>
+            </a:r>
+            <a:br/>
+            <a:r>
+              <a:rPr>
+                <a:solidFill>
+                  <a:srgbClr val="003B4F"/>
+                </a:solidFill>
+                <a:latin typeface="Courier"/>
+              </a:rPr>
+              <a:t>    ) </a:t>
+            </a:r>
+            <a:r>
+              <a:rPr>
+                <a:solidFill>
+                  <a:srgbClr val="5E5E5E"/>
+                </a:solidFill>
+                <a:latin typeface="Courier"/>
+              </a:rPr>
+              <a:t>|&gt;</a:t>
+            </a:r>
+            <a:br/>
+            <a:r>
+              <a:rPr>
+                <a:solidFill>
+                  <a:srgbClr val="003B4F"/>
+                </a:solidFill>
+                <a:latin typeface="Courier"/>
+              </a:rPr>
+              <a:t>    </a:t>
+            </a:r>
+            <a:r>
+              <a:rPr>
+                <a:solidFill>
+                  <a:srgbClr val="4758AB"/>
+                </a:solidFill>
+                <a:latin typeface="Courier"/>
+              </a:rPr>
+              <a:t>mutate</a:t>
+            </a:r>
+            <a:r>
+              <a:rPr>
+                <a:solidFill>
+                  <a:srgbClr val="003B4F"/>
+                </a:solidFill>
+                <a:latin typeface="Courier"/>
+              </a:rPr>
+              <a:t>(</a:t>
+            </a:r>
+            <a:r>
+              <a:rPr>
+                <a:solidFill>
+                  <a:srgbClr val="657422"/>
+                </a:solidFill>
+                <a:latin typeface="Courier"/>
+              </a:rPr>
+              <a:t>flag =</a:t>
+            </a:r>
+            <a:r>
+              <a:rPr>
+                <a:solidFill>
+                  <a:srgbClr val="003B4F"/>
+                </a:solidFill>
+                <a:latin typeface="Courier"/>
+              </a:rPr>
+              <a:t> </a:t>
+            </a:r>
+            <a:r>
+              <a:rPr>
+                <a:solidFill>
+                  <a:srgbClr val="4758AB"/>
+                </a:solidFill>
+                <a:latin typeface="Courier"/>
+              </a:rPr>
+              <a:t>case_when</a:t>
+            </a:r>
+            <a:r>
+              <a:rPr>
+                <a:solidFill>
+                  <a:srgbClr val="003B4F"/>
+                </a:solidFill>
+                <a:latin typeface="Courier"/>
+              </a:rPr>
+              <a:t>(</a:t>
+            </a:r>
+            <a:br/>
+            <a:r>
+              <a:rPr>
+                <a:solidFill>
+                  <a:srgbClr val="003B4F"/>
+                </a:solidFill>
+                <a:latin typeface="Courier"/>
+              </a:rPr>
+              <a:t>        location </a:t>
+            </a:r>
+            <a:r>
+              <a:rPr>
+                <a:solidFill>
+                  <a:srgbClr val="5E5E5E"/>
+                </a:solidFill>
+                <a:latin typeface="Courier"/>
+              </a:rPr>
+              <a:t>==</a:t>
+            </a:r>
+            <a:r>
+              <a:rPr>
+                <a:solidFill>
+                  <a:srgbClr val="003B4F"/>
+                </a:solidFill>
+                <a:latin typeface="Courier"/>
+              </a:rPr>
+              <a:t> </a:t>
+            </a:r>
+            <a:r>
+              <a:rPr>
+                <a:solidFill>
+                  <a:srgbClr val="20794D"/>
+                </a:solidFill>
+                <a:latin typeface="Courier"/>
+              </a:rPr>
+              <a:t>"en route"</a:t>
+            </a:r>
+            <a:r>
+              <a:rPr>
+                <a:solidFill>
+                  <a:srgbClr val="003B4F"/>
+                </a:solidFill>
+                <a:latin typeface="Courier"/>
+              </a:rPr>
+              <a:t> </a:t>
+            </a:r>
+            <a:r>
+              <a:rPr>
+                <a:solidFill>
+                  <a:srgbClr val="5E5E5E"/>
+                </a:solidFill>
+                <a:latin typeface="Courier"/>
+              </a:rPr>
+              <a:t>~</a:t>
+            </a:r>
+            <a:r>
+              <a:rPr>
+                <a:solidFill>
+                  <a:srgbClr val="003B4F"/>
+                </a:solidFill>
+                <a:latin typeface="Courier"/>
+              </a:rPr>
+              <a:t> </a:t>
+            </a:r>
+            <a:r>
+              <a:rPr>
+                <a:solidFill>
+                  <a:srgbClr val="20794D"/>
+                </a:solidFill>
+                <a:latin typeface="Courier"/>
+              </a:rPr>
+              <a:t>"\u2708"</a:t>
+            </a:r>
+            <a:r>
+              <a:rPr>
+                <a:solidFill>
+                  <a:srgbClr val="003B4F"/>
+                </a:solidFill>
+                <a:latin typeface="Courier"/>
+              </a:rPr>
+              <a:t>,</a:t>
+            </a:r>
+            <a:br/>
+            <a:r>
+              <a:rPr>
+                <a:solidFill>
+                  <a:srgbClr val="003B4F"/>
+                </a:solidFill>
+                <a:latin typeface="Courier"/>
+              </a:rPr>
+              <a:t>        location </a:t>
+            </a:r>
+            <a:r>
+              <a:rPr>
+                <a:solidFill>
+                  <a:srgbClr val="5E5E5E"/>
+                </a:solidFill>
+                <a:latin typeface="Courier"/>
+              </a:rPr>
+              <a:t>==</a:t>
+            </a:r>
+            <a:r>
+              <a:rPr>
+                <a:solidFill>
+                  <a:srgbClr val="003B4F"/>
+                </a:solidFill>
+                <a:latin typeface="Courier"/>
+              </a:rPr>
+              <a:t> </a:t>
+            </a:r>
+            <a:r>
+              <a:rPr>
+                <a:solidFill>
+                  <a:srgbClr val="20794D"/>
+                </a:solidFill>
+                <a:latin typeface="Courier"/>
+              </a:rPr>
+              <a:t>"TBC"</a:t>
+            </a:r>
+            <a:r>
+              <a:rPr>
+                <a:solidFill>
+                  <a:srgbClr val="003B4F"/>
+                </a:solidFill>
+                <a:latin typeface="Courier"/>
+              </a:rPr>
+              <a:t> </a:t>
+            </a:r>
+            <a:r>
+              <a:rPr>
+                <a:solidFill>
+                  <a:srgbClr val="5E5E5E"/>
+                </a:solidFill>
+                <a:latin typeface="Courier"/>
+              </a:rPr>
+              <a:t>~</a:t>
+            </a:r>
+            <a:r>
+              <a:rPr>
+                <a:solidFill>
+                  <a:srgbClr val="003B4F"/>
+                </a:solidFill>
+                <a:latin typeface="Courier"/>
+              </a:rPr>
+              <a:t> </a:t>
+            </a:r>
+            <a:r>
+              <a:rPr>
+                <a:solidFill>
+                  <a:srgbClr val="20794D"/>
+                </a:solidFill>
+                <a:latin typeface="Courier"/>
+              </a:rPr>
+              <a:t>"❔"</a:t>
+            </a:r>
+            <a:r>
+              <a:rPr>
+                <a:solidFill>
+                  <a:srgbClr val="003B4F"/>
+                </a:solidFill>
+                <a:latin typeface="Courier"/>
+              </a:rPr>
+              <a:t>,</a:t>
+            </a:r>
+            <a:br/>
+            <a:r>
+              <a:rPr>
+                <a:solidFill>
+                  <a:srgbClr val="003B4F"/>
+                </a:solidFill>
+                <a:latin typeface="Courier"/>
+              </a:rPr>
+              <a:t>        </a:t>
+            </a:r>
+            <a:r>
+              <a:rPr>
+                <a:solidFill>
+                  <a:srgbClr val="8F5902"/>
+                </a:solidFill>
+                <a:latin typeface="Courier"/>
+              </a:rPr>
+              <a:t>TRUE</a:t>
+            </a:r>
+            <a:r>
+              <a:rPr>
+                <a:solidFill>
+                  <a:srgbClr val="003B4F"/>
+                </a:solidFill>
+                <a:latin typeface="Courier"/>
+              </a:rPr>
+              <a:t> </a:t>
+            </a:r>
+            <a:r>
+              <a:rPr>
+                <a:solidFill>
+                  <a:srgbClr val="5E5E5E"/>
+                </a:solidFill>
+                <a:latin typeface="Courier"/>
+              </a:rPr>
+              <a:t>~</a:t>
+            </a:r>
+            <a:r>
+              <a:rPr>
+                <a:solidFill>
+                  <a:srgbClr val="003B4F"/>
+                </a:solidFill>
+                <a:latin typeface="Courier"/>
+              </a:rPr>
+              <a:t> flag</a:t>
+            </a:r>
+            <a:br/>
+            <a:r>
+              <a:rPr>
+                <a:solidFill>
+                  <a:srgbClr val="003B4F"/>
+                </a:solidFill>
+                <a:latin typeface="Courier"/>
+              </a:rPr>
+              <a:t>    ))</a:t>
+            </a:r>
+            <a:br/>
+            <a:br/>
+            <a:r>
+              <a:rPr i="1">
+                <a:solidFill>
+                  <a:srgbClr val="5E5E5E"/>
+                </a:solidFill>
+                <a:latin typeface="Courier"/>
+              </a:rPr>
+              <a:t>## ---- prep-full-calendar-data ----</a:t>
+            </a:r>
+            <a:br/>
+            <a:br/>
+            <a:r>
+              <a:rPr>
+                <a:solidFill>
+                  <a:srgbClr val="5E5E5E"/>
+                </a:solidFill>
+                <a:latin typeface="Courier"/>
+              </a:rPr>
+              <a:t># based on: https://github.com/nrennie/tidytuesday/blob/9dbe69d696f6c1edad41a72d157a42f3b5a63a81/2023/2023-03-07/20230307.R</a:t>
+            </a:r>
+            <a:br/>
+            <a:br/>
+            <a:r>
+              <a:rPr>
+                <a:solidFill>
+                  <a:srgbClr val="5E5E5E"/>
+                </a:solidFill>
+                <a:latin typeface="Courier"/>
+              </a:rPr>
+              <a:t># calculate extra months to make plot rectangular</a:t>
+            </a:r>
+            <a:br/>
+            <a:r>
+              <a:rPr>
+                <a:solidFill>
+                  <a:srgbClr val="003B4F"/>
+                </a:solidFill>
+                <a:latin typeface="Courier"/>
+              </a:rPr>
+              <a:t>cal_ncol &lt;- </a:t>
+            </a:r>
+            <a:r>
+              <a:rPr>
+                <a:solidFill>
+                  <a:srgbClr val="AD0000"/>
+                </a:solidFill>
+                <a:latin typeface="Courier"/>
+              </a:rPr>
+              <a:t>3</a:t>
+            </a:r>
+            <a:br/>
+            <a:r>
+              <a:rPr>
+                <a:solidFill>
+                  <a:srgbClr val="003B4F"/>
+                </a:solidFill>
+                <a:latin typeface="Courier"/>
+              </a:rPr>
+              <a:t>startMonth &lt;- </a:t>
+            </a:r>
+            <a:r>
+              <a:rPr>
+                <a:solidFill>
+                  <a:srgbClr val="4758AB"/>
+                </a:solidFill>
+                <a:latin typeface="Courier"/>
+              </a:rPr>
+              <a:t>month</a:t>
+            </a:r>
+            <a:r>
+              <a:rPr>
+                <a:solidFill>
+                  <a:srgbClr val="003B4F"/>
+                </a:solidFill>
+                <a:latin typeface="Courier"/>
+              </a:rPr>
+              <a:t>(</a:t>
+            </a:r>
+            <a:r>
+              <a:rPr>
+                <a:solidFill>
+                  <a:srgbClr val="4758AB"/>
+                </a:solidFill>
+                <a:latin typeface="Courier"/>
+              </a:rPr>
+              <a:t>floor_date</a:t>
+            </a:r>
+            <a:r>
+              <a:rPr>
+                <a:solidFill>
+                  <a:srgbClr val="003B4F"/>
+                </a:solidFill>
+                <a:latin typeface="Courier"/>
+              </a:rPr>
+              <a:t>(</a:t>
+            </a:r>
+            <a:r>
+              <a:rPr>
+                <a:solidFill>
+                  <a:srgbClr val="4758AB"/>
+                </a:solidFill>
+                <a:latin typeface="Courier"/>
+              </a:rPr>
+              <a:t>min</a:t>
+            </a:r>
+            <a:r>
+              <a:rPr>
+                <a:solidFill>
+                  <a:srgbClr val="003B4F"/>
+                </a:solidFill>
+                <a:latin typeface="Courier"/>
+              </a:rPr>
+              <a:t>(travel_days</a:t>
+            </a:r>
+            <a:r>
+              <a:rPr>
+                <a:solidFill>
+                  <a:srgbClr val="5E5E5E"/>
+                </a:solidFill>
+                <a:latin typeface="Courier"/>
+              </a:rPr>
+              <a:t>$</a:t>
+            </a:r>
+            <a:r>
+              <a:rPr>
+                <a:solidFill>
+                  <a:srgbClr val="003B4F"/>
+                </a:solidFill>
+                <a:latin typeface="Courier"/>
+              </a:rPr>
+              <a:t>date), </a:t>
+            </a:r>
+            <a:r>
+              <a:rPr>
+                <a:solidFill>
+                  <a:srgbClr val="20794D"/>
+                </a:solidFill>
+                <a:latin typeface="Courier"/>
+              </a:rPr>
+              <a:t>"month"</a:t>
+            </a:r>
+            <a:r>
+              <a:rPr>
+                <a:solidFill>
+                  <a:srgbClr val="003B4F"/>
+                </a:solidFill>
+                <a:latin typeface="Courier"/>
+              </a:rPr>
+              <a:t>))</a:t>
+            </a:r>
+            <a:br/>
+            <a:r>
+              <a:rPr>
+                <a:solidFill>
+                  <a:srgbClr val="003B4F"/>
+                </a:solidFill>
+                <a:latin typeface="Courier"/>
+              </a:rPr>
+              <a:t>endMonth &lt;- </a:t>
+            </a:r>
+            <a:r>
+              <a:rPr>
+                <a:solidFill>
+                  <a:srgbClr val="4758AB"/>
+                </a:solidFill>
+                <a:latin typeface="Courier"/>
+              </a:rPr>
+              <a:t>month</a:t>
+            </a:r>
+            <a:r>
+              <a:rPr>
+                <a:solidFill>
+                  <a:srgbClr val="003B4F"/>
+                </a:solidFill>
+                <a:latin typeface="Courier"/>
+              </a:rPr>
+              <a:t>(</a:t>
+            </a:r>
+            <a:r>
+              <a:rPr>
+                <a:solidFill>
+                  <a:srgbClr val="4758AB"/>
+                </a:solidFill>
+                <a:latin typeface="Courier"/>
+              </a:rPr>
+              <a:t>ceiling_date</a:t>
+            </a:r>
+            <a:r>
+              <a:rPr>
+                <a:solidFill>
+                  <a:srgbClr val="003B4F"/>
+                </a:solidFill>
+                <a:latin typeface="Courier"/>
+              </a:rPr>
+              <a:t>(</a:t>
+            </a:r>
+            <a:r>
+              <a:rPr>
+                <a:solidFill>
+                  <a:srgbClr val="4758AB"/>
+                </a:solidFill>
+                <a:latin typeface="Courier"/>
+              </a:rPr>
+              <a:t>max</a:t>
+            </a:r>
+            <a:r>
+              <a:rPr>
+                <a:solidFill>
+                  <a:srgbClr val="003B4F"/>
+                </a:solidFill>
+                <a:latin typeface="Courier"/>
+              </a:rPr>
+              <a:t>(travel_days</a:t>
+            </a:r>
+            <a:r>
+              <a:rPr>
+                <a:solidFill>
+                  <a:srgbClr val="5E5E5E"/>
+                </a:solidFill>
+                <a:latin typeface="Courier"/>
+              </a:rPr>
+              <a:t>$</a:t>
+            </a:r>
+            <a:r>
+              <a:rPr>
+                <a:solidFill>
+                  <a:srgbClr val="003B4F"/>
+                </a:solidFill>
+                <a:latin typeface="Courier"/>
+              </a:rPr>
+              <a:t>date), </a:t>
+            </a:r>
+            <a:r>
+              <a:rPr>
+                <a:solidFill>
+                  <a:srgbClr val="20794D"/>
+                </a:solidFill>
+                <a:latin typeface="Courier"/>
+              </a:rPr>
+              <a:t>"month"</a:t>
+            </a:r>
+            <a:r>
+              <a:rPr>
+                <a:solidFill>
+                  <a:srgbClr val="003B4F"/>
+                </a:solidFill>
+                <a:latin typeface="Courier"/>
+              </a:rPr>
+              <a:t>) </a:t>
+            </a:r>
+            <a:r>
+              <a:rPr>
+                <a:solidFill>
+                  <a:srgbClr val="5E5E5E"/>
+                </a:solidFill>
+                <a:latin typeface="Courier"/>
+              </a:rPr>
+              <a:t>-</a:t>
+            </a:r>
+            <a:r>
+              <a:rPr>
+                <a:solidFill>
+                  <a:srgbClr val="003B4F"/>
+                </a:solidFill>
+                <a:latin typeface="Courier"/>
+              </a:rPr>
+              <a:t> </a:t>
+            </a:r>
+            <a:r>
+              <a:rPr>
+                <a:solidFill>
+                  <a:srgbClr val="AD0000"/>
+                </a:solidFill>
+                <a:latin typeface="Courier"/>
+              </a:rPr>
+              <a:t>1</a:t>
+            </a:r>
+            <a:r>
+              <a:rPr>
+                <a:solidFill>
+                  <a:srgbClr val="003B4F"/>
+                </a:solidFill>
+                <a:latin typeface="Courier"/>
+              </a:rPr>
+              <a:t>)</a:t>
+            </a:r>
+            <a:br/>
+            <a:r>
+              <a:rPr>
+                <a:solidFill>
+                  <a:srgbClr val="003B4F"/>
+                </a:solidFill>
+                <a:latin typeface="Courier"/>
+              </a:rPr>
+              <a:t>n_extra_month &lt;- cal_ncol </a:t>
+            </a:r>
+            <a:r>
+              <a:rPr>
+                <a:solidFill>
+                  <a:srgbClr val="5E5E5E"/>
+                </a:solidFill>
+                <a:latin typeface="Courier"/>
+              </a:rPr>
+              <a:t>-</a:t>
+            </a:r>
+            <a:r>
+              <a:rPr>
+                <a:solidFill>
+                  <a:srgbClr val="003B4F"/>
+                </a:solidFill>
+                <a:latin typeface="Courier"/>
+              </a:rPr>
+              <a:t> ((endMonth </a:t>
+            </a:r>
+            <a:r>
+              <a:rPr>
+                <a:solidFill>
+                  <a:srgbClr val="5E5E5E"/>
+                </a:solidFill>
+                <a:latin typeface="Courier"/>
+              </a:rPr>
+              <a:t>-</a:t>
+            </a:r>
+            <a:r>
+              <a:rPr>
+                <a:solidFill>
+                  <a:srgbClr val="003B4F"/>
+                </a:solidFill>
+                <a:latin typeface="Courier"/>
+              </a:rPr>
+              <a:t> startMonth </a:t>
+            </a:r>
+            <a:r>
+              <a:rPr>
+                <a:solidFill>
+                  <a:srgbClr val="5E5E5E"/>
+                </a:solidFill>
+                <a:latin typeface="Courier"/>
+              </a:rPr>
+              <a:t>+</a:t>
+            </a:r>
+            <a:r>
+              <a:rPr>
+                <a:solidFill>
+                  <a:srgbClr val="003B4F"/>
+                </a:solidFill>
+                <a:latin typeface="Courier"/>
+              </a:rPr>
+              <a:t> </a:t>
+            </a:r>
+            <a:r>
+              <a:rPr>
+                <a:solidFill>
+                  <a:srgbClr val="AD0000"/>
+                </a:solidFill>
+                <a:latin typeface="Courier"/>
+              </a:rPr>
+              <a:t>1</a:t>
+            </a:r>
+            <a:r>
+              <a:rPr>
+                <a:solidFill>
+                  <a:srgbClr val="003B4F"/>
+                </a:solidFill>
+                <a:latin typeface="Courier"/>
+              </a:rPr>
+              <a:t>) </a:t>
+            </a:r>
+            <a:r>
+              <a:rPr>
+                <a:solidFill>
+                  <a:srgbClr val="5E5E5E"/>
+                </a:solidFill>
+                <a:latin typeface="Courier"/>
+              </a:rPr>
+              <a:t>%%</a:t>
+            </a:r>
+            <a:r>
+              <a:rPr>
+                <a:solidFill>
+                  <a:srgbClr val="003B4F"/>
+                </a:solidFill>
+                <a:latin typeface="Courier"/>
+              </a:rPr>
+              <a:t> cal_ncol)</a:t>
+            </a:r>
+            <a:br/>
+            <a:r>
+              <a:rPr>
+                <a:solidFill>
+                  <a:srgbClr val="003B4F"/>
+                </a:solidFill>
+                <a:latin typeface="Courier"/>
+              </a:rPr>
+              <a:t>padding_days &lt;- </a:t>
+            </a:r>
+            <a:r>
+              <a:rPr>
+                <a:solidFill>
+                  <a:srgbClr val="4758AB"/>
+                </a:solidFill>
+                <a:latin typeface="Courier"/>
+              </a:rPr>
+              <a:t>summarise</a:t>
+            </a:r>
+            <a:r>
+              <a:rPr>
+                <a:solidFill>
+                  <a:srgbClr val="003B4F"/>
+                </a:solidFill>
+                <a:latin typeface="Courier"/>
+              </a:rPr>
+              <a:t>(</a:t>
+            </a:r>
+            <a:br/>
+            <a:r>
+              <a:rPr>
+                <a:solidFill>
+                  <a:srgbClr val="003B4F"/>
+                </a:solidFill>
+                <a:latin typeface="Courier"/>
+              </a:rPr>
+              <a:t>    travel_days,</a:t>
+            </a:r>
+            <a:br/>
+            <a:r>
+              <a:rPr>
+                <a:solidFill>
+                  <a:srgbClr val="003B4F"/>
+                </a:solidFill>
+                <a:latin typeface="Courier"/>
+              </a:rPr>
+              <a:t>    </a:t>
+            </a:r>
+            <a:r>
+              <a:rPr>
+                <a:solidFill>
+                  <a:srgbClr val="657422"/>
+                </a:solidFill>
+                <a:latin typeface="Courier"/>
+              </a:rPr>
+              <a:t>startDate =</a:t>
+            </a:r>
+            <a:r>
+              <a:rPr>
+                <a:solidFill>
+                  <a:srgbClr val="003B4F"/>
+                </a:solidFill>
+                <a:latin typeface="Courier"/>
+              </a:rPr>
+              <a:t> </a:t>
+            </a:r>
+            <a:r>
+              <a:rPr>
+                <a:solidFill>
+                  <a:srgbClr val="4758AB"/>
+                </a:solidFill>
+                <a:latin typeface="Courier"/>
+              </a:rPr>
+              <a:t>floor_date</a:t>
+            </a:r>
+            <a:r>
+              <a:rPr>
+                <a:solidFill>
+                  <a:srgbClr val="003B4F"/>
+                </a:solidFill>
+                <a:latin typeface="Courier"/>
+              </a:rPr>
+              <a:t>(</a:t>
+            </a:r>
+            <a:r>
+              <a:rPr>
+                <a:solidFill>
+                  <a:srgbClr val="4758AB"/>
+                </a:solidFill>
+                <a:latin typeface="Courier"/>
+              </a:rPr>
+              <a:t>min</a:t>
+            </a:r>
+            <a:r>
+              <a:rPr>
+                <a:solidFill>
+                  <a:srgbClr val="003B4F"/>
+                </a:solidFill>
+                <a:latin typeface="Courier"/>
+              </a:rPr>
+              <a:t>(date), </a:t>
+            </a:r>
+            <a:r>
+              <a:rPr>
+                <a:solidFill>
+                  <a:srgbClr val="20794D"/>
+                </a:solidFill>
+                <a:latin typeface="Courier"/>
+              </a:rPr>
+              <a:t>"month"</a:t>
+            </a:r>
+            <a:r>
+              <a:rPr>
+                <a:solidFill>
+                  <a:srgbClr val="003B4F"/>
+                </a:solidFill>
+                <a:latin typeface="Courier"/>
+              </a:rPr>
+              <a:t>),</a:t>
+            </a:r>
+            <a:br/>
+            <a:r>
+              <a:rPr>
+                <a:solidFill>
+                  <a:srgbClr val="003B4F"/>
+                </a:solidFill>
+                <a:latin typeface="Courier"/>
+              </a:rPr>
+              <a:t>    </a:t>
+            </a:r>
+            <a:r>
+              <a:rPr>
+                <a:solidFill>
+                  <a:srgbClr val="657422"/>
+                </a:solidFill>
+                <a:latin typeface="Courier"/>
+              </a:rPr>
+              <a:t>endDate =</a:t>
+            </a:r>
+            <a:r>
+              <a:rPr>
+                <a:solidFill>
+                  <a:srgbClr val="003B4F"/>
+                </a:solidFill>
+                <a:latin typeface="Courier"/>
+              </a:rPr>
+              <a:t> </a:t>
+            </a:r>
+            <a:r>
+              <a:rPr>
+                <a:solidFill>
+                  <a:srgbClr val="4758AB"/>
+                </a:solidFill>
+                <a:latin typeface="Courier"/>
+              </a:rPr>
+              <a:t>ceiling_date</a:t>
+            </a:r>
+            <a:r>
+              <a:rPr>
+                <a:solidFill>
+                  <a:srgbClr val="003B4F"/>
+                </a:solidFill>
+                <a:latin typeface="Courier"/>
+              </a:rPr>
+              <a:t>(</a:t>
+            </a:r>
+            <a:r>
+              <a:rPr>
+                <a:solidFill>
+                  <a:srgbClr val="4758AB"/>
+                </a:solidFill>
+                <a:latin typeface="Courier"/>
+              </a:rPr>
+              <a:t>max</a:t>
+            </a:r>
+            <a:r>
+              <a:rPr>
+                <a:solidFill>
+                  <a:srgbClr val="003B4F"/>
+                </a:solidFill>
+                <a:latin typeface="Courier"/>
+              </a:rPr>
+              <a:t>(date) </a:t>
+            </a:r>
+            <a:r>
+              <a:rPr>
+                <a:solidFill>
+                  <a:srgbClr val="5E5E5E"/>
+                </a:solidFill>
+                <a:latin typeface="Courier"/>
+              </a:rPr>
+              <a:t>%m+%</a:t>
+            </a:r>
+            <a:r>
+              <a:rPr>
+                <a:solidFill>
+                  <a:srgbClr val="003B4F"/>
+                </a:solidFill>
+                <a:latin typeface="Courier"/>
+              </a:rPr>
+              <a:t> </a:t>
+            </a:r>
+            <a:r>
+              <a:rPr>
+                <a:solidFill>
+                  <a:srgbClr val="4758AB"/>
+                </a:solidFill>
+                <a:latin typeface="Courier"/>
+              </a:rPr>
+              <a:t>months</a:t>
+            </a:r>
+            <a:r>
+              <a:rPr>
+                <a:solidFill>
+                  <a:srgbClr val="003B4F"/>
+                </a:solidFill>
+                <a:latin typeface="Courier"/>
+              </a:rPr>
+              <a:t>(n_extra_month), </a:t>
+            </a:r>
+            <a:r>
+              <a:rPr>
+                <a:solidFill>
+                  <a:srgbClr val="20794D"/>
+                </a:solidFill>
+                <a:latin typeface="Courier"/>
+              </a:rPr>
+              <a:t>"month"</a:t>
+            </a:r>
+            <a:r>
+              <a:rPr>
+                <a:solidFill>
+                  <a:srgbClr val="003B4F"/>
+                </a:solidFill>
+                <a:latin typeface="Courier"/>
+              </a:rPr>
+              <a:t>) </a:t>
+            </a:r>
+            <a:r>
+              <a:rPr>
+                <a:solidFill>
+                  <a:srgbClr val="5E5E5E"/>
+                </a:solidFill>
+                <a:latin typeface="Courier"/>
+              </a:rPr>
+              <a:t>-</a:t>
+            </a:r>
+            <a:r>
+              <a:rPr>
+                <a:solidFill>
+                  <a:srgbClr val="003B4F"/>
+                </a:solidFill>
+                <a:latin typeface="Courier"/>
+              </a:rPr>
+              <a:t> </a:t>
+            </a:r>
+            <a:r>
+              <a:rPr>
+                <a:solidFill>
+                  <a:srgbClr val="AD0000"/>
+                </a:solidFill>
+                <a:latin typeface="Courier"/>
+              </a:rPr>
+              <a:t>1</a:t>
+            </a:r>
+            <a:br/>
+            <a:r>
+              <a:rPr>
+                <a:solidFill>
+                  <a:srgbClr val="003B4F"/>
+                </a:solidFill>
+                <a:latin typeface="Courier"/>
+              </a:rPr>
+              <a:t>) </a:t>
+            </a:r>
+            <a:r>
+              <a:rPr>
+                <a:solidFill>
+                  <a:srgbClr val="5E5E5E"/>
+                </a:solidFill>
+                <a:latin typeface="Courier"/>
+              </a:rPr>
+              <a:t>|&gt;</a:t>
+            </a:r>
+            <a:br/>
+            <a:r>
+              <a:rPr>
+                <a:solidFill>
+                  <a:srgbClr val="003B4F"/>
+                </a:solidFill>
+                <a:latin typeface="Courier"/>
+              </a:rPr>
+              <a:t>    </a:t>
+            </a:r>
+            <a:r>
+              <a:rPr>
+                <a:solidFill>
+                  <a:srgbClr val="4758AB"/>
+                </a:solidFill>
+                <a:latin typeface="Courier"/>
+              </a:rPr>
+              <a:t>reframe</a:t>
+            </a:r>
+            <a:r>
+              <a:rPr>
+                <a:solidFill>
+                  <a:srgbClr val="003B4F"/>
+                </a:solidFill>
+                <a:latin typeface="Courier"/>
+              </a:rPr>
+              <a:t>(</a:t>
+            </a:r>
+            <a:r>
+              <a:rPr>
+                <a:solidFill>
+                  <a:srgbClr val="657422"/>
+                </a:solidFill>
+                <a:latin typeface="Courier"/>
+              </a:rPr>
+              <a:t>date =</a:t>
+            </a:r>
+            <a:r>
+              <a:rPr>
+                <a:solidFill>
+                  <a:srgbClr val="003B4F"/>
+                </a:solidFill>
+                <a:latin typeface="Courier"/>
+              </a:rPr>
+              <a:t> </a:t>
+            </a:r>
+            <a:r>
+              <a:rPr>
+                <a:solidFill>
+                  <a:srgbClr val="4758AB"/>
+                </a:solidFill>
+                <a:latin typeface="Courier"/>
+              </a:rPr>
+              <a:t>seq</a:t>
+            </a:r>
+            <a:r>
+              <a:rPr>
+                <a:solidFill>
+                  <a:srgbClr val="003B4F"/>
+                </a:solidFill>
+                <a:latin typeface="Courier"/>
+              </a:rPr>
+              <a:t>(startDate, endDate, </a:t>
+            </a:r>
+            <a:r>
+              <a:rPr>
+                <a:solidFill>
+                  <a:srgbClr val="657422"/>
+                </a:solidFill>
+                <a:latin typeface="Courier"/>
+              </a:rPr>
+              <a:t>by =</a:t>
+            </a:r>
+            <a:r>
+              <a:rPr>
+                <a:solidFill>
+                  <a:srgbClr val="003B4F"/>
+                </a:solidFill>
+                <a:latin typeface="Courier"/>
+              </a:rPr>
+              <a:t> </a:t>
+            </a:r>
+            <a:r>
+              <a:rPr>
+                <a:solidFill>
+                  <a:srgbClr val="20794D"/>
+                </a:solidFill>
+                <a:latin typeface="Courier"/>
+              </a:rPr>
+              <a:t>"day"</a:t>
+            </a:r>
+            <a:r>
+              <a:rPr>
+                <a:solidFill>
+                  <a:srgbClr val="003B4F"/>
+                </a:solidFill>
+                <a:latin typeface="Courier"/>
+              </a:rPr>
+              <a:t>))</a:t>
+            </a:r>
+            <a:br/>
+            <a:br/>
+            <a:r>
+              <a:rPr>
+                <a:solidFill>
+                  <a:srgbClr val="5E5E5E"/>
+                </a:solidFill>
+                <a:latin typeface="Courier"/>
+              </a:rPr>
+              <a:t># prepare calendar data</a:t>
+            </a:r>
+            <a:br/>
+            <a:r>
+              <a:rPr>
+                <a:solidFill>
+                  <a:srgbClr val="003B4F"/>
+                </a:solidFill>
+                <a:latin typeface="Courier"/>
+              </a:rPr>
+              <a:t>full_calendar &lt;- padding_days </a:t>
+            </a:r>
+            <a:r>
+              <a:rPr>
+                <a:solidFill>
+                  <a:srgbClr val="5E5E5E"/>
+                </a:solidFill>
+                <a:latin typeface="Courier"/>
+              </a:rPr>
+              <a:t>|&gt;</a:t>
+            </a:r>
+            <a:br/>
+            <a:r>
+              <a:rPr>
+                <a:solidFill>
+                  <a:srgbClr val="003B4F"/>
+                </a:solidFill>
+                <a:latin typeface="Courier"/>
+              </a:rPr>
+              <a:t>    </a:t>
+            </a:r>
+            <a:r>
+              <a:rPr>
+                <a:solidFill>
+                  <a:srgbClr val="4758AB"/>
+                </a:solidFill>
+                <a:latin typeface="Courier"/>
+              </a:rPr>
+              <a:t>anti_join</a:t>
+            </a:r>
+            <a:r>
+              <a:rPr>
+                <a:solidFill>
+                  <a:srgbClr val="003B4F"/>
+                </a:solidFill>
+                <a:latin typeface="Courier"/>
+              </a:rPr>
+              <a:t>(daily_loc, </a:t>
+            </a:r>
+            <a:r>
+              <a:rPr>
+                <a:solidFill>
+                  <a:srgbClr val="657422"/>
+                </a:solidFill>
+                <a:latin typeface="Courier"/>
+              </a:rPr>
+              <a:t>by =</a:t>
+            </a:r>
+            <a:r>
+              <a:rPr>
+                <a:solidFill>
+                  <a:srgbClr val="003B4F"/>
+                </a:solidFill>
+                <a:latin typeface="Courier"/>
+              </a:rPr>
+              <a:t> </a:t>
+            </a:r>
+            <a:r>
+              <a:rPr>
+                <a:solidFill>
+                  <a:srgbClr val="20794D"/>
+                </a:solidFill>
+                <a:latin typeface="Courier"/>
+              </a:rPr>
+              <a:t>"date"</a:t>
+            </a:r>
+            <a:r>
+              <a:rPr>
+                <a:solidFill>
+                  <a:srgbClr val="003B4F"/>
+                </a:solidFill>
+                <a:latin typeface="Courier"/>
+              </a:rPr>
+              <a:t>) </a:t>
+            </a:r>
+            <a:r>
+              <a:rPr>
+                <a:solidFill>
+                  <a:srgbClr val="5E5E5E"/>
+                </a:solidFill>
+                <a:latin typeface="Courier"/>
+              </a:rPr>
+              <a:t>|&gt;</a:t>
+            </a:r>
+            <a:br/>
+            <a:r>
+              <a:rPr>
+                <a:solidFill>
+                  <a:srgbClr val="003B4F"/>
+                </a:solidFill>
+                <a:latin typeface="Courier"/>
+              </a:rPr>
+              <a:t>    </a:t>
+            </a:r>
+            <a:r>
+              <a:rPr>
+                <a:solidFill>
+                  <a:srgbClr val="4758AB"/>
+                </a:solidFill>
+                <a:latin typeface="Courier"/>
+              </a:rPr>
+              <a:t>bind_rows</a:t>
+            </a:r>
+            <a:r>
+              <a:rPr>
+                <a:solidFill>
+                  <a:srgbClr val="003B4F"/>
+                </a:solidFill>
+                <a:latin typeface="Courier"/>
+              </a:rPr>
+              <a:t>(daily_loc) </a:t>
+            </a:r>
+            <a:r>
+              <a:rPr>
+                <a:solidFill>
+                  <a:srgbClr val="5E5E5E"/>
+                </a:solidFill>
+                <a:latin typeface="Courier"/>
+              </a:rPr>
+              <a:t>|&gt;</a:t>
+            </a:r>
+            <a:br/>
+            <a:r>
+              <a:rPr>
+                <a:solidFill>
+                  <a:srgbClr val="003B4F"/>
+                </a:solidFill>
+                <a:latin typeface="Courier"/>
+              </a:rPr>
+              <a:t>    </a:t>
+            </a:r>
+            <a:r>
+              <a:rPr>
+                <a:solidFill>
+                  <a:srgbClr val="4758AB"/>
+                </a:solidFill>
+                <a:latin typeface="Courier"/>
+              </a:rPr>
+              <a:t>mutate</a:t>
+            </a:r>
+            <a:r>
+              <a:rPr>
+                <a:solidFill>
+                  <a:srgbClr val="003B4F"/>
+                </a:solidFill>
+                <a:latin typeface="Courier"/>
+              </a:rPr>
+              <a:t>(</a:t>
+            </a:r>
+            <a:br/>
+            <a:r>
+              <a:rPr>
+                <a:solidFill>
+                  <a:srgbClr val="003B4F"/>
+                </a:solidFill>
+                <a:latin typeface="Courier"/>
+              </a:rPr>
+              <a:t>        </a:t>
+            </a:r>
+            <a:r>
+              <a:rPr>
+                <a:solidFill>
+                  <a:srgbClr val="657422"/>
+                </a:solidFill>
+                <a:latin typeface="Courier"/>
+              </a:rPr>
+              <a:t>Year =</a:t>
+            </a:r>
+            <a:r>
+              <a:rPr>
+                <a:solidFill>
+                  <a:srgbClr val="003B4F"/>
+                </a:solidFill>
+                <a:latin typeface="Courier"/>
+              </a:rPr>
+              <a:t> </a:t>
+            </a:r>
+            <a:r>
+              <a:rPr>
+                <a:solidFill>
+                  <a:srgbClr val="4758AB"/>
+                </a:solidFill>
+                <a:latin typeface="Courier"/>
+              </a:rPr>
+              <a:t>year</a:t>
+            </a:r>
+            <a:r>
+              <a:rPr>
+                <a:solidFill>
+                  <a:srgbClr val="003B4F"/>
+                </a:solidFill>
+                <a:latin typeface="Courier"/>
+              </a:rPr>
+              <a:t>(date),</a:t>
+            </a:r>
+            <a:br/>
+            <a:r>
+              <a:rPr>
+                <a:solidFill>
+                  <a:srgbClr val="003B4F"/>
+                </a:solidFill>
+                <a:latin typeface="Courier"/>
+              </a:rPr>
+              <a:t>        </a:t>
+            </a:r>
+            <a:r>
+              <a:rPr>
+                <a:solidFill>
+                  <a:srgbClr val="657422"/>
+                </a:solidFill>
+                <a:latin typeface="Courier"/>
+              </a:rPr>
+              <a:t>Month =</a:t>
+            </a:r>
+            <a:r>
+              <a:rPr>
+                <a:solidFill>
+                  <a:srgbClr val="003B4F"/>
+                </a:solidFill>
+                <a:latin typeface="Courier"/>
+              </a:rPr>
+              <a:t> </a:t>
+            </a:r>
+            <a:r>
+              <a:rPr>
+                <a:solidFill>
+                  <a:srgbClr val="4758AB"/>
+                </a:solidFill>
+                <a:latin typeface="Courier"/>
+              </a:rPr>
+              <a:t>month</a:t>
+            </a:r>
+            <a:r>
+              <a:rPr>
+                <a:solidFill>
+                  <a:srgbClr val="003B4F"/>
+                </a:solidFill>
+                <a:latin typeface="Courier"/>
+              </a:rPr>
+              <a:t>(date, </a:t>
+            </a:r>
+            <a:r>
+              <a:rPr>
+                <a:solidFill>
+                  <a:srgbClr val="657422"/>
+                </a:solidFill>
+                <a:latin typeface="Courier"/>
+              </a:rPr>
+              <a:t>label =</a:t>
+            </a:r>
+            <a:r>
+              <a:rPr>
+                <a:solidFill>
+                  <a:srgbClr val="003B4F"/>
+                </a:solidFill>
+                <a:latin typeface="Courier"/>
+              </a:rPr>
+              <a:t> </a:t>
+            </a:r>
+            <a:r>
+              <a:rPr>
+                <a:solidFill>
+                  <a:srgbClr val="8F5902"/>
+                </a:solidFill>
+                <a:latin typeface="Courier"/>
+              </a:rPr>
+              <a:t>TRUE</a:t>
+            </a:r>
+            <a:r>
+              <a:rPr>
+                <a:solidFill>
+                  <a:srgbClr val="003B4F"/>
+                </a:solidFill>
+                <a:latin typeface="Courier"/>
+              </a:rPr>
+              <a:t>),</a:t>
+            </a:r>
+            <a:br/>
+            <a:r>
+              <a:rPr>
+                <a:solidFill>
+                  <a:srgbClr val="003B4F"/>
+                </a:solidFill>
+                <a:latin typeface="Courier"/>
+              </a:rPr>
+              <a:t>        </a:t>
+            </a:r>
+            <a:r>
+              <a:rPr>
+                <a:solidFill>
+                  <a:srgbClr val="657422"/>
+                </a:solidFill>
+                <a:latin typeface="Courier"/>
+              </a:rPr>
+              <a:t>Day =</a:t>
+            </a:r>
+            <a:r>
+              <a:rPr>
+                <a:solidFill>
+                  <a:srgbClr val="003B4F"/>
+                </a:solidFill>
+                <a:latin typeface="Courier"/>
+              </a:rPr>
+              <a:t> </a:t>
+            </a:r>
+            <a:r>
+              <a:rPr>
+                <a:solidFill>
+                  <a:srgbClr val="4758AB"/>
+                </a:solidFill>
+                <a:latin typeface="Courier"/>
+              </a:rPr>
+              <a:t>wday</a:t>
+            </a:r>
+            <a:r>
+              <a:rPr>
+                <a:solidFill>
+                  <a:srgbClr val="003B4F"/>
+                </a:solidFill>
+                <a:latin typeface="Courier"/>
+              </a:rPr>
+              <a:t>(date, </a:t>
+            </a:r>
+            <a:r>
+              <a:rPr>
+                <a:solidFill>
+                  <a:srgbClr val="657422"/>
+                </a:solidFill>
+                <a:latin typeface="Courier"/>
+              </a:rPr>
+              <a:t>label =</a:t>
+            </a:r>
+            <a:r>
+              <a:rPr>
+                <a:solidFill>
+                  <a:srgbClr val="003B4F"/>
+                </a:solidFill>
+                <a:latin typeface="Courier"/>
+              </a:rPr>
+              <a:t> </a:t>
+            </a:r>
+            <a:r>
+              <a:rPr>
+                <a:solidFill>
+                  <a:srgbClr val="8F5902"/>
+                </a:solidFill>
+                <a:latin typeface="Courier"/>
+              </a:rPr>
+              <a:t>TRUE</a:t>
+            </a:r>
+            <a:r>
+              <a:rPr>
+                <a:solidFill>
+                  <a:srgbClr val="003B4F"/>
+                </a:solidFill>
+                <a:latin typeface="Courier"/>
+              </a:rPr>
+              <a:t>, </a:t>
+            </a:r>
+            <a:r>
+              <a:rPr>
+                <a:solidFill>
+                  <a:srgbClr val="657422"/>
+                </a:solidFill>
+                <a:latin typeface="Courier"/>
+              </a:rPr>
+              <a:t>week_start =</a:t>
+            </a:r>
+            <a:r>
+              <a:rPr>
+                <a:solidFill>
+                  <a:srgbClr val="003B4F"/>
+                </a:solidFill>
+                <a:latin typeface="Courier"/>
+              </a:rPr>
+              <a:t> </a:t>
+            </a:r>
+            <a:r>
+              <a:rPr>
+                <a:solidFill>
+                  <a:srgbClr val="AD0000"/>
+                </a:solidFill>
+                <a:latin typeface="Courier"/>
+              </a:rPr>
+              <a:t>1</a:t>
+            </a:r>
+            <a:r>
+              <a:rPr>
+                <a:solidFill>
+                  <a:srgbClr val="003B4F"/>
+                </a:solidFill>
+                <a:latin typeface="Courier"/>
+              </a:rPr>
+              <a:t>),</a:t>
+            </a:r>
+            <a:br/>
+            <a:r>
+              <a:rPr>
+                <a:solidFill>
+                  <a:srgbClr val="003B4F"/>
+                </a:solidFill>
+                <a:latin typeface="Courier"/>
+              </a:rPr>
+              <a:t>        </a:t>
+            </a:r>
+            <a:r>
+              <a:rPr>
+                <a:solidFill>
+                  <a:srgbClr val="657422"/>
+                </a:solidFill>
+                <a:latin typeface="Courier"/>
+              </a:rPr>
+              <a:t>mday =</a:t>
+            </a:r>
+            <a:r>
+              <a:rPr>
+                <a:solidFill>
+                  <a:srgbClr val="003B4F"/>
+                </a:solidFill>
+                <a:latin typeface="Courier"/>
+              </a:rPr>
+              <a:t> </a:t>
+            </a:r>
+            <a:r>
+              <a:rPr>
+                <a:solidFill>
+                  <a:srgbClr val="4758AB"/>
+                </a:solidFill>
+                <a:latin typeface="Courier"/>
+              </a:rPr>
+              <a:t>mday</a:t>
+            </a:r>
+            <a:r>
+              <a:rPr>
+                <a:solidFill>
+                  <a:srgbClr val="003B4F"/>
+                </a:solidFill>
+                <a:latin typeface="Courier"/>
+              </a:rPr>
+              <a:t>(date),</a:t>
+            </a:r>
+            <a:br/>
+            <a:r>
+              <a:rPr>
+                <a:solidFill>
+                  <a:srgbClr val="003B4F"/>
+                </a:solidFill>
+                <a:latin typeface="Courier"/>
+              </a:rPr>
+              <a:t>        </a:t>
+            </a:r>
+            <a:r>
+              <a:rPr>
+                <a:solidFill>
+                  <a:srgbClr val="657422"/>
+                </a:solidFill>
+                <a:latin typeface="Courier"/>
+              </a:rPr>
+              <a:t>Month_week =</a:t>
+            </a:r>
+            <a:r>
+              <a:rPr>
+                <a:solidFill>
+                  <a:srgbClr val="003B4F"/>
+                </a:solidFill>
+                <a:latin typeface="Courier"/>
+              </a:rPr>
+              <a:t> (</a:t>
+            </a:r>
+            <a:r>
+              <a:rPr>
+                <a:solidFill>
+                  <a:srgbClr val="AD0000"/>
+                </a:solidFill>
+                <a:latin typeface="Courier"/>
+              </a:rPr>
+              <a:t>5</a:t>
+            </a:r>
+            <a:r>
+              <a:rPr>
+                <a:solidFill>
+                  <a:srgbClr val="003B4F"/>
+                </a:solidFill>
+                <a:latin typeface="Courier"/>
+              </a:rPr>
+              <a:t> </a:t>
+            </a:r>
+            <a:r>
+              <a:rPr>
+                <a:solidFill>
+                  <a:srgbClr val="5E5E5E"/>
+                </a:solidFill>
+                <a:latin typeface="Courier"/>
+              </a:rPr>
+              <a:t>+</a:t>
+            </a:r>
+            <a:r>
+              <a:rPr>
+                <a:solidFill>
+                  <a:srgbClr val="003B4F"/>
+                </a:solidFill>
+                <a:latin typeface="Courier"/>
+              </a:rPr>
+              <a:t> </a:t>
+            </a:r>
+            <a:r>
+              <a:rPr>
+                <a:solidFill>
+                  <a:srgbClr val="4758AB"/>
+                </a:solidFill>
+                <a:latin typeface="Courier"/>
+              </a:rPr>
+              <a:t>day</a:t>
+            </a:r>
+            <a:r>
+              <a:rPr>
+                <a:solidFill>
+                  <a:srgbClr val="003B4F"/>
+                </a:solidFill>
+                <a:latin typeface="Courier"/>
+              </a:rPr>
+              <a:t>(date) </a:t>
+            </a:r>
+            <a:r>
+              <a:rPr>
+                <a:solidFill>
+                  <a:srgbClr val="5E5E5E"/>
+                </a:solidFill>
+                <a:latin typeface="Courier"/>
+              </a:rPr>
+              <a:t>+</a:t>
+            </a:r>
+            <a:br/>
+            <a:r>
+              <a:rPr>
+                <a:solidFill>
+                  <a:srgbClr val="003B4F"/>
+                </a:solidFill>
+                <a:latin typeface="Courier"/>
+              </a:rPr>
+              <a:t>            </a:t>
+            </a:r>
+            <a:r>
+              <a:rPr>
+                <a:solidFill>
+                  <a:srgbClr val="4758AB"/>
+                </a:solidFill>
+                <a:latin typeface="Courier"/>
+              </a:rPr>
+              <a:t>wday</a:t>
+            </a:r>
+            <a:r>
+              <a:rPr>
+                <a:solidFill>
+                  <a:srgbClr val="003B4F"/>
+                </a:solidFill>
+                <a:latin typeface="Courier"/>
+              </a:rPr>
+              <a:t>(</a:t>
+            </a:r>
+            <a:r>
+              <a:rPr>
+                <a:solidFill>
+                  <a:srgbClr val="4758AB"/>
+                </a:solidFill>
+                <a:latin typeface="Courier"/>
+              </a:rPr>
+              <a:t>floor_date</a:t>
+            </a:r>
+            <a:r>
+              <a:rPr>
+                <a:solidFill>
+                  <a:srgbClr val="003B4F"/>
+                </a:solidFill>
+                <a:latin typeface="Courier"/>
+              </a:rPr>
+              <a:t>(date, </a:t>
+            </a:r>
+            <a:r>
+              <a:rPr>
+                <a:solidFill>
+                  <a:srgbClr val="20794D"/>
+                </a:solidFill>
+                <a:latin typeface="Courier"/>
+              </a:rPr>
+              <a:t>"month"</a:t>
+            </a:r>
+            <a:r>
+              <a:rPr>
+                <a:solidFill>
+                  <a:srgbClr val="003B4F"/>
+                </a:solidFill>
+                <a:latin typeface="Courier"/>
+              </a:rPr>
+              <a:t>), </a:t>
+            </a:r>
+            <a:r>
+              <a:rPr>
+                <a:solidFill>
+                  <a:srgbClr val="657422"/>
+                </a:solidFill>
+                <a:latin typeface="Courier"/>
+              </a:rPr>
+              <a:t>week_start =</a:t>
+            </a:r>
+            <a:r>
+              <a:rPr>
+                <a:solidFill>
+                  <a:srgbClr val="003B4F"/>
+                </a:solidFill>
+                <a:latin typeface="Courier"/>
+              </a:rPr>
+              <a:t> </a:t>
+            </a:r>
+            <a:r>
+              <a:rPr>
+                <a:solidFill>
+                  <a:srgbClr val="AD0000"/>
+                </a:solidFill>
+                <a:latin typeface="Courier"/>
+              </a:rPr>
+              <a:t>1</a:t>
+            </a:r>
+            <a:r>
+              <a:rPr>
+                <a:solidFill>
+                  <a:srgbClr val="003B4F"/>
+                </a:solidFill>
+                <a:latin typeface="Courier"/>
+              </a:rPr>
+              <a:t>)) </a:t>
+            </a:r>
+            <a:r>
+              <a:rPr>
+                <a:solidFill>
+                  <a:srgbClr val="5E5E5E"/>
+                </a:solidFill>
+                <a:latin typeface="Courier"/>
+              </a:rPr>
+              <a:t>%/%</a:t>
+            </a:r>
+            <a:r>
+              <a:rPr>
+                <a:solidFill>
+                  <a:srgbClr val="003B4F"/>
+                </a:solidFill>
+                <a:latin typeface="Courier"/>
+              </a:rPr>
+              <a:t> </a:t>
+            </a:r>
+            <a:r>
+              <a:rPr>
+                <a:solidFill>
+                  <a:srgbClr val="AD0000"/>
+                </a:solidFill>
+                <a:latin typeface="Courier"/>
+              </a:rPr>
+              <a:t>7</a:t>
+            </a:r>
+            <a:br/>
+            <a:r>
+              <a:rPr>
+                <a:solidFill>
+                  <a:srgbClr val="003B4F"/>
+                </a:solidFill>
+                <a:latin typeface="Courier"/>
+              </a:rPr>
+              <a:t>    )</a:t>
+            </a:r>
+            <a:br/>
+            <a:br/>
+            <a:r>
+              <a:rPr i="1">
+                <a:solidFill>
+                  <a:srgbClr val="5E5E5E"/>
+                </a:solidFill>
+                <a:latin typeface="Courier"/>
+              </a:rPr>
+              <a:t>## ---- travel-dates-calendar-display ----</a:t>
+            </a:r>
+            <a:br/>
+            <a:br/>
+            <a:r>
+              <a:rPr>
+                <a:solidFill>
+                  <a:srgbClr val="003B4F"/>
+                </a:solidFill>
+                <a:latin typeface="Courier"/>
+              </a:rPr>
+              <a:t>base_data_aes &lt;- full_calendar </a:t>
+            </a:r>
+            <a:r>
+              <a:rPr>
+                <a:solidFill>
+                  <a:srgbClr val="5E5E5E"/>
+                </a:solidFill>
+                <a:latin typeface="Courier"/>
+              </a:rPr>
+              <a:t>|&gt;</a:t>
+            </a:r>
+            <a:br/>
+            <a:r>
+              <a:rPr>
+                <a:solidFill>
+                  <a:srgbClr val="003B4F"/>
+                </a:solidFill>
+                <a:latin typeface="Courier"/>
+              </a:rPr>
+              <a:t>    </a:t>
+            </a:r>
+            <a:r>
+              <a:rPr>
+                <a:solidFill>
+                  <a:srgbClr val="4758AB"/>
+                </a:solidFill>
+                <a:latin typeface="Courier"/>
+              </a:rPr>
+              <a:t>ggplot</a:t>
+            </a:r>
+            <a:r>
+              <a:rPr>
+                <a:solidFill>
+                  <a:srgbClr val="003B4F"/>
+                </a:solidFill>
+                <a:latin typeface="Courier"/>
+              </a:rPr>
+              <a:t>(</a:t>
+            </a:r>
+            <a:r>
+              <a:rPr>
+                <a:solidFill>
+                  <a:srgbClr val="4758AB"/>
+                </a:solidFill>
+                <a:latin typeface="Courier"/>
+              </a:rPr>
+              <a:t>aes</a:t>
+            </a:r>
+            <a:r>
+              <a:rPr>
+                <a:solidFill>
+                  <a:srgbClr val="003B4F"/>
+                </a:solidFill>
+                <a:latin typeface="Courier"/>
+              </a:rPr>
+              <a:t>(</a:t>
+            </a:r>
+            <a:r>
+              <a:rPr>
+                <a:solidFill>
+                  <a:srgbClr val="657422"/>
+                </a:solidFill>
+                <a:latin typeface="Courier"/>
+              </a:rPr>
+              <a:t>x =</a:t>
+            </a:r>
+            <a:r>
+              <a:rPr>
+                <a:solidFill>
+                  <a:srgbClr val="003B4F"/>
+                </a:solidFill>
+                <a:latin typeface="Courier"/>
+              </a:rPr>
+              <a:t> Day, </a:t>
+            </a:r>
+            <a:r>
+              <a:rPr>
+                <a:solidFill>
+                  <a:srgbClr val="657422"/>
+                </a:solidFill>
+                <a:latin typeface="Courier"/>
+              </a:rPr>
+              <a:t>y =</a:t>
+            </a:r>
+            <a:r>
+              <a:rPr>
+                <a:solidFill>
+                  <a:srgbClr val="003B4F"/>
+                </a:solidFill>
+                <a:latin typeface="Courier"/>
+              </a:rPr>
+              <a:t> Month_week))</a:t>
+            </a:r>
+            <a:br/>
+            <a:br/>
+            <a:r>
+              <a:rPr>
+                <a:solidFill>
+                  <a:srgbClr val="003B4F"/>
+                </a:solidFill>
+                <a:latin typeface="Courier"/>
+              </a:rPr>
+              <a:t>layers_geom_text &lt;- </a:t>
+            </a:r>
+            <a:r>
+              <a:rPr>
+                <a:solidFill>
+                  <a:srgbClr val="4758AB"/>
+                </a:solidFill>
+                <a:latin typeface="Courier"/>
+              </a:rPr>
+              <a:t>list</a:t>
+            </a:r>
+            <a:r>
+              <a:rPr>
+                <a:solidFill>
+                  <a:srgbClr val="003B4F"/>
+                </a:solidFill>
+                <a:latin typeface="Courier"/>
+              </a:rPr>
+              <a:t>(</a:t>
+            </a:r>
+            <a:br/>
+            <a:r>
+              <a:rPr>
+                <a:solidFill>
+                  <a:srgbClr val="003B4F"/>
+                </a:solidFill>
+                <a:latin typeface="Courier"/>
+              </a:rPr>
+              <a:t>    </a:t>
+            </a:r>
+            <a:r>
+              <a:rPr>
+                <a:solidFill>
+                  <a:srgbClr val="4758AB"/>
+                </a:solidFill>
+                <a:latin typeface="Courier"/>
+              </a:rPr>
+              <a:t>geom_text</a:t>
+            </a:r>
+            <a:r>
+              <a:rPr>
+                <a:solidFill>
+                  <a:srgbClr val="003B4F"/>
+                </a:solidFill>
+                <a:latin typeface="Courier"/>
+              </a:rPr>
+              <a:t>(</a:t>
+            </a:r>
+            <a:r>
+              <a:rPr>
+                <a:solidFill>
+                  <a:srgbClr val="4758AB"/>
+                </a:solidFill>
+                <a:latin typeface="Courier"/>
+              </a:rPr>
+              <a:t>aes</a:t>
+            </a:r>
+            <a:r>
+              <a:rPr>
+                <a:solidFill>
+                  <a:srgbClr val="003B4F"/>
+                </a:solidFill>
+                <a:latin typeface="Courier"/>
+              </a:rPr>
+              <a:t>(</a:t>
+            </a:r>
+            <a:r>
+              <a:rPr>
+                <a:solidFill>
+                  <a:srgbClr val="657422"/>
+                </a:solidFill>
+                <a:latin typeface="Courier"/>
+              </a:rPr>
+              <a:t>label =</a:t>
+            </a:r>
+            <a:r>
+              <a:rPr>
+                <a:solidFill>
+                  <a:srgbClr val="003B4F"/>
+                </a:solidFill>
+                <a:latin typeface="Courier"/>
+              </a:rPr>
+              <a:t> mday), </a:t>
+            </a:r>
+            <a:r>
+              <a:rPr>
+                <a:solidFill>
+                  <a:srgbClr val="657422"/>
+                </a:solidFill>
+                <a:latin typeface="Courier"/>
+              </a:rPr>
+              <a:t>nudge_y =</a:t>
+            </a:r>
+            <a:r>
+              <a:rPr>
+                <a:solidFill>
+                  <a:srgbClr val="003B4F"/>
+                </a:solidFill>
+                <a:latin typeface="Courier"/>
+              </a:rPr>
+              <a:t> </a:t>
+            </a:r>
+            <a:r>
+              <a:rPr>
+                <a:solidFill>
+                  <a:srgbClr val="AD0000"/>
+                </a:solidFill>
+                <a:latin typeface="Courier"/>
+              </a:rPr>
+              <a:t>0.25</a:t>
+            </a:r>
+            <a:r>
+              <a:rPr>
+                <a:solidFill>
+                  <a:srgbClr val="003B4F"/>
+                </a:solidFill>
+                <a:latin typeface="Courier"/>
+              </a:rPr>
+              <a:t>),</a:t>
+            </a:r>
+            <a:br/>
+            <a:r>
+              <a:rPr>
+                <a:solidFill>
+                  <a:srgbClr val="003B4F"/>
+                </a:solidFill>
+                <a:latin typeface="Courier"/>
+              </a:rPr>
+              <a:t>    </a:t>
+            </a:r>
+            <a:r>
+              <a:rPr>
+                <a:solidFill>
+                  <a:srgbClr val="4758AB"/>
+                </a:solidFill>
+                <a:latin typeface="Courier"/>
+              </a:rPr>
+              <a:t>geom_text</a:t>
+            </a:r>
+            <a:r>
+              <a:rPr>
+                <a:solidFill>
+                  <a:srgbClr val="003B4F"/>
+                </a:solidFill>
+                <a:latin typeface="Courier"/>
+              </a:rPr>
+              <a:t>(</a:t>
+            </a:r>
+            <a:r>
+              <a:rPr>
+                <a:solidFill>
+                  <a:srgbClr val="4758AB"/>
+                </a:solidFill>
+                <a:latin typeface="Courier"/>
+              </a:rPr>
+              <a:t>aes</a:t>
+            </a:r>
+            <a:r>
+              <a:rPr>
+                <a:solidFill>
+                  <a:srgbClr val="003B4F"/>
+                </a:solidFill>
+                <a:latin typeface="Courier"/>
+              </a:rPr>
+              <a:t>(</a:t>
+            </a:r>
+            <a:r>
+              <a:rPr>
+                <a:solidFill>
+                  <a:srgbClr val="657422"/>
+                </a:solidFill>
+                <a:latin typeface="Courier"/>
+              </a:rPr>
+              <a:t>label =</a:t>
+            </a:r>
+            <a:r>
+              <a:rPr>
+                <a:solidFill>
+                  <a:srgbClr val="003B4F"/>
+                </a:solidFill>
+                <a:latin typeface="Courier"/>
+              </a:rPr>
+              <a:t> flag), </a:t>
+            </a:r>
+            <a:r>
+              <a:rPr>
+                <a:solidFill>
+                  <a:srgbClr val="657422"/>
+                </a:solidFill>
+                <a:latin typeface="Courier"/>
+              </a:rPr>
+              <a:t>nudge_y =</a:t>
+            </a:r>
+            <a:r>
+              <a:rPr>
+                <a:solidFill>
+                  <a:srgbClr val="003B4F"/>
+                </a:solidFill>
+                <a:latin typeface="Courier"/>
+              </a:rPr>
+              <a:t> </a:t>
+            </a:r>
+            <a:r>
+              <a:rPr>
+                <a:solidFill>
+                  <a:srgbClr val="5E5E5E"/>
+                </a:solidFill>
+                <a:latin typeface="Courier"/>
+              </a:rPr>
+              <a:t>-</a:t>
+            </a:r>
+            <a:r>
+              <a:rPr>
+                <a:solidFill>
+                  <a:srgbClr val="AD0000"/>
+                </a:solidFill>
+                <a:latin typeface="Courier"/>
+              </a:rPr>
+              <a:t>0.25</a:t>
+            </a:r>
+            <a:r>
+              <a:rPr>
+                <a:solidFill>
+                  <a:srgbClr val="003B4F"/>
+                </a:solidFill>
+                <a:latin typeface="Courier"/>
+              </a:rPr>
+              <a:t>)</a:t>
+            </a:r>
+            <a:br/>
+            <a:r>
+              <a:rPr>
+                <a:solidFill>
+                  <a:srgbClr val="003B4F"/>
+                </a:solidFill>
+                <a:latin typeface="Courier"/>
+              </a:rPr>
+              <a:t>)</a:t>
+            </a:r>
+            <a:br/>
+            <a:r>
+              <a:rPr>
+                <a:solidFill>
+                  <a:srgbClr val="003B4F"/>
+                </a:solidFill>
+                <a:latin typeface="Courier"/>
+              </a:rPr>
+              <a:t>layers_scale_coord &lt;- </a:t>
+            </a:r>
+            <a:r>
+              <a:rPr>
+                <a:solidFill>
+                  <a:srgbClr val="4758AB"/>
+                </a:solidFill>
+                <a:latin typeface="Courier"/>
+              </a:rPr>
+              <a:t>list</a:t>
+            </a:r>
+            <a:r>
+              <a:rPr>
+                <a:solidFill>
+                  <a:srgbClr val="003B4F"/>
+                </a:solidFill>
+                <a:latin typeface="Courier"/>
+              </a:rPr>
+              <a:t>(</a:t>
+            </a:r>
+            <a:br/>
+            <a:r>
+              <a:rPr>
+                <a:solidFill>
+                  <a:srgbClr val="003B4F"/>
+                </a:solidFill>
+                <a:latin typeface="Courier"/>
+              </a:rPr>
+              <a:t>    </a:t>
+            </a:r>
+            <a:r>
+              <a:rPr>
+                <a:solidFill>
+                  <a:srgbClr val="4758AB"/>
+                </a:solidFill>
+                <a:latin typeface="Courier"/>
+              </a:rPr>
+              <a:t>scale_y_reverse</a:t>
+            </a:r>
+            <a:r>
+              <a:rPr>
+                <a:solidFill>
+                  <a:srgbClr val="003B4F"/>
+                </a:solidFill>
+                <a:latin typeface="Courier"/>
+              </a:rPr>
+              <a:t>(),</a:t>
+            </a:r>
+            <a:br/>
+            <a:r>
+              <a:rPr>
+                <a:solidFill>
+                  <a:srgbClr val="003B4F"/>
+                </a:solidFill>
+                <a:latin typeface="Courier"/>
+              </a:rPr>
+              <a:t>    </a:t>
+            </a:r>
+            <a:r>
+              <a:rPr>
+                <a:solidFill>
+                  <a:srgbClr val="4758AB"/>
+                </a:solidFill>
+                <a:latin typeface="Courier"/>
+              </a:rPr>
+              <a:t>coord_fixed</a:t>
+            </a:r>
+            <a:r>
+              <a:rPr>
+                <a:solidFill>
+                  <a:srgbClr val="003B4F"/>
+                </a:solidFill>
+                <a:latin typeface="Courier"/>
+              </a:rPr>
+              <a:t>(</a:t>
+            </a:r>
+            <a:r>
+              <a:rPr>
+                <a:solidFill>
+                  <a:srgbClr val="657422"/>
+                </a:solidFill>
+                <a:latin typeface="Courier"/>
+              </a:rPr>
+              <a:t>expand =</a:t>
+            </a:r>
+            <a:r>
+              <a:rPr>
+                <a:solidFill>
+                  <a:srgbClr val="003B4F"/>
+                </a:solidFill>
+                <a:latin typeface="Courier"/>
+              </a:rPr>
+              <a:t> </a:t>
+            </a:r>
+            <a:r>
+              <a:rPr>
+                <a:solidFill>
+                  <a:srgbClr val="8F5902"/>
+                </a:solidFill>
+                <a:latin typeface="Courier"/>
+              </a:rPr>
+              <a:t>TRUE</a:t>
+            </a:r>
+            <a:r>
+              <a:rPr>
+                <a:solidFill>
+                  <a:srgbClr val="003B4F"/>
+                </a:solidFill>
+                <a:latin typeface="Courier"/>
+              </a:rPr>
+              <a:t>)</a:t>
+            </a:r>
+            <a:br/>
+            <a:r>
+              <a:rPr>
+                <a:solidFill>
+                  <a:srgbClr val="003B4F"/>
+                </a:solidFill>
+                <a:latin typeface="Courier"/>
+              </a:rPr>
+              <a:t>)</a:t>
+            </a:r>
+            <a:br/>
+            <a:r>
+              <a:rPr>
+                <a:solidFill>
+                  <a:srgbClr val="003B4F"/>
+                </a:solidFill>
+                <a:latin typeface="Courier"/>
+              </a:rPr>
+              <a:t>layers_facet_labs &lt;- </a:t>
+            </a:r>
+            <a:r>
+              <a:rPr>
+                <a:solidFill>
+                  <a:srgbClr val="4758AB"/>
+                </a:solidFill>
+                <a:latin typeface="Courier"/>
+              </a:rPr>
+              <a:t>list</a:t>
+            </a:r>
+            <a:r>
+              <a:rPr>
+                <a:solidFill>
+                  <a:srgbClr val="003B4F"/>
+                </a:solidFill>
+                <a:latin typeface="Courier"/>
+              </a:rPr>
+              <a:t>(</a:t>
+            </a:r>
+            <a:br/>
+            <a:r>
+              <a:rPr>
+                <a:solidFill>
+                  <a:srgbClr val="003B4F"/>
+                </a:solidFill>
+                <a:latin typeface="Courier"/>
+              </a:rPr>
+              <a:t>    </a:t>
+            </a:r>
+            <a:r>
+              <a:rPr>
+                <a:solidFill>
+                  <a:srgbClr val="4758AB"/>
+                </a:solidFill>
+                <a:latin typeface="Courier"/>
+              </a:rPr>
+              <a:t>facet_wrap</a:t>
+            </a:r>
+            <a:r>
+              <a:rPr>
+                <a:solidFill>
+                  <a:srgbClr val="003B4F"/>
+                </a:solidFill>
+                <a:latin typeface="Courier"/>
+              </a:rPr>
+              <a:t>(</a:t>
+            </a:r>
+            <a:r>
+              <a:rPr>
+                <a:solidFill>
+                  <a:srgbClr val="4758AB"/>
+                </a:solidFill>
+                <a:latin typeface="Courier"/>
+              </a:rPr>
+              <a:t>vars</a:t>
+            </a:r>
+            <a:r>
+              <a:rPr>
+                <a:solidFill>
+                  <a:srgbClr val="003B4F"/>
+                </a:solidFill>
+                <a:latin typeface="Courier"/>
+              </a:rPr>
+              <a:t>(Month),</a:t>
+            </a:r>
+            <a:br/>
+            <a:r>
+              <a:rPr>
+                <a:solidFill>
+                  <a:srgbClr val="003B4F"/>
+                </a:solidFill>
+                <a:latin typeface="Courier"/>
+              </a:rPr>
+              <a:t>        </a:t>
+            </a:r>
+            <a:r>
+              <a:rPr>
+                <a:solidFill>
+                  <a:srgbClr val="657422"/>
+                </a:solidFill>
+                <a:latin typeface="Courier"/>
+              </a:rPr>
+              <a:t>ncol =</a:t>
+            </a:r>
+            <a:r>
+              <a:rPr>
+                <a:solidFill>
+                  <a:srgbClr val="003B4F"/>
+                </a:solidFill>
+                <a:latin typeface="Courier"/>
+              </a:rPr>
+              <a:t> cal_ncol</a:t>
+            </a:r>
+            <a:br/>
+            <a:r>
+              <a:rPr>
+                <a:solidFill>
+                  <a:srgbClr val="003B4F"/>
+                </a:solidFill>
+                <a:latin typeface="Courier"/>
+              </a:rPr>
+              <a:t>    ),</a:t>
+            </a:r>
+            <a:br/>
+            <a:r>
+              <a:rPr>
+                <a:solidFill>
+                  <a:srgbClr val="003B4F"/>
+                </a:solidFill>
+                <a:latin typeface="Courier"/>
+              </a:rPr>
+              <a:t>    </a:t>
+            </a:r>
+            <a:r>
+              <a:rPr>
+                <a:solidFill>
+                  <a:srgbClr val="4758AB"/>
+                </a:solidFill>
+                <a:latin typeface="Courier"/>
+              </a:rPr>
+              <a:t>labs</a:t>
+            </a:r>
+            <a:r>
+              <a:rPr>
+                <a:solidFill>
+                  <a:srgbClr val="003B4F"/>
+                </a:solidFill>
+                <a:latin typeface="Courier"/>
+              </a:rPr>
+              <a:t>(</a:t>
+            </a:r>
+            <a:r>
+              <a:rPr>
+                <a:solidFill>
+                  <a:srgbClr val="657422"/>
+                </a:solidFill>
+                <a:latin typeface="Courier"/>
+              </a:rPr>
+              <a:t>y =</a:t>
+            </a:r>
+            <a:r>
+              <a:rPr>
+                <a:solidFill>
+                  <a:srgbClr val="003B4F"/>
+                </a:solidFill>
+                <a:latin typeface="Courier"/>
+              </a:rPr>
+              <a:t> </a:t>
+            </a:r>
+            <a:r>
+              <a:rPr>
+                <a:solidFill>
+                  <a:srgbClr val="8F5902"/>
+                </a:solidFill>
+                <a:latin typeface="Courier"/>
+              </a:rPr>
+              <a:t>NULL</a:t>
+            </a:r>
+            <a:r>
+              <a:rPr>
+                <a:solidFill>
+                  <a:srgbClr val="003B4F"/>
+                </a:solidFill>
+                <a:latin typeface="Courier"/>
+              </a:rPr>
+              <a:t>, </a:t>
+            </a:r>
+            <a:r>
+              <a:rPr>
+                <a:solidFill>
+                  <a:srgbClr val="657422"/>
+                </a:solidFill>
+                <a:latin typeface="Courier"/>
+              </a:rPr>
+              <a:t>x =</a:t>
+            </a:r>
+            <a:r>
+              <a:rPr>
+                <a:solidFill>
+                  <a:srgbClr val="003B4F"/>
+                </a:solidFill>
+                <a:latin typeface="Courier"/>
+              </a:rPr>
+              <a:t> </a:t>
+            </a:r>
+            <a:r>
+              <a:rPr>
+                <a:solidFill>
+                  <a:srgbClr val="8F5902"/>
+                </a:solidFill>
+                <a:latin typeface="Courier"/>
+              </a:rPr>
+              <a:t>NULL</a:t>
+            </a:r>
+            <a:r>
+              <a:rPr>
+                <a:solidFill>
+                  <a:srgbClr val="003B4F"/>
+                </a:solidFill>
+                <a:latin typeface="Courier"/>
+              </a:rPr>
+              <a:t>)</a:t>
+            </a:r>
+            <a:br/>
+            <a:r>
+              <a:rPr>
+                <a:solidFill>
+                  <a:srgbClr val="003B4F"/>
+                </a:solidFill>
+                <a:latin typeface="Courier"/>
+              </a:rPr>
+              <a:t>)</a:t>
+            </a:r>
+            <a:br/>
+            <a:r>
+              <a:rPr>
+                <a:solidFill>
+                  <a:srgbClr val="003B4F"/>
+                </a:solidFill>
+                <a:latin typeface="Courier"/>
+              </a:rPr>
+              <a:t>layers_theme &lt;- </a:t>
+            </a:r>
+            <a:r>
+              <a:rPr>
+                <a:solidFill>
+                  <a:srgbClr val="4758AB"/>
+                </a:solidFill>
+                <a:latin typeface="Courier"/>
+              </a:rPr>
+              <a:t>list</a:t>
+            </a:r>
+            <a:r>
+              <a:rPr>
+                <a:solidFill>
+                  <a:srgbClr val="003B4F"/>
+                </a:solidFill>
+                <a:latin typeface="Courier"/>
+              </a:rPr>
+              <a:t>(</a:t>
+            </a:r>
+            <a:br/>
+            <a:r>
+              <a:rPr>
+                <a:solidFill>
+                  <a:srgbClr val="003B4F"/>
+                </a:solidFill>
+                <a:latin typeface="Courier"/>
+              </a:rPr>
+              <a:t>    </a:t>
+            </a:r>
+            <a:r>
+              <a:rPr>
+                <a:solidFill>
+                  <a:srgbClr val="4758AB"/>
+                </a:solidFill>
+                <a:latin typeface="Courier"/>
+              </a:rPr>
+              <a:t>theme_bw</a:t>
+            </a:r>
+            <a:r>
+              <a:rPr>
+                <a:solidFill>
+                  <a:srgbClr val="003B4F"/>
+                </a:solidFill>
+                <a:latin typeface="Courier"/>
+              </a:rPr>
+              <a:t>(),</a:t>
+            </a:r>
+            <a:br/>
+            <a:r>
+              <a:rPr>
+                <a:solidFill>
+                  <a:srgbClr val="003B4F"/>
+                </a:solidFill>
+                <a:latin typeface="Courier"/>
+              </a:rPr>
+              <a:t>    </a:t>
+            </a:r>
+            <a:r>
+              <a:rPr>
+                <a:solidFill>
+                  <a:srgbClr val="4758AB"/>
+                </a:solidFill>
+                <a:latin typeface="Courier"/>
+              </a:rPr>
+              <a:t>theme</a:t>
+            </a:r>
+            <a:r>
+              <a:rPr>
+                <a:solidFill>
+                  <a:srgbClr val="003B4F"/>
+                </a:solidFill>
+                <a:latin typeface="Courier"/>
+              </a:rPr>
+              <a:t>(</a:t>
+            </a:r>
+            <a:br/>
+            <a:r>
+              <a:rPr>
+                <a:solidFill>
+                  <a:srgbClr val="003B4F"/>
+                </a:solidFill>
+                <a:latin typeface="Courier"/>
+              </a:rPr>
+              <a:t>        </a:t>
+            </a:r>
+            <a:r>
+              <a:rPr>
+                <a:solidFill>
+                  <a:srgbClr val="657422"/>
+                </a:solidFill>
+                <a:latin typeface="Courier"/>
+              </a:rPr>
+              <a:t>plot.margin =</a:t>
+            </a:r>
+            <a:r>
+              <a:rPr>
+                <a:solidFill>
+                  <a:srgbClr val="003B4F"/>
+                </a:solidFill>
+                <a:latin typeface="Courier"/>
+              </a:rPr>
+              <a:t> </a:t>
+            </a:r>
+            <a:r>
+              <a:rPr>
+                <a:solidFill>
+                  <a:srgbClr val="4758AB"/>
+                </a:solidFill>
+                <a:latin typeface="Courier"/>
+              </a:rPr>
+              <a:t>margin</a:t>
+            </a:r>
+            <a:r>
+              <a:rPr>
+                <a:solidFill>
+                  <a:srgbClr val="003B4F"/>
+                </a:solidFill>
+                <a:latin typeface="Courier"/>
+              </a:rPr>
+              <a:t>(</a:t>
+            </a:r>
+            <a:r>
+              <a:rPr>
+                <a:solidFill>
+                  <a:srgbClr val="AD0000"/>
+                </a:solidFill>
+                <a:latin typeface="Courier"/>
+              </a:rPr>
+              <a:t>0</a:t>
+            </a:r>
+            <a:r>
+              <a:rPr>
+                <a:solidFill>
+                  <a:srgbClr val="003B4F"/>
+                </a:solidFill>
+                <a:latin typeface="Courier"/>
+              </a:rPr>
+              <a:t>, </a:t>
+            </a:r>
+            <a:r>
+              <a:rPr>
+                <a:solidFill>
+                  <a:srgbClr val="AD0000"/>
+                </a:solidFill>
+                <a:latin typeface="Courier"/>
+              </a:rPr>
+              <a:t>0</a:t>
+            </a:r>
+            <a:r>
+              <a:rPr>
+                <a:solidFill>
+                  <a:srgbClr val="003B4F"/>
+                </a:solidFill>
+                <a:latin typeface="Courier"/>
+              </a:rPr>
+              <a:t>, </a:t>
+            </a:r>
+            <a:r>
+              <a:rPr>
+                <a:solidFill>
+                  <a:srgbClr val="AD0000"/>
+                </a:solidFill>
+                <a:latin typeface="Courier"/>
+              </a:rPr>
+              <a:t>0</a:t>
+            </a:r>
+            <a:r>
+              <a:rPr>
+                <a:solidFill>
+                  <a:srgbClr val="003B4F"/>
+                </a:solidFill>
+                <a:latin typeface="Courier"/>
+              </a:rPr>
+              <a:t>, </a:t>
+            </a:r>
+            <a:r>
+              <a:rPr>
+                <a:solidFill>
+                  <a:srgbClr val="AD0000"/>
+                </a:solidFill>
+                <a:latin typeface="Courier"/>
+              </a:rPr>
+              <a:t>0</a:t>
+            </a:r>
+            <a:r>
+              <a:rPr>
+                <a:solidFill>
+                  <a:srgbClr val="003B4F"/>
+                </a:solidFill>
+                <a:latin typeface="Courier"/>
+              </a:rPr>
+              <a:t>),</a:t>
+            </a:r>
+            <a:br/>
+            <a:r>
+              <a:rPr>
+                <a:solidFill>
+                  <a:srgbClr val="003B4F"/>
+                </a:solidFill>
+                <a:latin typeface="Courier"/>
+              </a:rPr>
+              <a:t>        </a:t>
+            </a:r>
+            <a:r>
+              <a:rPr>
+                <a:solidFill>
+                  <a:srgbClr val="657422"/>
+                </a:solidFill>
+                <a:latin typeface="Courier"/>
+              </a:rPr>
+              <a:t>panel.grid.major =</a:t>
+            </a:r>
+            <a:r>
+              <a:rPr>
+                <a:solidFill>
+                  <a:srgbClr val="003B4F"/>
+                </a:solidFill>
+                <a:latin typeface="Courier"/>
+              </a:rPr>
+              <a:t> </a:t>
+            </a:r>
+            <a:r>
+              <a:rPr>
+                <a:solidFill>
+                  <a:srgbClr val="4758AB"/>
+                </a:solidFill>
+                <a:latin typeface="Courier"/>
+              </a:rPr>
+              <a:t>element_blank</a:t>
+            </a:r>
+            <a:r>
+              <a:rPr>
+                <a:solidFill>
+                  <a:srgbClr val="003B4F"/>
+                </a:solidFill>
+                <a:latin typeface="Courier"/>
+              </a:rPr>
+              <a:t>(),</a:t>
+            </a:r>
+            <a:br/>
+            <a:r>
+              <a:rPr>
+                <a:solidFill>
+                  <a:srgbClr val="003B4F"/>
+                </a:solidFill>
+                <a:latin typeface="Courier"/>
+              </a:rPr>
+              <a:t>        </a:t>
+            </a:r>
+            <a:r>
+              <a:rPr>
+                <a:solidFill>
+                  <a:srgbClr val="657422"/>
+                </a:solidFill>
+                <a:latin typeface="Courier"/>
+              </a:rPr>
+              <a:t>panel.grid.minor =</a:t>
+            </a:r>
+            <a:r>
+              <a:rPr>
+                <a:solidFill>
+                  <a:srgbClr val="003B4F"/>
+                </a:solidFill>
+                <a:latin typeface="Courier"/>
+              </a:rPr>
+              <a:t> </a:t>
+            </a:r>
+            <a:r>
+              <a:rPr>
+                <a:solidFill>
+                  <a:srgbClr val="4758AB"/>
+                </a:solidFill>
+                <a:latin typeface="Courier"/>
+              </a:rPr>
+              <a:t>element_blank</a:t>
+            </a:r>
+            <a:r>
+              <a:rPr>
+                <a:solidFill>
+                  <a:srgbClr val="003B4F"/>
+                </a:solidFill>
+                <a:latin typeface="Courier"/>
+              </a:rPr>
+              <a:t>(),</a:t>
+            </a:r>
+            <a:br/>
+            <a:r>
+              <a:rPr>
+                <a:solidFill>
+                  <a:srgbClr val="003B4F"/>
+                </a:solidFill>
+                <a:latin typeface="Courier"/>
+              </a:rPr>
+              <a:t>        </a:t>
+            </a:r>
+            <a:r>
+              <a:rPr>
+                <a:solidFill>
+                  <a:srgbClr val="5E5E5E"/>
+                </a:solidFill>
+                <a:latin typeface="Courier"/>
+              </a:rPr>
+              <a:t># panel.spacing = unit(0, "lines"),</a:t>
+            </a:r>
+            <a:br/>
+            <a:r>
+              <a:rPr>
+                <a:solidFill>
+                  <a:srgbClr val="003B4F"/>
+                </a:solidFill>
+                <a:latin typeface="Courier"/>
+              </a:rPr>
+              <a:t>        </a:t>
+            </a:r>
+            <a:r>
+              <a:rPr>
+                <a:solidFill>
+                  <a:srgbClr val="657422"/>
+                </a:solidFill>
+                <a:latin typeface="Courier"/>
+              </a:rPr>
+              <a:t>panel.border =</a:t>
+            </a:r>
+            <a:r>
+              <a:rPr>
+                <a:solidFill>
+                  <a:srgbClr val="003B4F"/>
+                </a:solidFill>
+                <a:latin typeface="Courier"/>
+              </a:rPr>
+              <a:t> </a:t>
+            </a:r>
+            <a:r>
+              <a:rPr>
+                <a:solidFill>
+                  <a:srgbClr val="4758AB"/>
+                </a:solidFill>
+                <a:latin typeface="Courier"/>
+              </a:rPr>
+              <a:t>element_blank</a:t>
+            </a:r>
+            <a:r>
+              <a:rPr>
+                <a:solidFill>
+                  <a:srgbClr val="003B4F"/>
+                </a:solidFill>
+                <a:latin typeface="Courier"/>
+              </a:rPr>
+              <a:t>(),</a:t>
+            </a:r>
+            <a:br/>
+            <a:r>
+              <a:rPr>
+                <a:solidFill>
+                  <a:srgbClr val="003B4F"/>
+                </a:solidFill>
+                <a:latin typeface="Courier"/>
+              </a:rPr>
+              <a:t>        </a:t>
+            </a:r>
+            <a:r>
+              <a:rPr>
+                <a:solidFill>
+                  <a:srgbClr val="657422"/>
+                </a:solidFill>
+                <a:latin typeface="Courier"/>
+              </a:rPr>
+              <a:t>axis.ticks =</a:t>
+            </a:r>
+            <a:r>
+              <a:rPr>
+                <a:solidFill>
+                  <a:srgbClr val="003B4F"/>
+                </a:solidFill>
+                <a:latin typeface="Courier"/>
+              </a:rPr>
+              <a:t> </a:t>
+            </a:r>
+            <a:r>
+              <a:rPr>
+                <a:solidFill>
+                  <a:srgbClr val="4758AB"/>
+                </a:solidFill>
+                <a:latin typeface="Courier"/>
+              </a:rPr>
+              <a:t>element_blank</a:t>
+            </a:r>
+            <a:r>
+              <a:rPr>
+                <a:solidFill>
+                  <a:srgbClr val="003B4F"/>
+                </a:solidFill>
+                <a:latin typeface="Courier"/>
+              </a:rPr>
+              <a:t>(),</a:t>
+            </a:r>
+            <a:br/>
+            <a:r>
+              <a:rPr>
+                <a:solidFill>
+                  <a:srgbClr val="003B4F"/>
+                </a:solidFill>
+                <a:latin typeface="Courier"/>
+              </a:rPr>
+              <a:t>        </a:t>
+            </a:r>
+            <a:r>
+              <a:rPr>
+                <a:solidFill>
+                  <a:srgbClr val="657422"/>
+                </a:solidFill>
+                <a:latin typeface="Courier"/>
+              </a:rPr>
+              <a:t>axis.text.y =</a:t>
+            </a:r>
+            <a:r>
+              <a:rPr>
+                <a:solidFill>
+                  <a:srgbClr val="003B4F"/>
+                </a:solidFill>
+                <a:latin typeface="Courier"/>
+              </a:rPr>
+              <a:t> </a:t>
+            </a:r>
+            <a:r>
+              <a:rPr>
+                <a:solidFill>
+                  <a:srgbClr val="4758AB"/>
+                </a:solidFill>
+                <a:latin typeface="Courier"/>
+              </a:rPr>
+              <a:t>element_blank</a:t>
+            </a:r>
+            <a:r>
+              <a:rPr>
+                <a:solidFill>
+                  <a:srgbClr val="003B4F"/>
+                </a:solidFill>
+                <a:latin typeface="Courier"/>
+              </a:rPr>
+              <a:t>(),</a:t>
+            </a:r>
+            <a:br/>
+            <a:r>
+              <a:rPr>
+                <a:solidFill>
+                  <a:srgbClr val="003B4F"/>
+                </a:solidFill>
+                <a:latin typeface="Courier"/>
+              </a:rPr>
+              <a:t>        </a:t>
+            </a:r>
+            <a:r>
+              <a:rPr>
+                <a:solidFill>
+                  <a:srgbClr val="657422"/>
+                </a:solidFill>
+                <a:latin typeface="Courier"/>
+              </a:rPr>
+              <a:t>strip.background =</a:t>
+            </a:r>
+            <a:r>
+              <a:rPr>
+                <a:solidFill>
+                  <a:srgbClr val="003B4F"/>
+                </a:solidFill>
+                <a:latin typeface="Courier"/>
+              </a:rPr>
+              <a:t> </a:t>
+            </a:r>
+            <a:r>
+              <a:rPr>
+                <a:solidFill>
+                  <a:srgbClr val="4758AB"/>
+                </a:solidFill>
+                <a:latin typeface="Courier"/>
+              </a:rPr>
+              <a:t>element_rect</a:t>
+            </a:r>
+            <a:r>
+              <a:rPr>
+                <a:solidFill>
+                  <a:srgbClr val="003B4F"/>
+                </a:solidFill>
+                <a:latin typeface="Courier"/>
+              </a:rPr>
+              <a:t>(</a:t>
+            </a:r>
+            <a:r>
+              <a:rPr>
+                <a:solidFill>
+                  <a:srgbClr val="657422"/>
+                </a:solidFill>
+                <a:latin typeface="Courier"/>
+              </a:rPr>
+              <a:t>fill =</a:t>
+            </a:r>
+            <a:r>
+              <a:rPr>
+                <a:solidFill>
+                  <a:srgbClr val="003B4F"/>
+                </a:solidFill>
+                <a:latin typeface="Courier"/>
+              </a:rPr>
+              <a:t> </a:t>
+            </a:r>
+            <a:r>
+              <a:rPr>
+                <a:solidFill>
+                  <a:srgbClr val="20794D"/>
+                </a:solidFill>
+                <a:latin typeface="Courier"/>
+              </a:rPr>
+              <a:t>"grey95"</a:t>
+            </a:r>
+            <a:r>
+              <a:rPr>
+                <a:solidFill>
+                  <a:srgbClr val="003B4F"/>
+                </a:solidFill>
+                <a:latin typeface="Courier"/>
+              </a:rPr>
+              <a:t>),</a:t>
+            </a:r>
+            <a:br/>
+            <a:r>
+              <a:rPr>
+                <a:solidFill>
+                  <a:srgbClr val="003B4F"/>
+                </a:solidFill>
+                <a:latin typeface="Courier"/>
+              </a:rPr>
+              <a:t>        </a:t>
+            </a:r>
+            <a:r>
+              <a:rPr>
+                <a:solidFill>
+                  <a:srgbClr val="657422"/>
+                </a:solidFill>
+                <a:latin typeface="Courier"/>
+              </a:rPr>
+              <a:t>strip.text =</a:t>
+            </a:r>
+            <a:r>
+              <a:rPr>
+                <a:solidFill>
+                  <a:srgbClr val="003B4F"/>
+                </a:solidFill>
+                <a:latin typeface="Courier"/>
+              </a:rPr>
+              <a:t> </a:t>
+            </a:r>
+            <a:r>
+              <a:rPr>
+                <a:solidFill>
+                  <a:srgbClr val="4758AB"/>
+                </a:solidFill>
+                <a:latin typeface="Courier"/>
+              </a:rPr>
+              <a:t>element_text</a:t>
+            </a:r>
+            <a:r>
+              <a:rPr>
+                <a:solidFill>
+                  <a:srgbClr val="003B4F"/>
+                </a:solidFill>
+                <a:latin typeface="Courier"/>
+              </a:rPr>
+              <a:t>(</a:t>
+            </a:r>
+            <a:r>
+              <a:rPr>
+                <a:solidFill>
+                  <a:srgbClr val="657422"/>
+                </a:solidFill>
+                <a:latin typeface="Courier"/>
+              </a:rPr>
+              <a:t>hjust =</a:t>
+            </a:r>
+            <a:r>
+              <a:rPr>
+                <a:solidFill>
+                  <a:srgbClr val="003B4F"/>
+                </a:solidFill>
+                <a:latin typeface="Courier"/>
+              </a:rPr>
+              <a:t> </a:t>
+            </a:r>
+            <a:r>
+              <a:rPr>
+                <a:solidFill>
+                  <a:srgbClr val="AD0000"/>
+                </a:solidFill>
+                <a:latin typeface="Courier"/>
+              </a:rPr>
+              <a:t>0</a:t>
+            </a:r>
+            <a:r>
+              <a:rPr>
+                <a:solidFill>
+                  <a:srgbClr val="003B4F"/>
+                </a:solidFill>
+                <a:latin typeface="Courier"/>
+              </a:rPr>
+              <a:t>)</a:t>
+            </a:r>
+            <a:br/>
+            <a:r>
+              <a:rPr>
+                <a:solidFill>
+                  <a:srgbClr val="003B4F"/>
+                </a:solidFill>
+                <a:latin typeface="Courier"/>
+              </a:rPr>
+              <a:t>    )</a:t>
+            </a:r>
+            <a:br/>
+            <a:r>
+              <a:rPr>
+                <a:solidFill>
+                  <a:srgbClr val="003B4F"/>
+                </a:solidFill>
+                <a:latin typeface="Courier"/>
+              </a:rPr>
+              <a:t>)</a:t>
+            </a:r>
+            <a:br/>
+            <a:br/>
+            <a:r>
+              <a:rPr i="1">
+                <a:solidFill>
+                  <a:srgbClr val="5E5E5E"/>
+                </a:solidFill>
+                <a:latin typeface="Courier"/>
+              </a:rPr>
+              <a:t>## ---- tooltip-travel-calendar ----</a:t>
+            </a:r>
+            <a:br/>
+            <a:br/>
+            <a:r>
+              <a:rPr>
+                <a:solidFill>
+                  <a:srgbClr val="003B4F"/>
+                </a:solidFill>
+                <a:latin typeface="Courier"/>
+              </a:rPr>
+              <a:t>p_cal_girafe &lt;- base_data_aes </a:t>
+            </a:r>
+            <a:r>
+              <a:rPr>
+                <a:solidFill>
+                  <a:srgbClr val="5E5E5E"/>
+                </a:solidFill>
+                <a:latin typeface="Courier"/>
+              </a:rPr>
+              <a:t>+</a:t>
+            </a:r>
+            <a:br/>
+            <a:r>
+              <a:rPr>
+                <a:solidFill>
+                  <a:srgbClr val="003B4F"/>
+                </a:solidFill>
+                <a:latin typeface="Courier"/>
+              </a:rPr>
+              <a:t>    </a:t>
+            </a:r>
+            <a:r>
+              <a:rPr>
+                <a:solidFill>
+                  <a:srgbClr val="4758AB"/>
+                </a:solidFill>
+                <a:latin typeface="Courier"/>
+              </a:rPr>
+              <a:t>geom_tile_interactive</a:t>
+            </a:r>
+            <a:r>
+              <a:rPr>
+                <a:solidFill>
+                  <a:srgbClr val="003B4F"/>
+                </a:solidFill>
+                <a:latin typeface="Courier"/>
+              </a:rPr>
+              <a:t>(</a:t>
+            </a:r>
+            <a:br/>
+            <a:r>
+              <a:rPr>
+                <a:solidFill>
+                  <a:srgbClr val="003B4F"/>
+                </a:solidFill>
+                <a:latin typeface="Courier"/>
+              </a:rPr>
+              <a:t>        </a:t>
+            </a:r>
+            <a:r>
+              <a:rPr>
+                <a:solidFill>
+                  <a:srgbClr val="4758AB"/>
+                </a:solidFill>
+                <a:latin typeface="Courier"/>
+              </a:rPr>
+              <a:t>aes</a:t>
+            </a:r>
+            <a:r>
+              <a:rPr>
+                <a:solidFill>
+                  <a:srgbClr val="003B4F"/>
+                </a:solidFill>
+                <a:latin typeface="Courier"/>
+              </a:rPr>
+              <a:t>(</a:t>
+            </a:r>
+            <a:br/>
+            <a:r>
+              <a:rPr>
+                <a:solidFill>
+                  <a:srgbClr val="003B4F"/>
+                </a:solidFill>
+                <a:latin typeface="Courier"/>
+              </a:rPr>
+              <a:t>            </a:t>
+            </a:r>
+            <a:r>
+              <a:rPr>
+                <a:solidFill>
+                  <a:srgbClr val="657422"/>
+                </a:solidFill>
+                <a:latin typeface="Courier"/>
+              </a:rPr>
+              <a:t>tooltip =</a:t>
+            </a:r>
+            <a:r>
+              <a:rPr>
+                <a:solidFill>
+                  <a:srgbClr val="003B4F"/>
+                </a:solidFill>
+                <a:latin typeface="Courier"/>
+              </a:rPr>
+              <a:t> </a:t>
+            </a:r>
+            <a:r>
+              <a:rPr>
+                <a:solidFill>
+                  <a:srgbClr val="4758AB"/>
+                </a:solidFill>
+                <a:latin typeface="Courier"/>
+              </a:rPr>
+              <a:t>paste</a:t>
+            </a:r>
+            <a:r>
+              <a:rPr>
+                <a:solidFill>
+                  <a:srgbClr val="003B4F"/>
+                </a:solidFill>
+                <a:latin typeface="Courier"/>
+              </a:rPr>
+              <a:t>(details, </a:t>
+            </a:r>
+            <a:r>
+              <a:rPr>
+                <a:solidFill>
+                  <a:srgbClr val="20794D"/>
+                </a:solidFill>
+                <a:latin typeface="Courier"/>
+              </a:rPr>
+              <a:t>"@"</a:t>
+            </a:r>
+            <a:r>
+              <a:rPr>
+                <a:solidFill>
+                  <a:srgbClr val="003B4F"/>
+                </a:solidFill>
+                <a:latin typeface="Courier"/>
+              </a:rPr>
+              <a:t>, location),</a:t>
+            </a:r>
+            <a:br/>
+            <a:r>
+              <a:rPr>
+                <a:solidFill>
+                  <a:srgbClr val="003B4F"/>
+                </a:solidFill>
+                <a:latin typeface="Courier"/>
+              </a:rPr>
+              <a:t>            </a:t>
+            </a:r>
+            <a:r>
+              <a:rPr>
+                <a:solidFill>
+                  <a:srgbClr val="657422"/>
+                </a:solidFill>
+                <a:latin typeface="Courier"/>
+              </a:rPr>
+              <a:t>data_id =</a:t>
+            </a:r>
+            <a:r>
+              <a:rPr>
+                <a:solidFill>
+                  <a:srgbClr val="003B4F"/>
+                </a:solidFill>
+                <a:latin typeface="Courier"/>
+              </a:rPr>
+              <a:t> location</a:t>
+            </a:r>
+            <a:br/>
+            <a:r>
+              <a:rPr>
+                <a:solidFill>
+                  <a:srgbClr val="003B4F"/>
+                </a:solidFill>
+                <a:latin typeface="Courier"/>
+              </a:rPr>
+              <a:t>        ),</a:t>
+            </a:r>
+            <a:br/>
+            <a:r>
+              <a:rPr>
+                <a:solidFill>
+                  <a:srgbClr val="003B4F"/>
+                </a:solidFill>
+                <a:latin typeface="Courier"/>
+              </a:rPr>
+              <a:t>        </a:t>
+            </a:r>
+            <a:r>
+              <a:rPr>
+                <a:solidFill>
+                  <a:srgbClr val="657422"/>
+                </a:solidFill>
+                <a:latin typeface="Courier"/>
+              </a:rPr>
+              <a:t>alpha =</a:t>
+            </a:r>
+            <a:r>
+              <a:rPr>
+                <a:solidFill>
+                  <a:srgbClr val="003B4F"/>
+                </a:solidFill>
+                <a:latin typeface="Courier"/>
+              </a:rPr>
+              <a:t> </a:t>
+            </a:r>
+            <a:r>
+              <a:rPr>
+                <a:solidFill>
+                  <a:srgbClr val="AD0000"/>
+                </a:solidFill>
+                <a:latin typeface="Courier"/>
+              </a:rPr>
+              <a:t>0.2</a:t>
+            </a:r>
+            <a:r>
+              <a:rPr>
+                <a:solidFill>
+                  <a:srgbClr val="003B4F"/>
+                </a:solidFill>
+                <a:latin typeface="Courier"/>
+              </a:rPr>
+              <a:t>,</a:t>
+            </a:r>
+            <a:br/>
+            <a:r>
+              <a:rPr>
+                <a:solidFill>
+                  <a:srgbClr val="003B4F"/>
+                </a:solidFill>
+                <a:latin typeface="Courier"/>
+              </a:rPr>
+              <a:t>        </a:t>
+            </a:r>
+            <a:r>
+              <a:rPr>
+                <a:solidFill>
+                  <a:srgbClr val="657422"/>
+                </a:solidFill>
+                <a:latin typeface="Courier"/>
+              </a:rPr>
+              <a:t>fill =</a:t>
+            </a:r>
+            <a:r>
+              <a:rPr>
+                <a:solidFill>
+                  <a:srgbClr val="003B4F"/>
+                </a:solidFill>
+                <a:latin typeface="Courier"/>
+              </a:rPr>
+              <a:t> </a:t>
+            </a:r>
+            <a:r>
+              <a:rPr>
+                <a:solidFill>
+                  <a:srgbClr val="20794D"/>
+                </a:solidFill>
+                <a:latin typeface="Courier"/>
+              </a:rPr>
+              <a:t>"transparent"</a:t>
+            </a:r>
+            <a:r>
+              <a:rPr>
+                <a:solidFill>
+                  <a:srgbClr val="003B4F"/>
+                </a:solidFill>
+                <a:latin typeface="Courier"/>
+              </a:rPr>
+              <a:t>,</a:t>
+            </a:r>
+            <a:br/>
+            <a:r>
+              <a:rPr>
+                <a:solidFill>
+                  <a:srgbClr val="003B4F"/>
+                </a:solidFill>
+                <a:latin typeface="Courier"/>
+              </a:rPr>
+              <a:t>        </a:t>
+            </a:r>
+            <a:r>
+              <a:rPr>
+                <a:solidFill>
+                  <a:srgbClr val="657422"/>
+                </a:solidFill>
+                <a:latin typeface="Courier"/>
+              </a:rPr>
+              <a:t>colour =</a:t>
+            </a:r>
+            <a:r>
+              <a:rPr>
+                <a:solidFill>
+                  <a:srgbClr val="003B4F"/>
+                </a:solidFill>
+                <a:latin typeface="Courier"/>
+              </a:rPr>
+              <a:t> </a:t>
+            </a:r>
+            <a:r>
+              <a:rPr>
+                <a:solidFill>
+                  <a:srgbClr val="20794D"/>
+                </a:solidFill>
+                <a:latin typeface="Courier"/>
+              </a:rPr>
+              <a:t>"grey80"</a:t>
+            </a:r>
+            <a:br/>
+            <a:r>
+              <a:rPr>
+                <a:solidFill>
+                  <a:srgbClr val="003B4F"/>
+                </a:solidFill>
+                <a:latin typeface="Courier"/>
+              </a:rPr>
+              <a:t>    ) </a:t>
+            </a:r>
+            <a:r>
+              <a:rPr>
+                <a:solidFill>
+                  <a:srgbClr val="5E5E5E"/>
+                </a:solidFill>
+                <a:latin typeface="Courier"/>
+              </a:rPr>
+              <a:t>+</a:t>
+            </a:r>
+            <a:br/>
+            <a:r>
+              <a:rPr>
+                <a:solidFill>
+                  <a:srgbClr val="003B4F"/>
+                </a:solidFill>
+                <a:latin typeface="Courier"/>
+              </a:rPr>
+              <a:t>    layers_geom_text </a:t>
+            </a:r>
+            <a:r>
+              <a:rPr>
+                <a:solidFill>
+                  <a:srgbClr val="5E5E5E"/>
+                </a:solidFill>
+                <a:latin typeface="Courier"/>
+              </a:rPr>
+              <a:t>+</a:t>
+            </a:r>
+            <a:br/>
+            <a:r>
+              <a:rPr>
+                <a:solidFill>
+                  <a:srgbClr val="003B4F"/>
+                </a:solidFill>
+                <a:latin typeface="Courier"/>
+              </a:rPr>
+              <a:t>    layers_scale_coord </a:t>
+            </a:r>
+            <a:r>
+              <a:rPr>
+                <a:solidFill>
+                  <a:srgbClr val="5E5E5E"/>
+                </a:solidFill>
+                <a:latin typeface="Courier"/>
+              </a:rPr>
+              <a:t>+</a:t>
+            </a:r>
+            <a:br/>
+            <a:r>
+              <a:rPr>
+                <a:solidFill>
+                  <a:srgbClr val="003B4F"/>
+                </a:solidFill>
+                <a:latin typeface="Courier"/>
+              </a:rPr>
+              <a:t>    </a:t>
+            </a:r>
+            <a:r>
+              <a:rPr>
+                <a:solidFill>
+                  <a:srgbClr val="4758AB"/>
+                </a:solidFill>
+                <a:latin typeface="Courier"/>
+              </a:rPr>
+              <a:t>coord_fixed</a:t>
+            </a:r>
+            <a:r>
+              <a:rPr>
+                <a:solidFill>
+                  <a:srgbClr val="003B4F"/>
+                </a:solidFill>
+                <a:latin typeface="Courier"/>
+              </a:rPr>
+              <a:t>(</a:t>
+            </a:r>
+            <a:r>
+              <a:rPr>
+                <a:solidFill>
+                  <a:srgbClr val="657422"/>
+                </a:solidFill>
+                <a:latin typeface="Courier"/>
+              </a:rPr>
+              <a:t>expand =</a:t>
+            </a:r>
+            <a:r>
+              <a:rPr>
+                <a:solidFill>
+                  <a:srgbClr val="003B4F"/>
+                </a:solidFill>
+                <a:latin typeface="Courier"/>
+              </a:rPr>
+              <a:t> </a:t>
+            </a:r>
+            <a:r>
+              <a:rPr>
+                <a:solidFill>
+                  <a:srgbClr val="8F5902"/>
+                </a:solidFill>
+                <a:latin typeface="Courier"/>
+              </a:rPr>
+              <a:t>FALSE</a:t>
+            </a:r>
+            <a:r>
+              <a:rPr>
+                <a:solidFill>
+                  <a:srgbClr val="003B4F"/>
+                </a:solidFill>
+                <a:latin typeface="Courier"/>
+              </a:rPr>
+              <a:t>) </a:t>
+            </a:r>
+            <a:r>
+              <a:rPr>
+                <a:solidFill>
+                  <a:srgbClr val="5E5E5E"/>
+                </a:solidFill>
+                <a:latin typeface="Courier"/>
+              </a:rPr>
+              <a:t>+</a:t>
+            </a:r>
+            <a:br/>
+            <a:r>
+              <a:rPr>
+                <a:solidFill>
+                  <a:srgbClr val="003B4F"/>
+                </a:solidFill>
+                <a:latin typeface="Courier"/>
+              </a:rPr>
+              <a:t>    layers_facet_labs </a:t>
+            </a:r>
+            <a:r>
+              <a:rPr>
+                <a:solidFill>
+                  <a:srgbClr val="5E5E5E"/>
+                </a:solidFill>
+                <a:latin typeface="Courier"/>
+              </a:rPr>
+              <a:t>+</a:t>
+            </a:r>
+            <a:br/>
+            <a:r>
+              <a:rPr>
+                <a:solidFill>
+                  <a:srgbClr val="003B4F"/>
+                </a:solidFill>
+                <a:latin typeface="Courier"/>
+              </a:rPr>
+              <a:t>    layers_theme</a:t>
+            </a:r>
+            <a:br/>
+            <a:br/>
+            <a:r>
+              <a:rPr>
+                <a:solidFill>
+                  <a:srgbClr val="5E5E5E"/>
+                </a:solidFill>
+                <a:latin typeface="Courier"/>
+              </a:rPr>
+              <a:t># girafe(ggobj = p_cal_girafe)</a:t>
+            </a:r>
+          </a:p>
+        </p:txBody>
+      </p:sp>
     </p:spTree>
   </p:cSld>
 </p:sld>

--- a/slides-v2.pptx
+++ b/slides-v2.pptx
@@ -10354,27 +10354,36 @@
           </a:p>
         </p:txBody>
       </p:sp>
-      <p:sp>
-        <p:nvSpPr>
-          <p:cNvPr id="3" name="Content Placeholder 2"/>
-          <p:cNvSpPr>
-            <a:spLocks noGrp="1"/>
-          </p:cNvSpPr>
-          <p:nvPr>
-            <p:ph idx="1"/>
-          </p:nvPr>
-        </p:nvSpPr>
-        <p:spPr/>
-        <p:txBody>
-          <a:bodyPr/>
-          <a:lstStyle/>
-          <a:p>
-            <a:pPr lvl="0" indent="0" marL="0">
-              <a:buNone/>
-            </a:pPr>
-          </a:p>
-        </p:txBody>
-      </p:sp>
+      <p:pic>
+        <p:nvPicPr>
+          <p:cNvPr descr="assets/notability-v2/transparent-helper-left.png" id="0" name="Picture 1"/>
+          <p:cNvPicPr>
+            <a:picLocks noGrp="1" noChangeAspect="1"/>
+          </p:cNvPicPr>
+          <p:nvPr/>
+        </p:nvPicPr>
+        <p:blipFill>
+          <a:blip r:embed="rId2"/>
+          <a:stretch>
+            <a:fillRect/>
+          </a:stretch>
+        </p:blipFill>
+        <p:spPr bwMode="auto">
+          <a:xfrm>
+            <a:off x="2184400" y="1193800"/>
+            <a:ext cx="4775200" cy="3390900"/>
+          </a:xfrm>
+          <a:prstGeom prst="rect">
+            <a:avLst/>
+          </a:prstGeom>
+          <a:noFill/>
+          <a:ln w="9525">
+            <a:noFill/>
+            <a:headEnd/>
+            <a:tailEnd/>
+          </a:ln>
+        </p:spPr>
+      </p:pic>
     </p:spTree>
   </p:cSld>
 </p:sld>
@@ -13395,27 +13404,36 @@
           </a:p>
         </p:txBody>
       </p:sp>
-      <p:sp>
-        <p:nvSpPr>
-          <p:cNvPr id="3" name="Content Placeholder 2"/>
-          <p:cNvSpPr>
-            <a:spLocks noGrp="1"/>
-          </p:cNvSpPr>
-          <p:nvPr>
-            <p:ph idx="1"/>
-          </p:nvPr>
-        </p:nvSpPr>
-        <p:spPr/>
-        <p:txBody>
-          <a:bodyPr/>
-          <a:lstStyle/>
-          <a:p>
-            <a:pPr lvl="0" indent="0" marL="0">
-              <a:buNone/>
-            </a:pPr>
-          </a:p>
-        </p:txBody>
-      </p:sp>
+      <p:pic>
+        <p:nvPicPr>
+          <p:cNvPr descr="assets/notability-v2/code-to-helper-01.png" id="0" name="Picture 1"/>
+          <p:cNvPicPr>
+            <a:picLocks noGrp="1" noChangeAspect="1"/>
+          </p:cNvPicPr>
+          <p:nvPr/>
+        </p:nvPicPr>
+        <p:blipFill>
+          <a:blip r:embed="rId2"/>
+          <a:stretch>
+            <a:fillRect/>
+          </a:stretch>
+        </p:blipFill>
+        <p:spPr bwMode="auto">
+          <a:xfrm>
+            <a:off x="2184400" y="1193800"/>
+            <a:ext cx="4775200" cy="3390900"/>
+          </a:xfrm>
+          <a:prstGeom prst="rect">
+            <a:avLst/>
+          </a:prstGeom>
+          <a:noFill/>
+          <a:ln w="9525">
+            <a:noFill/>
+            <a:headEnd/>
+            <a:tailEnd/>
+          </a:ln>
+        </p:spPr>
+      </p:pic>
     </p:spTree>
   </p:cSld>
 </p:sld>
@@ -13463,27 +13481,36 @@
           </a:p>
         </p:txBody>
       </p:sp>
-      <p:sp>
-        <p:nvSpPr>
-          <p:cNvPr id="3" name="Content Placeholder 2"/>
-          <p:cNvSpPr>
-            <a:spLocks noGrp="1"/>
-          </p:cNvSpPr>
-          <p:nvPr>
-            <p:ph idx="1"/>
-          </p:nvPr>
-        </p:nvSpPr>
-        <p:spPr/>
-        <p:txBody>
-          <a:bodyPr/>
-          <a:lstStyle/>
-          <a:p>
-            <a:pPr lvl="0" indent="0" marL="0">
-              <a:buNone/>
-            </a:pPr>
-          </a:p>
-        </p:txBody>
-      </p:sp>
+      <p:pic>
+        <p:nvPicPr>
+          <p:cNvPr descr="assets/notability-v2/code-to-helper-03.png" id="0" name="Picture 1"/>
+          <p:cNvPicPr>
+            <a:picLocks noGrp="1" noChangeAspect="1"/>
+          </p:cNvPicPr>
+          <p:nvPr/>
+        </p:nvPicPr>
+        <p:blipFill>
+          <a:blip r:embed="rId2"/>
+          <a:stretch>
+            <a:fillRect/>
+          </a:stretch>
+        </p:blipFill>
+        <p:spPr bwMode="auto">
+          <a:xfrm>
+            <a:off x="2184400" y="1193800"/>
+            <a:ext cx="4775200" cy="3390900"/>
+          </a:xfrm>
+          <a:prstGeom prst="rect">
+            <a:avLst/>
+          </a:prstGeom>
+          <a:noFill/>
+          <a:ln w="9525">
+            <a:noFill/>
+            <a:headEnd/>
+            <a:tailEnd/>
+          </a:ln>
+        </p:spPr>
+      </p:pic>
     </p:spTree>
   </p:cSld>
 </p:sld>
@@ -13531,27 +13558,36 @@
           </a:p>
         </p:txBody>
       </p:sp>
-      <p:sp>
-        <p:nvSpPr>
-          <p:cNvPr id="3" name="Content Placeholder 2"/>
-          <p:cNvSpPr>
-            <a:spLocks noGrp="1"/>
-          </p:cNvSpPr>
-          <p:nvPr>
-            <p:ph idx="1"/>
-          </p:nvPr>
-        </p:nvSpPr>
-        <p:spPr/>
-        <p:txBody>
-          <a:bodyPr/>
-          <a:lstStyle/>
-          <a:p>
-            <a:pPr lvl="0" indent="0" marL="0">
-              <a:buNone/>
-            </a:pPr>
-          </a:p>
-        </p:txBody>
-      </p:sp>
+      <p:pic>
+        <p:nvPicPr>
+          <p:cNvPr descr="assets/temp/fig-ggtime-teaser.png" id="0" name="Picture 1"/>
+          <p:cNvPicPr>
+            <a:picLocks noGrp="1" noChangeAspect="1"/>
+          </p:cNvPicPr>
+          <p:nvPr/>
+        </p:nvPicPr>
+        <p:blipFill>
+          <a:blip r:embed="rId2"/>
+          <a:stretch>
+            <a:fillRect/>
+          </a:stretch>
+        </p:blipFill>
+        <p:spPr bwMode="auto">
+          <a:xfrm>
+            <a:off x="457200" y="1485900"/>
+            <a:ext cx="8229600" cy="2806700"/>
+          </a:xfrm>
+          <a:prstGeom prst="rect">
+            <a:avLst/>
+          </a:prstGeom>
+          <a:noFill/>
+          <a:ln w="9525">
+            <a:noFill/>
+            <a:headEnd/>
+            <a:tailEnd/>
+          </a:ln>
+        </p:spPr>
+      </p:pic>
     </p:spTree>
   </p:cSld>
 </p:sld>
@@ -13594,32 +13630,41 @@
             </a:pPr>
             <a:r>
               <a:rPr/>
-              <a:t>Stay calm, and…</a:t>
+              <a:t>Keep calm, and…</a:t>
             </a:r>
           </a:p>
         </p:txBody>
       </p:sp>
-      <p:sp>
-        <p:nvSpPr>
-          <p:cNvPr id="3" name="Content Placeholder 2"/>
-          <p:cNvSpPr>
-            <a:spLocks noGrp="1"/>
-          </p:cNvSpPr>
-          <p:nvPr>
-            <p:ph idx="1"/>
-          </p:nvPr>
-        </p:nvSpPr>
-        <p:spPr/>
-        <p:txBody>
-          <a:bodyPr/>
-          <a:lstStyle/>
-          <a:p>
-            <a:pPr lvl="0" indent="0" marL="0">
-              <a:buNone/>
-            </a:pPr>
-          </a:p>
-        </p:txBody>
-      </p:sp>
+      <p:pic>
+        <p:nvPicPr>
+          <p:cNvPr descr="assets/notability-v2/principle-summary-v2-with-text.jpg" id="0" name="Picture 1"/>
+          <p:cNvPicPr>
+            <a:picLocks noGrp="1" noChangeAspect="1"/>
+          </p:cNvPicPr>
+          <p:nvPr/>
+        </p:nvPicPr>
+        <p:blipFill>
+          <a:blip r:embed="rId2"/>
+          <a:stretch>
+            <a:fillRect/>
+          </a:stretch>
+        </p:blipFill>
+        <p:spPr bwMode="auto">
+          <a:xfrm>
+            <a:off x="2184400" y="1193800"/>
+            <a:ext cx="4775200" cy="3390900"/>
+          </a:xfrm>
+          <a:prstGeom prst="rect">
+            <a:avLst/>
+          </a:prstGeom>
+          <a:noFill/>
+          <a:ln w="9525">
+            <a:noFill/>
+            <a:headEnd/>
+            <a:tailEnd/>
+          </a:ln>
+        </p:spPr>
+      </p:pic>
     </p:spTree>
   </p:cSld>
 </p:sld>
@@ -13967,7 +14012,7 @@
       </p:sp>
       <p:pic>
         <p:nvPicPr>
-          <p:cNvPr descr="assets/code-blocks/ggweekly-README-year-week-1.png" id="0" name="Picture 1"/>
+          <p:cNvPr descr="assets/code-blocks/ggweekly-README-year-week-1-cropped.png" id="0" name="Picture 1"/>
           <p:cNvPicPr>
             <a:picLocks noGrp="1" noChangeAspect="1"/>
           </p:cNvPicPr>
@@ -13981,8 +14026,8 @@
         </p:blipFill>
         <p:spPr bwMode="auto">
           <a:xfrm>
-            <a:off x="4800600" y="1625600"/>
-            <a:ext cx="3695700" cy="2959100"/>
+            <a:off x="4635500" y="1968500"/>
+            <a:ext cx="4038600" cy="2273300"/>
           </a:xfrm>
           <a:prstGeom prst="rect">
             <a:avLst/>

--- a/slides-v2.pptx
+++ b/slides-v2.pptx
@@ -4020,27 +4020,36 @@
           <a:chExt cx="0" cy="0"/>
         </a:xfrm>
       </p:grpSpPr>
-      <p:sp>
-        <p:nvSpPr>
-          <p:cNvPr id="3" name="Content Placeholder 2"/>
-          <p:cNvSpPr>
-            <a:spLocks noGrp="1"/>
-          </p:cNvSpPr>
-          <p:nvPr>
-            <p:ph idx="1" sz="half"/>
-          </p:nvPr>
-        </p:nvSpPr>
-        <p:spPr/>
-        <p:txBody>
-          <a:bodyPr/>
-          <a:lstStyle/>
-          <a:p>
-            <a:pPr lvl="0" indent="0" marL="0">
-              <a:buNone/>
-            </a:pPr>
-          </a:p>
-        </p:txBody>
-      </p:sp>
+      <p:pic>
+        <p:nvPicPr>
+          <p:cNvPr descr="assets/temp/ggtilecal-crop.png" id="0" name="Picture 1"/>
+          <p:cNvPicPr>
+            <a:picLocks noGrp="1" noChangeAspect="1"/>
+          </p:cNvPicPr>
+          <p:nvPr/>
+        </p:nvPicPr>
+        <p:blipFill>
+          <a:blip r:embed="rId2"/>
+          <a:stretch>
+            <a:fillRect/>
+          </a:stretch>
+        </p:blipFill>
+        <p:spPr bwMode="auto">
+          <a:xfrm>
+            <a:off x="914400" y="1193800"/>
+            <a:ext cx="3124200" cy="3390900"/>
+          </a:xfrm>
+          <a:prstGeom prst="rect">
+            <a:avLst/>
+          </a:prstGeom>
+          <a:noFill/>
+          <a:ln w="9525">
+            <a:noFill/>
+            <a:headEnd/>
+            <a:tailEnd/>
+          </a:ln>
+        </p:spPr>
+      </p:pic>
       <p:sp>
         <p:nvSpPr>
           <p:cNvPr id="4" name="Content Placeholder 3"/>
